--- a/Planning docs/Slides/lesson-3-1-teacher-slides.pptx
+++ b/Planning docs/Slides/lesson-3-1-teacher-slides.pptx
@@ -20,9 +20,10 @@
     <p:sldId id="268" r:id="rId14"/>
     <p:sldId id="269" r:id="rId15"/>
     <p:sldId id="270" r:id="rId16"/>
+    <p:sldId id="271" r:id="rId17"/>
   </p:sldIdLst>
   <p:notesMasterIdLst>
-    <p:notesMasterId r:id="rId17"/>
+    <p:notesMasterId r:id="rId18"/>
   </p:notesMasterIdLst>
   <p:sldSz cx="9144000" cy="5143500"/>
   <p:notesSz cx="5143500" cy="9144000"/>
@@ -516,7 +517,7 @@
           <a:p>
             <a:r>
               <a:rPr lang="en-US" dirty="0"/>
-              <a:t>Title slide for Week 3 Day 1. Flat Stanley.</a:t>
+              <a:t>Lesson 3.1. Reading: Chapter 3.</a:t>
             </a:r>
             <a:endParaRPr lang="en-US" dirty="0"/>
           </a:p>
@@ -604,7 +605,7 @@
           <a:p>
             <a:r>
               <a:rPr lang="en-US" dirty="0"/>
-              <a:t>Review morphology focus. Have students identify the base word and affix in each example.</a:t>
+              <a:t>Each word appears in the chapters read this week, in the author’s own sentence.</a:t>
             </a:r>
             <a:endParaRPr lang="en-US" dirty="0"/>
           </a:p>
@@ -692,7 +693,7 @@
           <a:p>
             <a:r>
               <a:rPr lang="en-US" dirty="0"/>
-              <a:t>Go through each vocabulary word. For flip cards, have students guess the definition before revealing.</a:t>
+              <a:t>Answers: board, Arthur, doctor, Stanley</a:t>
             </a:r>
             <a:endParaRPr lang="en-US" dirty="0"/>
           </a:p>
@@ -780,7 +781,7 @@
           <a:p>
             <a:r>
               <a:rPr lang="en-US" dirty="0"/>
-              <a:t>Give students time to sort the words. Use the chat or paper to organize.</a:t>
+              <a:t>Answers: board, Arthur, doctor, Stanley</a:t>
             </a:r>
             <a:endParaRPr lang="en-US" dirty="0"/>
           </a:p>
@@ -868,7 +869,7 @@
           <a:p>
             <a:r>
               <a:rPr lang="en-US" dirty="0"/>
-              <a:t>Review each column. Ask: what pattern do you see in each group?</a:t>
+              <a:t>silent-e: broke, slide, kite, stone | closed: slid, trip, stuck, cross</a:t>
             </a:r>
             <a:endParaRPr lang="en-US" dirty="0"/>
           </a:p>
@@ -956,7 +957,7 @@
           <a:p>
             <a:r>
               <a:rPr lang="en-US" dirty="0"/>
-              <a:t>Reading focus slide. Use pause-and-think questions during reading. Copywork can be done after reading.</a:t>
+              <a:t>silent-e: broke, slide, kite, stone | closed: slid, trip, stuck, cross</a:t>
             </a:r>
             <a:endParaRPr lang="en-US" dirty="0"/>
           </a:p>
@@ -1044,7 +1045,7 @@
           <a:p>
             <a:r>
               <a:rPr lang="en-US" dirty="0"/>
-              <a:t>Transition to the writing workshop assignment in Canvas.</a:t>
+              <a:t>Read the chapters, then return to the pause questions.</a:t>
             </a:r>
             <a:endParaRPr lang="en-US" dirty="0"/>
           </a:p>
@@ -1068,6 +1069,94 @@
             <a:fld id="{F7021451-1387-4CA6-816F-3879F97B5CBC}" type="slidenum">
               <a:rPr lang="en-US"/>
               <a:t>15</a:t>
+            </a:fld>
+            <a:endParaRPr lang="en-US"/>
+          </a:p>
+        </p:txBody>
+      </p:sp>
+    </p:spTree>
+    <p:extLst>
+      <p:ext uri="{BB962C8B-B14F-4D97-AF65-F5344CB8AC3E}">
+        <p14:creationId xmlns:p14="http://schemas.microsoft.com/office/powerpoint/2010/main" val="1024086991"/>
+      </p:ext>
+    </p:extLst>
+  </p:cSld>
+  <p:clrMapOvr>
+    <a:masterClrMapping/>
+  </p:clrMapOvr>
+</p:notes>
+</file>
+
+<file path=ppt/notesSlides/notesSlide16.xml><?xml version="1.0" encoding="utf-8"?>
+<p:notes xmlns:a="http://schemas.openxmlformats.org/drawingml/2006/main" xmlns:r="http://schemas.openxmlformats.org/officeDocument/2006/relationships" xmlns:p="http://schemas.openxmlformats.org/presentationml/2006/main">
+  <p:cSld>
+    <p:spTree>
+      <p:nvGrpSpPr>
+        <p:cNvPr id="1" name=""/>
+        <p:cNvGrpSpPr/>
+        <p:nvPr/>
+      </p:nvGrpSpPr>
+      <p:grpSpPr>
+        <a:xfrm>
+          <a:off x="0" y="0"/>
+          <a:ext cx="0" cy="0"/>
+          <a:chOff x="0" y="0"/>
+          <a:chExt cx="0" cy="0"/>
+        </a:xfrm>
+      </p:grpSpPr>
+      <p:sp>
+        <p:nvSpPr>
+          <p:cNvPr id="2" name="Slide Image Placeholder 1"/>
+          <p:cNvSpPr>
+            <a:spLocks noGrp="1" noRot="1" noChangeAspect="1"/>
+          </p:cNvSpPr>
+          <p:nvPr>
+            <p:ph type="sldImg"/>
+          </p:nvPr>
+        </p:nvSpPr>
+        <p:spPr/>
+      </p:sp>
+      <p:sp>
+        <p:nvSpPr>
+          <p:cNvPr id="3" name="Notes Placeholder 2"/>
+          <p:cNvSpPr>
+            <a:spLocks noGrp="1"/>
+          </p:cNvSpPr>
+          <p:nvPr>
+            <p:ph type="body" idx="1"/>
+          </p:nvPr>
+        </p:nvSpPr>
+        <p:spPr/>
+        <p:txBody>
+          <a:bodyPr/>
+          <a:lstStyle/>
+          <a:p>
+            <a:r>
+              <a:rPr lang="en-US" dirty="0"/>
+              <a:t>Writer’s Workshop stage for the week.</a:t>
+            </a:r>
+            <a:endParaRPr lang="en-US" dirty="0"/>
+          </a:p>
+        </p:txBody>
+      </p:sp>
+      <p:sp>
+        <p:nvSpPr>
+          <p:cNvPr id="4" name="Slide Number Placeholder 3"/>
+          <p:cNvSpPr>
+            <a:spLocks noGrp="1"/>
+          </p:cNvSpPr>
+          <p:nvPr>
+            <p:ph type="sldNum" sz="quarter" idx="10"/>
+          </p:nvPr>
+        </p:nvSpPr>
+        <p:spPr/>
+        <p:txBody>
+          <a:bodyPr/>
+          <a:lstStyle/>
+          <a:p>
+            <a:fld id="{F7021451-1387-4CA6-816F-3879F97B5CBC}" type="slidenum">
+              <a:rPr lang="en-US"/>
+              <a:t>16</a:t>
             </a:fld>
             <a:endParaRPr lang="en-US"/>
           </a:p>
@@ -1132,7 +1221,7 @@
           <a:p>
             <a:r>
               <a:rPr lang="en-US" dirty="0"/>
-              <a:t>Read the prompt aloud once. Give students about 1 minute to read it again silently and think. Remind them: there is no wrong answer — just write what comes to mind. Advance to the writing slide when ready.</a:t>
+              <a:t>Read the prompt aloud. Give students a moment to think before writing.</a:t>
             </a:r>
             <a:endParaRPr lang="en-US" dirty="0"/>
           </a:p>
@@ -1220,7 +1309,7 @@
           <a:p>
             <a:r>
               <a:rPr lang="en-US" dirty="0"/>
-              <a:t>Set a 5-minute timer. Walk the room quietly. If a student stops, gently encourage them: "Keep writing — even one more sentence." The goal is sustained writing, not perfection. Do not interrupt to correct spelling or grammar during this time.</a:t>
+              <a:t>Five minutes of sustained writing. Stamina over polish. Do not correct spelling now.</a:t>
             </a:r>
             <a:endParaRPr lang="en-US" dirty="0"/>
           </a:p>
@@ -1308,7 +1397,7 @@
           <a:p>
             <a:r>
               <a:rPr lang="en-US" dirty="0"/>
-              <a:t>Set a 1-minute timer. Remind students: we are only fixing ONE thing today — Did I use at least two different senses (sight, sound, touch, smell) in my writing?. They should also do a quick conventions check (capitals, punctuation, spelling). They do NOT need to rewrite — just fix and improve. Revision = improving ideas; Editing = fixing conventions. Keep them separate in your language.</a:t>
+              <a:t>One fix only. Editing is conventions; revision is ideas. Name which one you are asking for.</a:t>
             </a:r>
             <a:endParaRPr lang="en-US" dirty="0"/>
           </a:p>
@@ -1396,7 +1485,7 @@
           <a:p>
             <a:r>
               <a:rPr lang="en-US" dirty="0"/>
-              <a:t>Call on 3-5 students to share. Respond with genuine interest: "I love how you described that" or "That's a really interesting idea." Avoid correcting grammar or spelling during share time — this is about celebrating writing. If time is short, have 2-3 students share in chat instead.</a:t>
+              <a:t>Two or three volunteers. Praise something specific in each.</a:t>
             </a:r>
             <a:endParaRPr lang="en-US" dirty="0"/>
           </a:p>
@@ -1484,7 +1573,7 @@
           <a:p>
             <a:r>
               <a:rPr lang="en-US" dirty="0"/>
-              <a:t>Review the big question and reading lens with students before reading.</a:t>
+              <a:t>Reading lens: Good readers pay attention to how events affect characters . When something happens in a story, it changes how a character feels, thinks, or acts.</a:t>
             </a:r>
             <a:endParaRPr lang="en-US" dirty="0"/>
           </a:p>
@@ -1572,7 +1661,8 @@
           <a:p>
             <a:r>
               <a:rPr lang="en-US" dirty="0"/>
-              <a:t>Read the model sentence aloud. Ask students: what do you notice about the punctuation and capitalization?</a:t>
+              <a:t>Corrected: Corrected: 
+Look for: Stanley would not speak to his brother that evening , and at bedtime he was still very cross .</a:t>
             </a:r>
             <a:endParaRPr lang="en-US" dirty="0"/>
           </a:p>
@@ -1660,7 +1750,8 @@
           <a:p>
             <a:r>
               <a:rPr lang="en-US" dirty="0"/>
-              <a:t>Give students 1-2 minutes to fix the sentence. Walk the room and check.</a:t>
+              <a:t>Corrected: Corrected: 
+Look for: Stanley would not speak to his brother that evening , and at bedtime he was still very cross .</a:t>
             </a:r>
             <a:endParaRPr lang="en-US" dirty="0"/>
           </a:p>
@@ -1748,7 +1839,7 @@
           <a:p>
             <a:r>
               <a:rPr lang="en-US" dirty="0"/>
-              <a:t>Reveal the corrected version. Point out each fix: capitalization, punctuation, spelling.</a:t>
+              <a:t>Break the word into base + word part. Ask what the part adds to the meaning.</a:t>
             </a:r>
             <a:endParaRPr lang="en-US" dirty="0"/>
           </a:p>
@@ -2103,7 +2194,7 @@
     <p:bg>
       <p:bgPr>
         <a:solidFill>
-          <a:srgbClr val="E8A317"/>
+          <a:srgbClr val="0E1C42"/>
         </a:solidFill>
       </p:bgPr>
     </p:bg>
@@ -2129,8 +2220,8 @@
         </p:nvSpPr>
         <p:spPr>
           <a:xfrm>
-            <a:off x="457200" y="914400"/>
-            <a:ext cx="8229600" cy="1097280"/>
+            <a:off x="0" y="822960"/>
+            <a:ext cx="9144000" cy="822960"/>
           </a:xfrm>
           <a:prstGeom prst="rect">
             <a:avLst/>
@@ -2146,7 +2237,43 @@
               <a:buNone/>
             </a:pPr>
             <a:r>
-              <a:rPr lang="en-US" sz="4000" b="1" dirty="0">
+              <a:rPr lang="en-US" sz="5200" dirty="0">
+                <a:solidFill>
+                  <a:srgbClr val="000000"/>
+                </a:solidFill>
+              </a:rPr>
+              <a:t>⭐</a:t>
+            </a:r>
+            <a:endParaRPr lang="en-US" sz="5200" dirty="0"/>
+          </a:p>
+        </p:txBody>
+      </p:sp>
+      <p:sp>
+        <p:nvSpPr>
+          <p:cNvPr id="3" name="Text 1"/>
+          <p:cNvSpPr/>
+          <p:nvPr/>
+        </p:nvSpPr>
+        <p:spPr>
+          <a:xfrm>
+            <a:off x="457200" y="1691640"/>
+            <a:ext cx="8229600" cy="566928"/>
+          </a:xfrm>
+          <a:prstGeom prst="rect">
+            <a:avLst/>
+          </a:prstGeom>
+          <a:noFill/>
+          <a:ln/>
+        </p:spPr>
+        <p:txBody>
+          <a:bodyPr wrap="square" lIns="0" tIns="0" rIns="0" bIns="0" rtlCol="0" anchor="ctr"/>
+          <a:lstStyle/>
+          <a:p>
+            <a:pPr algn="ctr" indent="0" marL="0">
+              <a:buNone/>
+            </a:pPr>
+            <a:r>
+              <a:rPr lang="en-US" sz="3400" b="1" dirty="0">
                 <a:solidFill>
                   <a:srgbClr val="FFFFFF"/>
                 </a:solidFill>
@@ -2154,22 +2281,22 @@
                 <a:ea typeface="Calibri" pitchFamily="34" charset="-122"/>
                 <a:cs typeface="Calibri" pitchFamily="34" charset="-120"/>
               </a:rPr>
-              <a:t>📘  Week 3 · Day 1</a:t>
-            </a:r>
-            <a:endParaRPr lang="en-US" sz="4000" dirty="0"/>
-          </a:p>
-        </p:txBody>
-      </p:sp>
-      <p:sp>
-        <p:nvSpPr>
-          <p:cNvPr id="3" name="Text 1"/>
-          <p:cNvSpPr/>
-          <p:nvPr/>
-        </p:nvSpPr>
-        <p:spPr>
-          <a:xfrm>
-            <a:off x="457200" y="2103120"/>
-            <a:ext cx="8229600" cy="731520"/>
+              <a:t>Flat Stanley</a:t>
+            </a:r>
+            <a:endParaRPr lang="en-US" sz="3400" dirty="0"/>
+          </a:p>
+        </p:txBody>
+      </p:sp>
+      <p:sp>
+        <p:nvSpPr>
+          <p:cNvPr id="4" name="Text 2"/>
+          <p:cNvSpPr/>
+          <p:nvPr/>
+        </p:nvSpPr>
+        <p:spPr>
+          <a:xfrm>
+            <a:off x="457200" y="2331720"/>
+            <a:ext cx="8229600" cy="411480"/>
           </a:xfrm>
           <a:prstGeom prst="rect">
             <a:avLst/>
@@ -2185,30 +2312,30 @@
               <a:buNone/>
             </a:pPr>
             <a:r>
-              <a:rPr lang="en-US" sz="1800" dirty="0">
-                <a:solidFill>
-                  <a:srgbClr val="F5D76E"/>
-                </a:solidFill>
-                <a:latin typeface="Calibri" pitchFamily="34" charset="0"/>
-                <a:ea typeface="Calibri" pitchFamily="34" charset="-122"/>
-                <a:cs typeface="Calibri" pitchFamily="34" charset="-120"/>
-              </a:rPr>
-              <a:t>Flat Stanley — Lesson 3.1</a:t>
-            </a:r>
-            <a:endParaRPr lang="en-US" sz="1800" dirty="0"/>
-          </a:p>
-        </p:txBody>
-      </p:sp>
-      <p:sp>
-        <p:nvSpPr>
-          <p:cNvPr id="4" name="Text 2"/>
-          <p:cNvSpPr/>
-          <p:nvPr/>
-        </p:nvSpPr>
-        <p:spPr>
-          <a:xfrm>
-            <a:off x="457200" y="4114800"/>
-            <a:ext cx="8229600" cy="457200"/>
+              <a:rPr lang="en-US" sz="2000" dirty="0">
+                <a:solidFill>
+                  <a:srgbClr val="55C8E8"/>
+                </a:solidFill>
+                <a:latin typeface="Calibri" pitchFamily="34" charset="0"/>
+                <a:ea typeface="Calibri" pitchFamily="34" charset="-122"/>
+                <a:cs typeface="Calibri" pitchFamily="34" charset="-120"/>
+              </a:rPr>
+              <a:t>Lesson 3.1  ·  Chapter 3</a:t>
+            </a:r>
+            <a:endParaRPr lang="en-US" sz="2000" dirty="0"/>
+          </a:p>
+        </p:txBody>
+      </p:sp>
+      <p:sp>
+        <p:nvSpPr>
+          <p:cNvPr id="5" name="Text 3"/>
+          <p:cNvSpPr/>
+          <p:nvPr/>
+        </p:nvSpPr>
+        <p:spPr>
+          <a:xfrm>
+            <a:off x="457200" y="2880360"/>
+            <a:ext cx="8229600" cy="320040"/>
           </a:xfrm>
           <a:prstGeom prst="rect">
             <a:avLst/>
@@ -2224,17 +2351,17 @@
               <a:buNone/>
             </a:pPr>
             <a:r>
-              <a:rPr lang="en-US" sz="1300" dirty="0">
-                <a:solidFill>
-                  <a:srgbClr val="AAAAAA"/>
-                </a:solidFill>
-                <a:latin typeface="Calibri" pitchFamily="34" charset="0"/>
-                <a:ea typeface="Calibri" pitchFamily="34" charset="-122"/>
-                <a:cs typeface="Calibri" pitchFamily="34" charset="-120"/>
-              </a:rPr>
-              <a:t>Optima Academy Online · 3rd Grade ELA</a:t>
-            </a:r>
-            <a:endParaRPr lang="en-US" sz="1300" dirty="0"/>
+              <a:rPr lang="en-US" sz="1400" dirty="0">
+                <a:solidFill>
+                  <a:srgbClr val="C9BCE4"/>
+                </a:solidFill>
+                <a:latin typeface="Calibri" pitchFamily="34" charset="0"/>
+                <a:ea typeface="Calibri" pitchFamily="34" charset="-122"/>
+                <a:cs typeface="Calibri" pitchFamily="34" charset="-120"/>
+              </a:rPr>
+              <a:t>Grade 3 ELA  ·  Virtue: Courage</a:t>
+            </a:r>
+            <a:endParaRPr lang="en-US" sz="1400" dirty="0"/>
           </a:p>
         </p:txBody>
       </p:sp>
@@ -2272,65 +2399,62 @@
       </p:grpSpPr>
       <p:sp>
         <p:nvSpPr>
-          <p:cNvPr id="2" name="Text 0"/>
-          <p:cNvSpPr/>
-          <p:nvPr/>
-        </p:nvSpPr>
-        <p:spPr>
-          <a:xfrm>
-            <a:off x="365760" y="164592"/>
-            <a:ext cx="8412480" cy="566928"/>
-          </a:xfrm>
-          <a:prstGeom prst="rect">
-            <a:avLst/>
-          </a:prstGeom>
-          <a:noFill/>
-          <a:ln/>
-        </p:spPr>
-        <p:txBody>
-          <a:bodyPr wrap="square" lIns="0" tIns="0" rIns="0" bIns="0" rtlCol="0" anchor="ctr"/>
-          <a:lstStyle/>
-          <a:p>
-            <a:pPr algn="l" indent="0" marL="0">
-              <a:buNone/>
-            </a:pPr>
-            <a:r>
-              <a:rPr lang="en-US" sz="2800" b="1" dirty="0">
-                <a:solidFill>
-                  <a:srgbClr val="0E1C42"/>
-                </a:solidFill>
-                <a:latin typeface="Calibri" pitchFamily="34" charset="0"/>
-                <a:ea typeface="Calibri" pitchFamily="34" charset="-122"/>
-                <a:cs typeface="Calibri" pitchFamily="34" charset="-120"/>
-              </a:rPr>
-              <a:t>🌱 Morphology: Prefix un- means not</a:t>
-            </a:r>
-            <a:endParaRPr lang="en-US" sz="2800" dirty="0"/>
-          </a:p>
-        </p:txBody>
-      </p:sp>
-      <p:sp>
-        <p:nvSpPr>
-          <p:cNvPr id="3" name="Shape 1"/>
-          <p:cNvSpPr/>
-          <p:nvPr/>
-        </p:nvSpPr>
-        <p:spPr>
-          <a:xfrm>
-            <a:off x="365760" y="749808"/>
-            <a:ext cx="8412480" cy="0"/>
-          </a:xfrm>
-          <a:prstGeom prst="line">
-            <a:avLst/>
-          </a:prstGeom>
-          <a:noFill/>
-          <a:ln w="19050">
-            <a:solidFill>
-              <a:srgbClr val="8B6FC0"/>
-            </a:solidFill>
-            <a:prstDash val="solid"/>
-          </a:ln>
-        </p:spPr>
+          <p:cNvPr id="2" name="Shape 0"/>
+          <p:cNvSpPr/>
+          <p:nvPr/>
+        </p:nvSpPr>
+        <p:spPr>
+          <a:xfrm>
+            <a:off x="0" y="0"/>
+            <a:ext cx="9144000" cy="566928"/>
+          </a:xfrm>
+          <a:prstGeom prst="rect">
+            <a:avLst/>
+          </a:prstGeom>
+          <a:solidFill>
+            <a:srgbClr val="55C8E8"/>
+          </a:solidFill>
+          <a:ln/>
+        </p:spPr>
+      </p:sp>
+      <p:sp>
+        <p:nvSpPr>
+          <p:cNvPr id="3" name="Text 1"/>
+          <p:cNvSpPr/>
+          <p:nvPr/>
+        </p:nvSpPr>
+        <p:spPr>
+          <a:xfrm>
+            <a:off x="365760" y="54864"/>
+            <a:ext cx="8412480" cy="457200"/>
+          </a:xfrm>
+          <a:prstGeom prst="rect">
+            <a:avLst/>
+          </a:prstGeom>
+          <a:noFill/>
+          <a:ln/>
+        </p:spPr>
+        <p:txBody>
+          <a:bodyPr wrap="square" lIns="0" tIns="0" rIns="0" bIns="0" rtlCol="0" anchor="ctr"/>
+          <a:lstStyle/>
+          <a:p>
+            <a:pPr indent="0" marL="0">
+              <a:buNone/>
+            </a:pPr>
+            <a:r>
+              <a:rPr lang="en-US" sz="2200" b="1" dirty="0">
+                <a:solidFill>
+                  <a:srgbClr val="FFFFFF"/>
+                </a:solidFill>
+                <a:latin typeface="Calibri" pitchFamily="34" charset="0"/>
+                <a:ea typeface="Calibri" pitchFamily="34" charset="-122"/>
+                <a:cs typeface="Calibri" pitchFamily="34" charset="-120"/>
+              </a:rPr>
+              <a:t>🔤  Vocabulary</a:t>
+            </a:r>
+            <a:endParaRPr lang="en-US" sz="2200" dirty="0"/>
+          </a:p>
+        </p:txBody>
       </p:sp>
       <p:sp>
         <p:nvSpPr>
@@ -2340,32 +2464,32 @@
         </p:nvSpPr>
         <p:spPr>
           <a:xfrm>
-            <a:off x="457200" y="1005840"/>
-            <a:ext cx="8046720" cy="292608"/>
-          </a:xfrm>
-          <a:prstGeom prst="rect">
-            <a:avLst/>
-          </a:prstGeom>
-          <a:noFill/>
-          <a:ln/>
-        </p:spPr>
-        <p:txBody>
-          <a:bodyPr wrap="square" lIns="0" tIns="0" rIns="0" bIns="0" rtlCol="0" anchor="ctr"/>
-          <a:lstStyle/>
-          <a:p>
-            <a:pPr indent="0" marL="0">
-              <a:buNone/>
-            </a:pPr>
-            <a:r>
-              <a:rPr lang="en-US" sz="1100" b="1" spc="200" kern="0" dirty="0">
-                <a:solidFill>
-                  <a:srgbClr val="8B6FC0"/>
-                </a:solidFill>
-                <a:latin typeface="Calibri" pitchFamily="34" charset="0"/>
-                <a:ea typeface="Calibri" pitchFamily="34" charset="-122"/>
-                <a:cs typeface="Calibri" pitchFamily="34" charset="-120"/>
-              </a:rPr>
-              <a:t>WORD BUILDING</a:t>
+            <a:off x="365760" y="804672"/>
+            <a:ext cx="8229600" cy="237744"/>
+          </a:xfrm>
+          <a:prstGeom prst="rect">
+            <a:avLst/>
+          </a:prstGeom>
+          <a:noFill/>
+          <a:ln/>
+        </p:spPr>
+        <p:txBody>
+          <a:bodyPr wrap="square" lIns="0" tIns="0" rIns="0" bIns="0" rtlCol="0" anchor="ctr"/>
+          <a:lstStyle/>
+          <a:p>
+            <a:pPr indent="0" marL="0">
+              <a:buNone/>
+            </a:pPr>
+            <a:r>
+              <a:rPr lang="en-US" sz="1100" b="1" spc="100" kern="0" dirty="0">
+                <a:solidFill>
+                  <a:srgbClr val="55C8E8"/>
+                </a:solidFill>
+                <a:latin typeface="Calibri" pitchFamily="34" charset="0"/>
+                <a:ea typeface="Calibri" pitchFamily="34" charset="-122"/>
+                <a:cs typeface="Calibri" pitchFamily="34" charset="-120"/>
+              </a:rPr>
+              <a:t>THIS WEEK'S WORDS</a:t>
             </a:r>
             <a:endParaRPr lang="en-US" sz="1100" dirty="0"/>
           </a:p>
@@ -2379,16 +2503,16 @@
         </p:nvSpPr>
         <p:spPr>
           <a:xfrm>
-            <a:off x="457200" y="1371600"/>
-            <a:ext cx="8229600" cy="457200"/>
+            <a:off x="365760" y="1097280"/>
+            <a:ext cx="8412480" cy="658368"/>
           </a:xfrm>
           <a:prstGeom prst="roundRect">
             <a:avLst>
-              <a:gd name="adj" fmla="val 20000"/>
+              <a:gd name="adj" fmla="val 13889"/>
             </a:avLst>
           </a:prstGeom>
           <a:solidFill>
-            <a:srgbClr val="F0E8FF"/>
+            <a:srgbClr val="E5F7FC"/>
           </a:solidFill>
           <a:ln/>
           <a:effectLst>
@@ -2408,24 +2532,24 @@
         </p:nvSpPr>
         <p:spPr>
           <a:xfrm>
-            <a:off x="640080" y="1417320"/>
-            <a:ext cx="7863840" cy="365760"/>
-          </a:xfrm>
-          <a:prstGeom prst="rect">
-            <a:avLst/>
-          </a:prstGeom>
-          <a:noFill/>
-          <a:ln/>
-        </p:spPr>
-        <p:txBody>
-          <a:bodyPr wrap="square" lIns="0" tIns="0" rIns="0" bIns="0" rtlCol="0" anchor="ctr"/>
-          <a:lstStyle/>
-          <a:p>
-            <a:pPr indent="0" marL="0">
-              <a:buNone/>
-            </a:pPr>
-            <a:r>
-              <a:rPr lang="en-US" sz="1600" b="1" dirty="0">
+            <a:off x="594360" y="1225296"/>
+            <a:ext cx="7863840" cy="420624"/>
+          </a:xfrm>
+          <a:prstGeom prst="rect">
+            <a:avLst/>
+          </a:prstGeom>
+          <a:noFill/>
+          <a:ln/>
+        </p:spPr>
+        <p:txBody>
+          <a:bodyPr wrap="square" lIns="0" tIns="0" rIns="0" bIns="0" rtlCol="0" anchor="ctr"/>
+          <a:lstStyle/>
+          <a:p>
+            <a:pPr indent="0" marL="0">
+              <a:buNone/>
+            </a:pPr>
+            <a:r>
+              <a:rPr lang="en-US" sz="1700" b="1" dirty="0">
                 <a:solidFill>
                   <a:srgbClr val="0E1C42"/>
                 </a:solidFill>
@@ -2433,7 +2557,7 @@
                 <a:ea typeface="Calibri" pitchFamily="34" charset="-122"/>
                 <a:cs typeface="Calibri" pitchFamily="34" charset="-120"/>
               </a:rPr>
-              <a:t>unlock</a:t>
+              <a:t>spool  </a:t>
             </a:r>
             <a:pPr indent="0" marL="0">
               <a:buNone/>
@@ -2441,15 +2565,15 @@
             <a:r>
               <a:rPr lang="en-US" sz="1400" dirty="0">
                 <a:solidFill>
-                  <a:srgbClr val="64748B"/>
-                </a:solidFill>
-                <a:latin typeface="Calibri" pitchFamily="34" charset="0"/>
-                <a:ea typeface="Calibri" pitchFamily="34" charset="-122"/>
-                <a:cs typeface="Calibri" pitchFamily="34" charset="-120"/>
-              </a:rPr>
-              <a:t>  ·  un- + lock =</a:t>
-            </a:r>
-            <a:endParaRPr lang="en-US" sz="1600" dirty="0"/>
+                  <a:srgbClr val="1E293B"/>
+                </a:solidFill>
+                <a:latin typeface="Calibri" pitchFamily="34" charset="0"/>
+                <a:ea typeface="Calibri" pitchFamily="34" charset="-122"/>
+                <a:cs typeface="Calibri" pitchFamily="34" charset="-120"/>
+              </a:rPr>
+              <a:t>A round object that thread or string is wound around.</a:t>
+            </a:r>
+            <a:endParaRPr lang="en-US" sz="1700" dirty="0"/>
           </a:p>
         </p:txBody>
       </p:sp>
@@ -2461,16 +2585,16 @@
         </p:nvSpPr>
         <p:spPr>
           <a:xfrm>
-            <a:off x="457200" y="1901952"/>
-            <a:ext cx="8229600" cy="457200"/>
+            <a:off x="365760" y="1828800"/>
+            <a:ext cx="8412480" cy="658368"/>
           </a:xfrm>
           <a:prstGeom prst="roundRect">
             <a:avLst>
-              <a:gd name="adj" fmla="val 20000"/>
+              <a:gd name="adj" fmla="val 13889"/>
             </a:avLst>
           </a:prstGeom>
           <a:solidFill>
-            <a:srgbClr val="F0E8FF"/>
+            <a:srgbClr val="FFFFFF"/>
           </a:solidFill>
           <a:ln/>
           <a:effectLst>
@@ -2490,24 +2614,24 @@
         </p:nvSpPr>
         <p:spPr>
           <a:xfrm>
-            <a:off x="640080" y="1947672"/>
-            <a:ext cx="7863840" cy="365760"/>
-          </a:xfrm>
-          <a:prstGeom prst="rect">
-            <a:avLst/>
-          </a:prstGeom>
-          <a:noFill/>
-          <a:ln/>
-        </p:spPr>
-        <p:txBody>
-          <a:bodyPr wrap="square" lIns="0" tIns="0" rIns="0" bIns="0" rtlCol="0" anchor="ctr"/>
-          <a:lstStyle/>
-          <a:p>
-            <a:pPr indent="0" marL="0">
-              <a:buNone/>
-            </a:pPr>
-            <a:r>
-              <a:rPr lang="en-US" sz="1600" b="1" dirty="0">
+            <a:off x="594360" y="1956816"/>
+            <a:ext cx="7863840" cy="420624"/>
+          </a:xfrm>
+          <a:prstGeom prst="rect">
+            <a:avLst/>
+          </a:prstGeom>
+          <a:noFill/>
+          <a:ln/>
+        </p:spPr>
+        <p:txBody>
+          <a:bodyPr wrap="square" lIns="0" tIns="0" rIns="0" bIns="0" rtlCol="0" anchor="ctr"/>
+          <a:lstStyle/>
+          <a:p>
+            <a:pPr indent="0" marL="0">
+              <a:buNone/>
+            </a:pPr>
+            <a:r>
+              <a:rPr lang="en-US" sz="1700" b="1" dirty="0">
                 <a:solidFill>
                   <a:srgbClr val="0E1C42"/>
                 </a:solidFill>
@@ -2515,7 +2639,7 @@
                 <a:ea typeface="Calibri" pitchFamily="34" charset="-122"/>
                 <a:cs typeface="Calibri" pitchFamily="34" charset="-120"/>
               </a:rPr>
-              <a:t>untie</a:t>
+              <a:t>cross  </a:t>
             </a:r>
             <a:pPr indent="0" marL="0">
               <a:buNone/>
@@ -2523,15 +2647,15 @@
             <a:r>
               <a:rPr lang="en-US" sz="1400" dirty="0">
                 <a:solidFill>
-                  <a:srgbClr val="64748B"/>
-                </a:solidFill>
-                <a:latin typeface="Calibri" pitchFamily="34" charset="0"/>
-                <a:ea typeface="Calibri" pitchFamily="34" charset="-122"/>
-                <a:cs typeface="Calibri" pitchFamily="34" charset="-120"/>
-              </a:rPr>
-              <a:t>  ·  un- + tie =</a:t>
-            </a:r>
-            <a:endParaRPr lang="en-US" sz="1600" dirty="0"/>
+                  <a:srgbClr val="1E293B"/>
+                </a:solidFill>
+                <a:latin typeface="Calibri" pitchFamily="34" charset="0"/>
+                <a:ea typeface="Calibri" pitchFamily="34" charset="-122"/>
+                <a:cs typeface="Calibri" pitchFamily="34" charset="-120"/>
+              </a:rPr>
+              <a:t>Angry or annoyed.</a:t>
+            </a:r>
+            <a:endParaRPr lang="en-US" sz="1700" dirty="0"/>
           </a:p>
         </p:txBody>
       </p:sp>
@@ -2543,16 +2667,16 @@
         </p:nvSpPr>
         <p:spPr>
           <a:xfrm>
-            <a:off x="457200" y="2432304"/>
-            <a:ext cx="8229600" cy="457200"/>
+            <a:off x="365760" y="2560320"/>
+            <a:ext cx="8412480" cy="658368"/>
           </a:xfrm>
           <a:prstGeom prst="roundRect">
             <a:avLst>
-              <a:gd name="adj" fmla="val 20000"/>
+              <a:gd name="adj" fmla="val 13889"/>
             </a:avLst>
           </a:prstGeom>
           <a:solidFill>
-            <a:srgbClr val="F0E8FF"/>
+            <a:srgbClr val="E5F7FC"/>
           </a:solidFill>
           <a:ln/>
           <a:effectLst>
@@ -2572,24 +2696,24 @@
         </p:nvSpPr>
         <p:spPr>
           <a:xfrm>
-            <a:off x="640080" y="2478024"/>
-            <a:ext cx="7863840" cy="365760"/>
-          </a:xfrm>
-          <a:prstGeom prst="rect">
-            <a:avLst/>
-          </a:prstGeom>
-          <a:noFill/>
-          <a:ln/>
-        </p:spPr>
-        <p:txBody>
-          <a:bodyPr wrap="square" lIns="0" tIns="0" rIns="0" bIns="0" rtlCol="0" anchor="ctr"/>
-          <a:lstStyle/>
-          <a:p>
-            <a:pPr indent="0" marL="0">
-              <a:buNone/>
-            </a:pPr>
-            <a:r>
-              <a:rPr lang="en-US" sz="1600" b="1" dirty="0">
+            <a:off x="594360" y="2688336"/>
+            <a:ext cx="7863840" cy="420624"/>
+          </a:xfrm>
+          <a:prstGeom prst="rect">
+            <a:avLst/>
+          </a:prstGeom>
+          <a:noFill/>
+          <a:ln/>
+        </p:spPr>
+        <p:txBody>
+          <a:bodyPr wrap="square" lIns="0" tIns="0" rIns="0" bIns="0" rtlCol="0" anchor="ctr"/>
+          <a:lstStyle/>
+          <a:p>
+            <a:pPr indent="0" marL="0">
+              <a:buNone/>
+            </a:pPr>
+            <a:r>
+              <a:rPr lang="en-US" sz="1700" b="1" dirty="0">
                 <a:solidFill>
                   <a:srgbClr val="0E1C42"/>
                 </a:solidFill>
@@ -2597,7 +2721,7 @@
                 <a:ea typeface="Calibri" pitchFamily="34" charset="-122"/>
                 <a:cs typeface="Calibri" pitchFamily="34" charset="-120"/>
               </a:rPr>
-              <a:t>unwrap</a:t>
+              <a:t>breeze  </a:t>
             </a:r>
             <a:pPr indent="0" marL="0">
               <a:buNone/>
@@ -2605,15 +2729,15 @@
             <a:r>
               <a:rPr lang="en-US" sz="1400" dirty="0">
                 <a:solidFill>
-                  <a:srgbClr val="64748B"/>
-                </a:solidFill>
-                <a:latin typeface="Calibri" pitchFamily="34" charset="0"/>
-                <a:ea typeface="Calibri" pitchFamily="34" charset="-122"/>
-                <a:cs typeface="Calibri" pitchFamily="34" charset="-120"/>
-              </a:rPr>
-              <a:t>  ·  un- + wrap =</a:t>
-            </a:r>
-            <a:endParaRPr lang="en-US" sz="1600" dirty="0"/>
+                  <a:srgbClr val="1E293B"/>
+                </a:solidFill>
+                <a:latin typeface="Calibri" pitchFamily="34" charset="0"/>
+                <a:ea typeface="Calibri" pitchFamily="34" charset="-122"/>
+                <a:cs typeface="Calibri" pitchFamily="34" charset="-120"/>
+              </a:rPr>
+              <a:t>A gentle, light wind.</a:t>
+            </a:r>
+            <a:endParaRPr lang="en-US" sz="1700" dirty="0"/>
           </a:p>
         </p:txBody>
       </p:sp>
@@ -2625,16 +2749,16 @@
         </p:nvSpPr>
         <p:spPr>
           <a:xfrm>
-            <a:off x="457200" y="2962656"/>
-            <a:ext cx="8229600" cy="457200"/>
+            <a:off x="365760" y="3291840"/>
+            <a:ext cx="8412480" cy="658368"/>
           </a:xfrm>
           <a:prstGeom prst="roundRect">
             <a:avLst>
-              <a:gd name="adj" fmla="val 20000"/>
+              <a:gd name="adj" fmla="val 13889"/>
             </a:avLst>
           </a:prstGeom>
           <a:solidFill>
-            <a:srgbClr val="F0E8FF"/>
+            <a:srgbClr val="FFFFFF"/>
           </a:solidFill>
           <a:ln/>
           <a:effectLst>
@@ -2654,24 +2778,24 @@
         </p:nvSpPr>
         <p:spPr>
           <a:xfrm>
-            <a:off x="640080" y="3008376"/>
-            <a:ext cx="7863840" cy="365760"/>
-          </a:xfrm>
-          <a:prstGeom prst="rect">
-            <a:avLst/>
-          </a:prstGeom>
-          <a:noFill/>
-          <a:ln/>
-        </p:spPr>
-        <p:txBody>
-          <a:bodyPr wrap="square" lIns="0" tIns="0" rIns="0" bIns="0" rtlCol="0" anchor="ctr"/>
-          <a:lstStyle/>
-          <a:p>
-            <a:pPr indent="0" marL="0">
-              <a:buNone/>
-            </a:pPr>
-            <a:r>
-              <a:rPr lang="en-US" sz="1600" b="1" dirty="0">
+            <a:off x="594360" y="3419856"/>
+            <a:ext cx="7863840" cy="420624"/>
+          </a:xfrm>
+          <a:prstGeom prst="rect">
+            <a:avLst/>
+          </a:prstGeom>
+          <a:noFill/>
+          <a:ln/>
+        </p:spPr>
+        <p:txBody>
+          <a:bodyPr wrap="square" lIns="0" tIns="0" rIns="0" bIns="0" rtlCol="0" anchor="ctr"/>
+          <a:lstStyle/>
+          <a:p>
+            <a:pPr indent="0" marL="0">
+              <a:buNone/>
+            </a:pPr>
+            <a:r>
+              <a:rPr lang="en-US" sz="1700" b="1" dirty="0">
                 <a:solidFill>
                   <a:srgbClr val="0E1C42"/>
                 </a:solidFill>
@@ -2679,7 +2803,7 @@
                 <a:ea typeface="Calibri" pitchFamily="34" charset="-122"/>
                 <a:cs typeface="Calibri" pitchFamily="34" charset="-120"/>
               </a:rPr>
-              <a:t>undo</a:t>
+              <a:t>jealous  </a:t>
             </a:r>
             <a:pPr indent="0" marL="0">
               <a:buNone/>
@@ -2687,93 +2811,15 @@
             <a:r>
               <a:rPr lang="en-US" sz="1400" dirty="0">
                 <a:solidFill>
-                  <a:srgbClr val="64748B"/>
-                </a:solidFill>
-                <a:latin typeface="Calibri" pitchFamily="34" charset="0"/>
-                <a:ea typeface="Calibri" pitchFamily="34" charset="-122"/>
-                <a:cs typeface="Calibri" pitchFamily="34" charset="-120"/>
-              </a:rPr>
-              <a:t>  ·  un- + do =</a:t>
-            </a:r>
-            <a:endParaRPr lang="en-US" sz="1600" dirty="0"/>
-          </a:p>
-        </p:txBody>
-      </p:sp>
-      <p:sp>
-        <p:nvSpPr>
-          <p:cNvPr id="13" name="Text 11"/>
-          <p:cNvSpPr/>
-          <p:nvPr/>
-        </p:nvSpPr>
-        <p:spPr>
-          <a:xfrm>
-            <a:off x="457200" y="3493008"/>
-            <a:ext cx="8046720" cy="292608"/>
-          </a:xfrm>
-          <a:prstGeom prst="rect">
-            <a:avLst/>
-          </a:prstGeom>
-          <a:noFill/>
-          <a:ln/>
-        </p:spPr>
-        <p:txBody>
-          <a:bodyPr wrap="square" lIns="0" tIns="0" rIns="0" bIns="0" rtlCol="0" anchor="ctr"/>
-          <a:lstStyle/>
-          <a:p>
-            <a:pPr indent="0" marL="0">
-              <a:buNone/>
-            </a:pPr>
-            <a:r>
-              <a:rPr lang="en-US" sz="1100" b="1" spc="200" kern="0" dirty="0">
-                <a:solidFill>
-                  <a:srgbClr val="64748B"/>
-                </a:solidFill>
-                <a:latin typeface="Calibri" pitchFamily="34" charset="0"/>
-                <a:ea typeface="Calibri" pitchFamily="34" charset="-122"/>
-                <a:cs typeface="Calibri" pitchFamily="34" charset="-120"/>
-              </a:rPr>
-              <a:t>CONCEPT EXAMPLES</a:t>
-            </a:r>
-            <a:endParaRPr lang="en-US" sz="1100" dirty="0"/>
-          </a:p>
-        </p:txBody>
-      </p:sp>
-      <p:sp>
-        <p:nvSpPr>
-          <p:cNvPr id="14" name="Text 12"/>
-          <p:cNvSpPr/>
-          <p:nvPr/>
-        </p:nvSpPr>
-        <p:spPr>
-          <a:xfrm>
-            <a:off x="640080" y="3813048"/>
-            <a:ext cx="7863840" cy="320040"/>
-          </a:xfrm>
-          <a:prstGeom prst="rect">
-            <a:avLst/>
-          </a:prstGeom>
-          <a:noFill/>
-          <a:ln/>
-        </p:spPr>
-        <p:txBody>
-          <a:bodyPr wrap="square" lIns="0" tIns="0" rIns="0" bIns="0" rtlCol="0" anchor="ctr"/>
-          <a:lstStyle/>
-          <a:p>
-            <a:pPr indent="0" marL="0">
-              <a:buNone/>
-            </a:pPr>
-            <a:r>
-              <a:rPr lang="en-US" sz="1300" dirty="0">
-                <a:solidFill>
                   <a:srgbClr val="1E293B"/>
                 </a:solidFill>
                 <a:latin typeface="Calibri" pitchFamily="34" charset="0"/>
                 <a:ea typeface="Calibri" pitchFamily="34" charset="-122"/>
                 <a:cs typeface="Calibri" pitchFamily="34" charset="-120"/>
               </a:rPr>
-              <a:t>• 📌 Examples</a:t>
-            </a:r>
-            <a:endParaRPr lang="en-US" sz="1300" dirty="0"/>
+              <a:t>Wanting what someone else has.</a:t>
+            </a:r>
+            <a:endParaRPr lang="en-US" sz="1700" dirty="0"/>
           </a:p>
         </p:txBody>
       </p:sp>
@@ -2791,7 +2837,7 @@
     <p:bg>
       <p:bgPr>
         <a:solidFill>
-          <a:srgbClr val="FFFFFF"/>
+          <a:srgbClr val="F8FAFC"/>
         </a:solidFill>
       </p:bgPr>
     </p:bg>
@@ -2811,80 +2857,116 @@
       </p:grpSpPr>
       <p:sp>
         <p:nvSpPr>
-          <p:cNvPr id="2" name="Text 0"/>
-          <p:cNvSpPr/>
-          <p:nvPr/>
-        </p:nvSpPr>
-        <p:spPr>
-          <a:xfrm>
-            <a:off x="365760" y="164592"/>
-            <a:ext cx="8412480" cy="566928"/>
-          </a:xfrm>
-          <a:prstGeom prst="rect">
-            <a:avLst/>
-          </a:prstGeom>
-          <a:noFill/>
-          <a:ln/>
-        </p:spPr>
-        <p:txBody>
-          <a:bodyPr wrap="square" lIns="0" tIns="0" rIns="0" bIns="0" rtlCol="0" anchor="ctr"/>
-          <a:lstStyle/>
-          <a:p>
-            <a:pPr algn="l" indent="0" marL="0">
-              <a:buNone/>
-            </a:pPr>
-            <a:r>
-              <a:rPr lang="en-US" sz="2800" b="1" dirty="0">
-                <a:solidFill>
-                  <a:srgbClr val="0E1C42"/>
-                </a:solidFill>
-                <a:latin typeface="Calibri" pitchFamily="34" charset="0"/>
-                <a:ea typeface="Calibri" pitchFamily="34" charset="-122"/>
-                <a:cs typeface="Calibri" pitchFamily="34" charset="-120"/>
-              </a:rPr>
-              <a:t>🔤 Vocabulary</a:t>
-            </a:r>
-            <a:endParaRPr lang="en-US" sz="2800" dirty="0"/>
-          </a:p>
-        </p:txBody>
-      </p:sp>
-      <p:sp>
-        <p:nvSpPr>
-          <p:cNvPr id="3" name="Shape 1"/>
-          <p:cNvSpPr/>
-          <p:nvPr/>
-        </p:nvSpPr>
-        <p:spPr>
-          <a:xfrm>
-            <a:off x="365760" y="749808"/>
-            <a:ext cx="8412480" cy="0"/>
-          </a:xfrm>
-          <a:prstGeom prst="line">
-            <a:avLst/>
-          </a:prstGeom>
-          <a:noFill/>
-          <a:ln w="19050">
-            <a:solidFill>
-              <a:srgbClr val="55C8E8"/>
-            </a:solidFill>
-            <a:prstDash val="solid"/>
-          </a:ln>
-        </p:spPr>
-      </p:sp>
-      <p:sp>
-        <p:nvSpPr>
-          <p:cNvPr id="4" name="Shape 2"/>
-          <p:cNvSpPr/>
-          <p:nvPr/>
-        </p:nvSpPr>
-        <p:spPr>
-          <a:xfrm>
-            <a:off x="457200" y="1005840"/>
-            <a:ext cx="3840480" cy="640080"/>
+          <p:cNvPr id="2" name="Shape 0"/>
+          <p:cNvSpPr/>
+          <p:nvPr/>
+        </p:nvSpPr>
+        <p:spPr>
+          <a:xfrm>
+            <a:off x="0" y="0"/>
+            <a:ext cx="9144000" cy="566928"/>
+          </a:xfrm>
+          <a:prstGeom prst="rect">
+            <a:avLst/>
+          </a:prstGeom>
+          <a:solidFill>
+            <a:srgbClr val="C7922C"/>
+          </a:solidFill>
+          <a:ln/>
+        </p:spPr>
+      </p:sp>
+      <p:sp>
+        <p:nvSpPr>
+          <p:cNvPr id="3" name="Text 1"/>
+          <p:cNvSpPr/>
+          <p:nvPr/>
+        </p:nvSpPr>
+        <p:spPr>
+          <a:xfrm>
+            <a:off x="365760" y="54864"/>
+            <a:ext cx="8412480" cy="457200"/>
+          </a:xfrm>
+          <a:prstGeom prst="rect">
+            <a:avLst/>
+          </a:prstGeom>
+          <a:noFill/>
+          <a:ln/>
+        </p:spPr>
+        <p:txBody>
+          <a:bodyPr wrap="square" lIns="0" tIns="0" rIns="0" bIns="0" rtlCol="0" anchor="ctr"/>
+          <a:lstStyle/>
+          <a:p>
+            <a:pPr indent="0" marL="0">
+              <a:buNone/>
+            </a:pPr>
+            <a:r>
+              <a:rPr lang="en-US" sz="2200" b="1" dirty="0">
+                <a:solidFill>
+                  <a:srgbClr val="FFFFFF"/>
+                </a:solidFill>
+                <a:latin typeface="Calibri" pitchFamily="34" charset="0"/>
+                <a:ea typeface="Calibri" pitchFamily="34" charset="-122"/>
+                <a:cs typeface="Calibri" pitchFamily="34" charset="-120"/>
+              </a:rPr>
+              <a:t>✏️  Grammar</a:t>
+            </a:r>
+            <a:endParaRPr lang="en-US" sz="2200" dirty="0"/>
+          </a:p>
+        </p:txBody>
+      </p:sp>
+      <p:sp>
+        <p:nvSpPr>
+          <p:cNvPr id="4" name="Text 2"/>
+          <p:cNvSpPr/>
+          <p:nvPr/>
+        </p:nvSpPr>
+        <p:spPr>
+          <a:xfrm>
+            <a:off x="365760" y="777240"/>
+            <a:ext cx="8229600" cy="237744"/>
+          </a:xfrm>
+          <a:prstGeom prst="rect">
+            <a:avLst/>
+          </a:prstGeom>
+          <a:noFill/>
+          <a:ln/>
+        </p:spPr>
+        <p:txBody>
+          <a:bodyPr wrap="square" lIns="0" tIns="0" rIns="0" bIns="0" rtlCol="0" anchor="ctr"/>
+          <a:lstStyle/>
+          <a:p>
+            <a:pPr indent="0" marL="0">
+              <a:buNone/>
+            </a:pPr>
+            <a:r>
+              <a:rPr lang="en-US" sz="1100" b="1" spc="100" kern="0" dirty="0">
+                <a:solidFill>
+                  <a:srgbClr val="C7922C"/>
+                </a:solidFill>
+                <a:latin typeface="Calibri" pitchFamily="34" charset="0"/>
+                <a:ea typeface="Calibri" pitchFamily="34" charset="-122"/>
+                <a:cs typeface="Calibri" pitchFamily="34" charset="-120"/>
+              </a:rPr>
+              <a:t>SUBJECT AND PREDICATE</a:t>
+            </a:r>
+            <a:endParaRPr lang="en-US" sz="1100" dirty="0"/>
+          </a:p>
+        </p:txBody>
+      </p:sp>
+      <p:sp>
+        <p:nvSpPr>
+          <p:cNvPr id="5" name="Shape 3"/>
+          <p:cNvSpPr/>
+          <p:nvPr/>
+        </p:nvSpPr>
+        <p:spPr>
+          <a:xfrm>
+            <a:off x="365760" y="1078992"/>
+            <a:ext cx="8412480" cy="658368"/>
           </a:xfrm>
           <a:prstGeom prst="roundRect">
             <a:avLst>
-              <a:gd name="adj" fmla="val 14286"/>
+              <a:gd name="adj" fmla="val 13889"/>
             </a:avLst>
           </a:prstGeom>
           <a:solidFill>
@@ -2902,50 +2984,30 @@
       </p:sp>
       <p:sp>
         <p:nvSpPr>
-          <p:cNvPr id="5" name="Text 3"/>
-          <p:cNvSpPr/>
-          <p:nvPr/>
-        </p:nvSpPr>
-        <p:spPr>
-          <a:xfrm>
-            <a:off x="594360" y="1060704"/>
-            <a:ext cx="3566160" cy="530352"/>
-          </a:xfrm>
-          <a:prstGeom prst="rect">
-            <a:avLst/>
-          </a:prstGeom>
-          <a:noFill/>
-          <a:ln/>
-        </p:spPr>
-        <p:txBody>
-          <a:bodyPr wrap="square" lIns="0" tIns="0" rIns="0" bIns="0" rtlCol="0" anchor="ctr"/>
-          <a:lstStyle/>
-          <a:p>
-            <a:pPr indent="0" marL="0">
-              <a:buNone/>
-            </a:pPr>
-            <a:r>
-              <a:rPr lang="en-US" sz="1500" b="1" dirty="0">
-                <a:solidFill>
-                  <a:srgbClr val="0E1C42"/>
-                </a:solidFill>
-                <a:latin typeface="Calibri" pitchFamily="34" charset="0"/>
-                <a:ea typeface="Calibri" pitchFamily="34" charset="-122"/>
-                <a:cs typeface="Calibri" pitchFamily="34" charset="-120"/>
-              </a:rPr>
-              <a:t>spool</a:t>
-            </a:r>
-            <a:pPr indent="0" marL="0">
-              <a:buNone/>
-            </a:pPr>
-            <a:endParaRPr lang="en-US" sz="1500" dirty="0"/>
-          </a:p>
-          <a:p>
-            <a:pPr indent="0" marL="0">
-              <a:buNone/>
-            </a:pPr>
-            <a:r>
-              <a:rPr lang="en-US" sz="1200" dirty="0">
+          <p:cNvPr id="6" name="Text 4"/>
+          <p:cNvSpPr/>
+          <p:nvPr/>
+        </p:nvSpPr>
+        <p:spPr>
+          <a:xfrm>
+            <a:off x="594360" y="1225296"/>
+            <a:ext cx="7863840" cy="402336"/>
+          </a:xfrm>
+          <a:prstGeom prst="rect">
+            <a:avLst/>
+          </a:prstGeom>
+          <a:noFill/>
+          <a:ln/>
+        </p:spPr>
+        <p:txBody>
+          <a:bodyPr wrap="square" lIns="0" tIns="0" rIns="0" bIns="0" rtlCol="0" anchor="ctr"/>
+          <a:lstStyle/>
+          <a:p>
+            <a:pPr indent="0" marL="0">
+              <a:buNone/>
+            </a:pPr>
+            <a:r>
+              <a:rPr lang="en-US" sz="1600" dirty="0">
                 <a:solidFill>
                   <a:srgbClr val="1E293B"/>
                 </a:solidFill>
@@ -2953,30 +3015,30 @@
                 <a:ea typeface="Calibri" pitchFamily="34" charset="-122"/>
                 <a:cs typeface="Calibri" pitchFamily="34" charset="-120"/>
               </a:rPr>
-              <a:t>A round object that thread or string is wound around.</a:t>
-            </a:r>
-            <a:endParaRPr lang="en-US" sz="1500" dirty="0"/>
-          </a:p>
-        </p:txBody>
-      </p:sp>
-      <p:sp>
-        <p:nvSpPr>
-          <p:cNvPr id="6" name="Shape 4"/>
-          <p:cNvSpPr/>
-          <p:nvPr/>
-        </p:nvSpPr>
-        <p:spPr>
-          <a:xfrm>
-            <a:off x="4572000" y="1005840"/>
-            <a:ext cx="3840480" cy="640080"/>
+              <a:t>The bulletin board fell on Stanley.</a:t>
+            </a:r>
+            <a:endParaRPr lang="en-US" sz="1600" dirty="0"/>
+          </a:p>
+        </p:txBody>
+      </p:sp>
+      <p:sp>
+        <p:nvSpPr>
+          <p:cNvPr id="7" name="Shape 5"/>
+          <p:cNvSpPr/>
+          <p:nvPr/>
+        </p:nvSpPr>
+        <p:spPr>
+          <a:xfrm>
+            <a:off x="365760" y="1810512"/>
+            <a:ext cx="8412480" cy="658368"/>
           </a:xfrm>
           <a:prstGeom prst="roundRect">
             <a:avLst>
-              <a:gd name="adj" fmla="val 14286"/>
+              <a:gd name="adj" fmla="val 13889"/>
             </a:avLst>
           </a:prstGeom>
           <a:solidFill>
-            <a:srgbClr val="FEF6E8"/>
+            <a:srgbClr val="FFFFFF"/>
           </a:solidFill>
           <a:ln/>
           <a:effectLst>
@@ -2990,50 +3052,30 @@
       </p:sp>
       <p:sp>
         <p:nvSpPr>
-          <p:cNvPr id="7" name="Text 5"/>
-          <p:cNvSpPr/>
-          <p:nvPr/>
-        </p:nvSpPr>
-        <p:spPr>
-          <a:xfrm>
-            <a:off x="4709160" y="1060704"/>
-            <a:ext cx="3566160" cy="530352"/>
-          </a:xfrm>
-          <a:prstGeom prst="rect">
-            <a:avLst/>
-          </a:prstGeom>
-          <a:noFill/>
-          <a:ln/>
-        </p:spPr>
-        <p:txBody>
-          <a:bodyPr wrap="square" lIns="0" tIns="0" rIns="0" bIns="0" rtlCol="0" anchor="ctr"/>
-          <a:lstStyle/>
-          <a:p>
-            <a:pPr indent="0" marL="0">
-              <a:buNone/>
-            </a:pPr>
-            <a:r>
-              <a:rPr lang="en-US" sz="1500" b="1" dirty="0">
-                <a:solidFill>
-                  <a:srgbClr val="0E1C42"/>
-                </a:solidFill>
-                <a:latin typeface="Calibri" pitchFamily="34" charset="0"/>
-                <a:ea typeface="Calibri" pitchFamily="34" charset="-122"/>
-                <a:cs typeface="Calibri" pitchFamily="34" charset="-120"/>
-              </a:rPr>
-              <a:t>cross</a:t>
-            </a:r>
-            <a:pPr indent="0" marL="0">
-              <a:buNone/>
-            </a:pPr>
-            <a:endParaRPr lang="en-US" sz="1500" dirty="0"/>
-          </a:p>
-          <a:p>
-            <a:pPr indent="0" marL="0">
-              <a:buNone/>
-            </a:pPr>
-            <a:r>
-              <a:rPr lang="en-US" sz="1200" dirty="0">
+          <p:cNvPr id="8" name="Text 6"/>
+          <p:cNvSpPr/>
+          <p:nvPr/>
+        </p:nvSpPr>
+        <p:spPr>
+          <a:xfrm>
+            <a:off x="594360" y="1956816"/>
+            <a:ext cx="7863840" cy="402336"/>
+          </a:xfrm>
+          <a:prstGeom prst="rect">
+            <a:avLst/>
+          </a:prstGeom>
+          <a:noFill/>
+          <a:ln/>
+        </p:spPr>
+        <p:txBody>
+          <a:bodyPr wrap="square" lIns="0" tIns="0" rIns="0" bIns="0" rtlCol="0" anchor="ctr"/>
+          <a:lstStyle/>
+          <a:p>
+            <a:pPr indent="0" marL="0">
+              <a:buNone/>
+            </a:pPr>
+            <a:r>
+              <a:rPr lang="en-US" sz="1600" dirty="0">
                 <a:solidFill>
                   <a:srgbClr val="1E293B"/>
                 </a:solidFill>
@@ -3041,26 +3083,26 @@
                 <a:ea typeface="Calibri" pitchFamily="34" charset="-122"/>
                 <a:cs typeface="Calibri" pitchFamily="34" charset="-120"/>
               </a:rPr>
-              <a:t>Angry or annoyed.</a:t>
-            </a:r>
-            <a:endParaRPr lang="en-US" sz="1500" dirty="0"/>
-          </a:p>
-        </p:txBody>
-      </p:sp>
-      <p:sp>
-        <p:nvSpPr>
-          <p:cNvPr id="8" name="Shape 6"/>
-          <p:cNvSpPr/>
-          <p:nvPr/>
-        </p:nvSpPr>
-        <p:spPr>
-          <a:xfrm>
-            <a:off x="457200" y="1755648"/>
-            <a:ext cx="3840480" cy="640080"/>
+              <a:t>Arthur slept through the whole thing.</a:t>
+            </a:r>
+            <a:endParaRPr lang="en-US" sz="1600" dirty="0"/>
+          </a:p>
+        </p:txBody>
+      </p:sp>
+      <p:sp>
+        <p:nvSpPr>
+          <p:cNvPr id="9" name="Shape 7"/>
+          <p:cNvSpPr/>
+          <p:nvPr/>
+        </p:nvSpPr>
+        <p:spPr>
+          <a:xfrm>
+            <a:off x="365760" y="2542032"/>
+            <a:ext cx="8412480" cy="658368"/>
           </a:xfrm>
           <a:prstGeom prst="roundRect">
             <a:avLst>
-              <a:gd name="adj" fmla="val 14286"/>
+              <a:gd name="adj" fmla="val 13889"/>
             </a:avLst>
           </a:prstGeom>
           <a:solidFill>
@@ -3078,50 +3120,30 @@
       </p:sp>
       <p:sp>
         <p:nvSpPr>
-          <p:cNvPr id="9" name="Text 7"/>
-          <p:cNvSpPr/>
-          <p:nvPr/>
-        </p:nvSpPr>
-        <p:spPr>
-          <a:xfrm>
-            <a:off x="594360" y="1810512"/>
-            <a:ext cx="3566160" cy="530352"/>
-          </a:xfrm>
-          <a:prstGeom prst="rect">
-            <a:avLst/>
-          </a:prstGeom>
-          <a:noFill/>
-          <a:ln/>
-        </p:spPr>
-        <p:txBody>
-          <a:bodyPr wrap="square" lIns="0" tIns="0" rIns="0" bIns="0" rtlCol="0" anchor="ctr"/>
-          <a:lstStyle/>
-          <a:p>
-            <a:pPr indent="0" marL="0">
-              <a:buNone/>
-            </a:pPr>
-            <a:r>
-              <a:rPr lang="en-US" sz="1500" b="1" dirty="0">
-                <a:solidFill>
-                  <a:srgbClr val="0E1C42"/>
-                </a:solidFill>
-                <a:latin typeface="Calibri" pitchFamily="34" charset="0"/>
-                <a:ea typeface="Calibri" pitchFamily="34" charset="-122"/>
-                <a:cs typeface="Calibri" pitchFamily="34" charset="-120"/>
-              </a:rPr>
-              <a:t>breeze</a:t>
-            </a:r>
-            <a:pPr indent="0" marL="0">
-              <a:buNone/>
-            </a:pPr>
-            <a:endParaRPr lang="en-US" sz="1500" dirty="0"/>
-          </a:p>
-          <a:p>
-            <a:pPr indent="0" marL="0">
-              <a:buNone/>
-            </a:pPr>
-            <a:r>
-              <a:rPr lang="en-US" sz="1200" dirty="0">
+          <p:cNvPr id="10" name="Text 8"/>
+          <p:cNvSpPr/>
+          <p:nvPr/>
+        </p:nvSpPr>
+        <p:spPr>
+          <a:xfrm>
+            <a:off x="594360" y="2688336"/>
+            <a:ext cx="7863840" cy="402336"/>
+          </a:xfrm>
+          <a:prstGeom prst="rect">
+            <a:avLst/>
+          </a:prstGeom>
+          <a:noFill/>
+          <a:ln/>
+        </p:spPr>
+        <p:txBody>
+          <a:bodyPr wrap="square" lIns="0" tIns="0" rIns="0" bIns="0" rtlCol="0" anchor="ctr"/>
+          <a:lstStyle/>
+          <a:p>
+            <a:pPr indent="0" marL="0">
+              <a:buNone/>
+            </a:pPr>
+            <a:r>
+              <a:rPr lang="en-US" sz="1600" dirty="0">
                 <a:solidFill>
                   <a:srgbClr val="1E293B"/>
                 </a:solidFill>
@@ -3129,30 +3151,30 @@
                 <a:ea typeface="Calibri" pitchFamily="34" charset="-122"/>
                 <a:cs typeface="Calibri" pitchFamily="34" charset="-120"/>
               </a:rPr>
-              <a:t>A gentle, light wind.</a:t>
-            </a:r>
-            <a:endParaRPr lang="en-US" sz="1500" dirty="0"/>
-          </a:p>
-        </p:txBody>
-      </p:sp>
-      <p:sp>
-        <p:nvSpPr>
-          <p:cNvPr id="10" name="Shape 8"/>
-          <p:cNvSpPr/>
-          <p:nvPr/>
-        </p:nvSpPr>
-        <p:spPr>
-          <a:xfrm>
-            <a:off x="4572000" y="1755648"/>
-            <a:ext cx="3840480" cy="640080"/>
+              <a:t>The doctor examined him all over.</a:t>
+            </a:r>
+            <a:endParaRPr lang="en-US" sz="1600" dirty="0"/>
+          </a:p>
+        </p:txBody>
+      </p:sp>
+      <p:sp>
+        <p:nvSpPr>
+          <p:cNvPr id="11" name="Shape 9"/>
+          <p:cNvSpPr/>
+          <p:nvPr/>
+        </p:nvSpPr>
+        <p:spPr>
+          <a:xfrm>
+            <a:off x="365760" y="3273552"/>
+            <a:ext cx="8412480" cy="658368"/>
           </a:xfrm>
           <a:prstGeom prst="roundRect">
             <a:avLst>
-              <a:gd name="adj" fmla="val 14286"/>
+              <a:gd name="adj" fmla="val 13889"/>
             </a:avLst>
           </a:prstGeom>
           <a:solidFill>
-            <a:srgbClr val="FEF6E8"/>
+            <a:srgbClr val="FFFFFF"/>
           </a:solidFill>
           <a:ln/>
           <a:effectLst>
@@ -3166,50 +3188,30 @@
       </p:sp>
       <p:sp>
         <p:nvSpPr>
-          <p:cNvPr id="11" name="Text 9"/>
-          <p:cNvSpPr/>
-          <p:nvPr/>
-        </p:nvSpPr>
-        <p:spPr>
-          <a:xfrm>
-            <a:off x="4709160" y="1810512"/>
-            <a:ext cx="3566160" cy="530352"/>
-          </a:xfrm>
-          <a:prstGeom prst="rect">
-            <a:avLst/>
-          </a:prstGeom>
-          <a:noFill/>
-          <a:ln/>
-        </p:spPr>
-        <p:txBody>
-          <a:bodyPr wrap="square" lIns="0" tIns="0" rIns="0" bIns="0" rtlCol="0" anchor="ctr"/>
-          <a:lstStyle/>
-          <a:p>
-            <a:pPr indent="0" marL="0">
-              <a:buNone/>
-            </a:pPr>
-            <a:r>
-              <a:rPr lang="en-US" sz="1500" b="1" dirty="0">
-                <a:solidFill>
-                  <a:srgbClr val="0E1C42"/>
-                </a:solidFill>
-                <a:latin typeface="Calibri" pitchFamily="34" charset="0"/>
-                <a:ea typeface="Calibri" pitchFamily="34" charset="-122"/>
-                <a:cs typeface="Calibri" pitchFamily="34" charset="-120"/>
-              </a:rPr>
-              <a:t>jealous</a:t>
-            </a:r>
-            <a:pPr indent="0" marL="0">
-              <a:buNone/>
-            </a:pPr>
-            <a:endParaRPr lang="en-US" sz="1500" dirty="0"/>
-          </a:p>
-          <a:p>
-            <a:pPr indent="0" marL="0">
-              <a:buNone/>
-            </a:pPr>
-            <a:r>
-              <a:rPr lang="en-US" sz="1200" dirty="0">
+          <p:cNvPr id="12" name="Text 10"/>
+          <p:cNvSpPr/>
+          <p:nvPr/>
+        </p:nvSpPr>
+        <p:spPr>
+          <a:xfrm>
+            <a:off x="594360" y="3419856"/>
+            <a:ext cx="7863840" cy="402336"/>
+          </a:xfrm>
+          <a:prstGeom prst="rect">
+            <a:avLst/>
+          </a:prstGeom>
+          <a:noFill/>
+          <a:ln/>
+        </p:spPr>
+        <p:txBody>
+          <a:bodyPr wrap="square" lIns="0" tIns="0" rIns="0" bIns="0" rtlCol="0" anchor="ctr"/>
+          <a:lstStyle/>
+          <a:p>
+            <a:pPr indent="0" marL="0">
+              <a:buNone/>
+            </a:pPr>
+            <a:r>
+              <a:rPr lang="en-US" sz="1600" dirty="0">
                 <a:solidFill>
                   <a:srgbClr val="1E293B"/>
                 </a:solidFill>
@@ -3217,7 +3219,46 @@
                 <a:ea typeface="Calibri" pitchFamily="34" charset="-122"/>
                 <a:cs typeface="Calibri" pitchFamily="34" charset="-120"/>
               </a:rPr>
-              <a:t>Wanting what someone else has.</a:t>
+              <a:t>Stanley folded himself into the envelope.</a:t>
+            </a:r>
+            <a:endParaRPr lang="en-US" sz="1600" dirty="0"/>
+          </a:p>
+        </p:txBody>
+      </p:sp>
+      <p:sp>
+        <p:nvSpPr>
+          <p:cNvPr id="13" name="Text 11"/>
+          <p:cNvSpPr/>
+          <p:nvPr/>
+        </p:nvSpPr>
+        <p:spPr>
+          <a:xfrm>
+            <a:off x="365760" y="4050792"/>
+            <a:ext cx="8412480" cy="365760"/>
+          </a:xfrm>
+          <a:prstGeom prst="rect">
+            <a:avLst/>
+          </a:prstGeom>
+          <a:noFill/>
+          <a:ln/>
+        </p:spPr>
+        <p:txBody>
+          <a:bodyPr wrap="square" lIns="0" tIns="0" rIns="0" bIns="0" rtlCol="0" anchor="ctr"/>
+          <a:lstStyle/>
+          <a:p>
+            <a:pPr indent="0" marL="0">
+              <a:buNone/>
+            </a:pPr>
+            <a:r>
+              <a:rPr lang="en-US" sz="1500" i="1" dirty="0">
+                <a:solidFill>
+                  <a:srgbClr val="64748B"/>
+                </a:solidFill>
+                <a:latin typeface="Calibri" pitchFamily="34" charset="0"/>
+                <a:ea typeface="Calibri" pitchFamily="34" charset="-122"/>
+                <a:cs typeface="Calibri" pitchFamily="34" charset="-120"/>
+              </a:rPr>
+              <a:t>Your turn. Tap the word that names who or what the sentence is about — the subject. Tap to check — green means you got it.</a:t>
             </a:r>
             <a:endParaRPr lang="en-US" sz="1500" dirty="0"/>
           </a:p>
@@ -3237,7 +3278,7 @@
     <p:bg>
       <p:bgPr>
         <a:solidFill>
-          <a:srgbClr val="E5F7FC"/>
+          <a:srgbClr val="F8FAFC"/>
         </a:solidFill>
       </p:bgPr>
     </p:bg>
@@ -3257,180 +3298,116 @@
       </p:grpSpPr>
       <p:sp>
         <p:nvSpPr>
-          <p:cNvPr id="2" name="Text 0"/>
-          <p:cNvSpPr/>
-          <p:nvPr/>
-        </p:nvSpPr>
-        <p:spPr>
-          <a:xfrm>
-            <a:off x="365760" y="164592"/>
-            <a:ext cx="5943600" cy="566928"/>
-          </a:xfrm>
-          <a:prstGeom prst="rect">
-            <a:avLst/>
-          </a:prstGeom>
-          <a:noFill/>
-          <a:ln/>
-        </p:spPr>
-        <p:txBody>
-          <a:bodyPr wrap="square" lIns="0" tIns="0" rIns="0" bIns="0" rtlCol="0" anchor="ctr"/>
-          <a:lstStyle/>
-          <a:p>
-            <a:pPr algn="l" indent="0" marL="0">
-              <a:buNone/>
-            </a:pPr>
-            <a:r>
-              <a:rPr lang="en-US" sz="2800" b="1" dirty="0">
-                <a:solidFill>
-                  <a:srgbClr val="0E1C42"/>
-                </a:solidFill>
-                <a:latin typeface="Calibri" pitchFamily="34" charset="0"/>
-                <a:ea typeface="Calibri" pitchFamily="34" charset="-122"/>
-                <a:cs typeface="Calibri" pitchFamily="34" charset="-120"/>
-              </a:rPr>
-              <a:t>🔠 Spelling: Long vowels and silent-e review</a:t>
-            </a:r>
-            <a:endParaRPr lang="en-US" sz="2800" dirty="0"/>
-          </a:p>
-        </p:txBody>
-      </p:sp>
-      <p:sp>
-        <p:nvSpPr>
-          <p:cNvPr id="3" name="Shape 1"/>
-          <p:cNvSpPr/>
-          <p:nvPr/>
-        </p:nvSpPr>
-        <p:spPr>
-          <a:xfrm>
-            <a:off x="365760" y="749808"/>
-            <a:ext cx="8412480" cy="0"/>
-          </a:xfrm>
-          <a:prstGeom prst="line">
-            <a:avLst/>
-          </a:prstGeom>
-          <a:noFill/>
-          <a:ln w="19050">
-            <a:solidFill>
-              <a:srgbClr val="F5D76E"/>
-            </a:solidFill>
-            <a:prstDash val="solid"/>
-          </a:ln>
-        </p:spPr>
-      </p:sp>
-      <p:sp>
-        <p:nvSpPr>
-          <p:cNvPr id="4" name="Shape 2"/>
-          <p:cNvSpPr/>
-          <p:nvPr/>
-        </p:nvSpPr>
-        <p:spPr>
-          <a:xfrm>
-            <a:off x="6492240" y="173736"/>
-            <a:ext cx="2286000" cy="502920"/>
+          <p:cNvPr id="2" name="Shape 0"/>
+          <p:cNvSpPr/>
+          <p:nvPr/>
+        </p:nvSpPr>
+        <p:spPr>
+          <a:xfrm>
+            <a:off x="0" y="0"/>
+            <a:ext cx="9144000" cy="566928"/>
+          </a:xfrm>
+          <a:prstGeom prst="rect">
+            <a:avLst/>
+          </a:prstGeom>
+          <a:solidFill>
+            <a:srgbClr val="C7922C"/>
+          </a:solidFill>
+          <a:ln/>
+        </p:spPr>
+      </p:sp>
+      <p:sp>
+        <p:nvSpPr>
+          <p:cNvPr id="3" name="Text 1"/>
+          <p:cNvSpPr/>
+          <p:nvPr/>
+        </p:nvSpPr>
+        <p:spPr>
+          <a:xfrm>
+            <a:off x="365760" y="54864"/>
+            <a:ext cx="8412480" cy="457200"/>
+          </a:xfrm>
+          <a:prstGeom prst="rect">
+            <a:avLst/>
+          </a:prstGeom>
+          <a:noFill/>
+          <a:ln/>
+        </p:spPr>
+        <p:txBody>
+          <a:bodyPr wrap="square" lIns="0" tIns="0" rIns="0" bIns="0" rtlCol="0" anchor="ctr"/>
+          <a:lstStyle/>
+          <a:p>
+            <a:pPr indent="0" marL="0">
+              <a:buNone/>
+            </a:pPr>
+            <a:r>
+              <a:rPr lang="en-US" sz="2200" b="1" dirty="0">
+                <a:solidFill>
+                  <a:srgbClr val="FFFFFF"/>
+                </a:solidFill>
+                <a:latin typeface="Calibri" pitchFamily="34" charset="0"/>
+                <a:ea typeface="Calibri" pitchFamily="34" charset="-122"/>
+                <a:cs typeface="Calibri" pitchFamily="34" charset="-120"/>
+              </a:rPr>
+              <a:t>✏️  Grammar</a:t>
+            </a:r>
+            <a:endParaRPr lang="en-US" sz="2200" dirty="0"/>
+          </a:p>
+        </p:txBody>
+      </p:sp>
+      <p:sp>
+        <p:nvSpPr>
+          <p:cNvPr id="4" name="Text 2"/>
+          <p:cNvSpPr/>
+          <p:nvPr/>
+        </p:nvSpPr>
+        <p:spPr>
+          <a:xfrm>
+            <a:off x="365760" y="777240"/>
+            <a:ext cx="8229600" cy="237744"/>
+          </a:xfrm>
+          <a:prstGeom prst="rect">
+            <a:avLst/>
+          </a:prstGeom>
+          <a:noFill/>
+          <a:ln/>
+        </p:spPr>
+        <p:txBody>
+          <a:bodyPr wrap="square" lIns="0" tIns="0" rIns="0" bIns="0" rtlCol="0" anchor="ctr"/>
+          <a:lstStyle/>
+          <a:p>
+            <a:pPr indent="0" marL="0">
+              <a:buNone/>
+            </a:pPr>
+            <a:r>
+              <a:rPr lang="en-US" sz="1100" b="1" spc="100" kern="0" dirty="0">
+                <a:solidFill>
+                  <a:srgbClr val="C7922C"/>
+                </a:solidFill>
+                <a:latin typeface="Calibri" pitchFamily="34" charset="0"/>
+                <a:ea typeface="Calibri" pitchFamily="34" charset="-122"/>
+                <a:cs typeface="Calibri" pitchFamily="34" charset="-120"/>
+              </a:rPr>
+              <a:t>SUBJECT AND PREDICATE</a:t>
+            </a:r>
+            <a:endParaRPr lang="en-US" sz="1100" dirty="0"/>
+          </a:p>
+        </p:txBody>
+      </p:sp>
+      <p:sp>
+        <p:nvSpPr>
+          <p:cNvPr id="5" name="Shape 3"/>
+          <p:cNvSpPr/>
+          <p:nvPr/>
+        </p:nvSpPr>
+        <p:spPr>
+          <a:xfrm>
+            <a:off x="365760" y="1078992"/>
+            <a:ext cx="8412480" cy="658368"/>
           </a:xfrm>
           <a:prstGeom prst="roundRect">
             <a:avLst>
-              <a:gd name="adj" fmla="val 21818"/>
-            </a:avLst>
-          </a:prstGeom>
-          <a:solidFill>
-            <a:srgbClr val="F5D76E"/>
-          </a:solidFill>
-          <a:ln/>
-        </p:spPr>
-      </p:sp>
-      <p:sp>
-        <p:nvSpPr>
-          <p:cNvPr id="5" name="Text 3"/>
-          <p:cNvSpPr/>
-          <p:nvPr/>
-        </p:nvSpPr>
-        <p:spPr>
-          <a:xfrm>
-            <a:off x="6492240" y="173736"/>
-            <a:ext cx="2286000" cy="502920"/>
-          </a:xfrm>
-          <a:prstGeom prst="rect">
-            <a:avLst/>
-          </a:prstGeom>
-          <a:noFill/>
-          <a:ln/>
-        </p:spPr>
-        <p:txBody>
-          <a:bodyPr wrap="square" lIns="0" tIns="0" rIns="0" bIns="0" rtlCol="0" anchor="ctr"/>
-          <a:lstStyle/>
-          <a:p>
-            <a:pPr algn="ctr" indent="0" marL="0">
-              <a:buNone/>
-            </a:pPr>
-            <a:r>
-              <a:rPr lang="en-US" sz="1100" b="1" dirty="0">
-                <a:solidFill>
-                  <a:srgbClr val="0E1C42"/>
-                </a:solidFill>
-                <a:latin typeface="Calibri" pitchFamily="34" charset="0"/>
-                <a:ea typeface="Calibri" pitchFamily="34" charset="-122"/>
-                <a:cs typeface="Calibri" pitchFamily="34" charset="-120"/>
-              </a:rPr>
-              <a:t>CHAT PROMPT</a:t>
-            </a:r>
-            <a:endParaRPr lang="en-US" sz="1100" dirty="0"/>
-          </a:p>
-        </p:txBody>
-      </p:sp>
-      <p:sp>
-        <p:nvSpPr>
-          <p:cNvPr id="6" name="Text 4"/>
-          <p:cNvSpPr/>
-          <p:nvPr/>
-        </p:nvSpPr>
-        <p:spPr>
-          <a:xfrm>
-            <a:off x="457200" y="1005840"/>
-            <a:ext cx="8046720" cy="292608"/>
-          </a:xfrm>
-          <a:prstGeom prst="rect">
-            <a:avLst/>
-          </a:prstGeom>
-          <a:noFill/>
-          <a:ln/>
-        </p:spPr>
-        <p:txBody>
-          <a:bodyPr wrap="square" lIns="0" tIns="0" rIns="0" bIns="0" rtlCol="0" anchor="ctr"/>
-          <a:lstStyle/>
-          <a:p>
-            <a:pPr indent="0" marL="0">
-              <a:buNone/>
-            </a:pPr>
-            <a:r>
-              <a:rPr lang="en-US" sz="1100" b="1" spc="200" kern="0" dirty="0">
-                <a:solidFill>
-                  <a:srgbClr val="C7922C"/>
-                </a:solidFill>
-                <a:latin typeface="Calibri" pitchFamily="34" charset="0"/>
-                <a:ea typeface="Calibri" pitchFamily="34" charset="-122"/>
-                <a:cs typeface="Calibri" pitchFamily="34" charset="-120"/>
-              </a:rPr>
-              <a:t>WORD BANK — Sort these words!</a:t>
-            </a:r>
-            <a:endParaRPr lang="en-US" sz="1100" dirty="0"/>
-          </a:p>
-        </p:txBody>
-      </p:sp>
-      <p:sp>
-        <p:nvSpPr>
-          <p:cNvPr id="7" name="Shape 5"/>
-          <p:cNvSpPr/>
-          <p:nvPr/>
-        </p:nvSpPr>
-        <p:spPr>
-          <a:xfrm>
-            <a:off x="457200" y="1371600"/>
-            <a:ext cx="8229600" cy="914400"/>
-          </a:xfrm>
-          <a:prstGeom prst="roundRect">
-            <a:avLst>
-              <a:gd name="adj" fmla="val 10000"/>
+              <a:gd name="adj" fmla="val 13889"/>
             </a:avLst>
           </a:prstGeom>
           <a:solidFill>
@@ -3448,38 +3425,66 @@
       </p:sp>
       <p:sp>
         <p:nvSpPr>
-          <p:cNvPr id="8" name="Text 6"/>
-          <p:cNvSpPr/>
-          <p:nvPr/>
-        </p:nvSpPr>
-        <p:spPr>
-          <a:xfrm>
-            <a:off x="640080" y="1463040"/>
-            <a:ext cx="7863840" cy="731520"/>
-          </a:xfrm>
-          <a:prstGeom prst="rect">
-            <a:avLst/>
-          </a:prstGeom>
-          <a:noFill/>
-          <a:ln/>
-        </p:spPr>
-        <p:txBody>
-          <a:bodyPr wrap="square" lIns="0" tIns="0" rIns="0" bIns="0" rtlCol="0" anchor="ctr"/>
-          <a:lstStyle/>
-          <a:p>
-            <a:pPr algn="ctr" indent="0" marL="0">
+          <p:cNvPr id="6" name="Text 4"/>
+          <p:cNvSpPr/>
+          <p:nvPr/>
+        </p:nvSpPr>
+        <p:spPr>
+          <a:xfrm>
+            <a:off x="594360" y="1225296"/>
+            <a:ext cx="7863840" cy="402336"/>
+          </a:xfrm>
+          <a:prstGeom prst="rect">
+            <a:avLst/>
+          </a:prstGeom>
+          <a:noFill/>
+          <a:ln/>
+        </p:spPr>
+        <p:txBody>
+          <a:bodyPr wrap="square" lIns="0" tIns="0" rIns="0" bIns="0" rtlCol="0" anchor="ctr"/>
+          <a:lstStyle/>
+          <a:p>
+            <a:pPr indent="0" marL="0">
               <a:buNone/>
             </a:pPr>
             <a:r>
               <a:rPr lang="en-US" sz="1600" dirty="0">
                 <a:solidFill>
-                  <a:srgbClr val="0E1C42"/>
-                </a:solidFill>
-                <a:latin typeface="Calibri" pitchFamily="34" charset="0"/>
-                <a:ea typeface="Calibri" pitchFamily="34" charset="-122"/>
-                <a:cs typeface="Calibri" pitchFamily="34" charset="-120"/>
-              </a:rPr>
-              <a:t>broke     slide     kite     stone     slid     trip     stuck     cross</a:t>
+                  <a:srgbClr val="1E293B"/>
+                </a:solidFill>
+                <a:latin typeface="Calibri" pitchFamily="34" charset="0"/>
+                <a:ea typeface="Calibri" pitchFamily="34" charset="-122"/>
+                <a:cs typeface="Calibri" pitchFamily="34" charset="-120"/>
+              </a:rPr>
+              <a:t>The bulletin </a:t>
+            </a:r>
+            <a:pPr indent="0" marL="0">
+              <a:buNone/>
+            </a:pPr>
+            <a:r>
+              <a:rPr lang="en-US" sz="1600" b="1" dirty="0">
+                <a:solidFill>
+                  <a:srgbClr val="34B76F"/>
+                </a:solidFill>
+                <a:latin typeface="Calibri" pitchFamily="34" charset="0"/>
+                <a:ea typeface="Calibri" pitchFamily="34" charset="-122"/>
+                <a:cs typeface="Calibri" pitchFamily="34" charset="-120"/>
+              </a:rPr>
+              <a:t>board</a:t>
+            </a:r>
+            <a:pPr indent="0" marL="0">
+              <a:buNone/>
+            </a:pPr>
+            <a:r>
+              <a:rPr lang="en-US" sz="1600" dirty="0">
+                <a:solidFill>
+                  <a:srgbClr val="1E293B"/>
+                </a:solidFill>
+                <a:latin typeface="Calibri" pitchFamily="34" charset="0"/>
+                <a:ea typeface="Calibri" pitchFamily="34" charset="-122"/>
+                <a:cs typeface="Calibri" pitchFamily="34" charset="-120"/>
+              </a:rPr>
+              <a:t> fell on Stanley.</a:t>
             </a:r>
             <a:endParaRPr lang="en-US" sz="1600" dirty="0"/>
           </a:p>
@@ -3487,22 +3492,22 @@
       </p:sp>
       <p:sp>
         <p:nvSpPr>
-          <p:cNvPr id="9" name="Shape 7"/>
-          <p:cNvSpPr/>
-          <p:nvPr/>
-        </p:nvSpPr>
-        <p:spPr>
-          <a:xfrm>
-            <a:off x="457200" y="2468880"/>
-            <a:ext cx="3794760" cy="457200"/>
+          <p:cNvPr id="7" name="Shape 5"/>
+          <p:cNvSpPr/>
+          <p:nvPr/>
+        </p:nvSpPr>
+        <p:spPr>
+          <a:xfrm>
+            <a:off x="365760" y="1810512"/>
+            <a:ext cx="8412480" cy="658368"/>
           </a:xfrm>
           <a:prstGeom prst="roundRect">
             <a:avLst>
-              <a:gd name="adj" fmla="val 20000"/>
+              <a:gd name="adj" fmla="val 13889"/>
             </a:avLst>
           </a:prstGeom>
           <a:solidFill>
-            <a:srgbClr val="F0E8FF"/>
+            <a:srgbClr val="FFFFFF"/>
           </a:solidFill>
           <a:ln/>
           <a:effectLst>
@@ -3516,61 +3521,75 @@
       </p:sp>
       <p:sp>
         <p:nvSpPr>
-          <p:cNvPr id="10" name="Text 8"/>
-          <p:cNvSpPr/>
-          <p:nvPr/>
-        </p:nvSpPr>
-        <p:spPr>
-          <a:xfrm>
-            <a:off x="548640" y="2514600"/>
-            <a:ext cx="3611880" cy="365760"/>
-          </a:xfrm>
-          <a:prstGeom prst="rect">
-            <a:avLst/>
-          </a:prstGeom>
-          <a:noFill/>
-          <a:ln/>
-        </p:spPr>
-        <p:txBody>
-          <a:bodyPr wrap="square" lIns="0" tIns="0" rIns="0" bIns="0" rtlCol="0" anchor="ctr"/>
-          <a:lstStyle/>
-          <a:p>
-            <a:pPr algn="ctr" indent="0" marL="0">
-              <a:buNone/>
-            </a:pPr>
-            <a:r>
-              <a:rPr lang="en-US" sz="1400" b="1" dirty="0">
-                <a:solidFill>
-                  <a:srgbClr val="0E1C42"/>
-                </a:solidFill>
-                <a:latin typeface="Calibri" pitchFamily="34" charset="0"/>
-                <a:ea typeface="Calibri" pitchFamily="34" charset="-122"/>
-                <a:cs typeface="Calibri" pitchFamily="34" charset="-120"/>
-              </a:rPr>
-              <a:t>silent-e</a:t>
-            </a:r>
-            <a:endParaRPr lang="en-US" sz="1400" dirty="0"/>
-          </a:p>
-        </p:txBody>
-      </p:sp>
-      <p:sp>
-        <p:nvSpPr>
-          <p:cNvPr id="11" name="Shape 9"/>
-          <p:cNvSpPr/>
-          <p:nvPr/>
-        </p:nvSpPr>
-        <p:spPr>
-          <a:xfrm>
-            <a:off x="4480560" y="2468880"/>
-            <a:ext cx="3794760" cy="457200"/>
+          <p:cNvPr id="8" name="Text 6"/>
+          <p:cNvSpPr/>
+          <p:nvPr/>
+        </p:nvSpPr>
+        <p:spPr>
+          <a:xfrm>
+            <a:off x="594360" y="1956816"/>
+            <a:ext cx="7863840" cy="402336"/>
+          </a:xfrm>
+          <a:prstGeom prst="rect">
+            <a:avLst/>
+          </a:prstGeom>
+          <a:noFill/>
+          <a:ln/>
+        </p:spPr>
+        <p:txBody>
+          <a:bodyPr wrap="square" lIns="0" tIns="0" rIns="0" bIns="0" rtlCol="0" anchor="ctr"/>
+          <a:lstStyle/>
+          <a:p>
+            <a:pPr indent="0" marL="0">
+              <a:buNone/>
+            </a:pPr>
+            <a:r>
+              <a:rPr lang="en-US" sz="1600" b="1" dirty="0">
+                <a:solidFill>
+                  <a:srgbClr val="34B76F"/>
+                </a:solidFill>
+                <a:latin typeface="Calibri" pitchFamily="34" charset="0"/>
+                <a:ea typeface="Calibri" pitchFamily="34" charset="-122"/>
+                <a:cs typeface="Calibri" pitchFamily="34" charset="-120"/>
+              </a:rPr>
+              <a:t>Arthur</a:t>
+            </a:r>
+            <a:pPr indent="0" marL="0">
+              <a:buNone/>
+            </a:pPr>
+            <a:r>
+              <a:rPr lang="en-US" sz="1600" dirty="0">
+                <a:solidFill>
+                  <a:srgbClr val="1E293B"/>
+                </a:solidFill>
+                <a:latin typeface="Calibri" pitchFamily="34" charset="0"/>
+                <a:ea typeface="Calibri" pitchFamily="34" charset="-122"/>
+                <a:cs typeface="Calibri" pitchFamily="34" charset="-120"/>
+              </a:rPr>
+              <a:t> slept through the whole thing.</a:t>
+            </a:r>
+            <a:endParaRPr lang="en-US" sz="1600" dirty="0"/>
+          </a:p>
+        </p:txBody>
+      </p:sp>
+      <p:sp>
+        <p:nvSpPr>
+          <p:cNvPr id="9" name="Shape 7"/>
+          <p:cNvSpPr/>
+          <p:nvPr/>
+        </p:nvSpPr>
+        <p:spPr>
+          <a:xfrm>
+            <a:off x="365760" y="2542032"/>
+            <a:ext cx="8412480" cy="658368"/>
           </a:xfrm>
           <a:prstGeom prst="roundRect">
             <a:avLst>
-              <a:gd name="adj" fmla="val 20000"/>
+              <a:gd name="adj" fmla="val 13889"/>
             </a:avLst>
           </a:prstGeom>
           <a:solidFill>
-            <a:srgbClr val="F0E8FF"/>
+            <a:srgbClr val="FEF6E8"/>
           </a:solidFill>
           <a:ln/>
           <a:effectLst>
@@ -3584,40 +3603,189 @@
       </p:sp>
       <p:sp>
         <p:nvSpPr>
+          <p:cNvPr id="10" name="Text 8"/>
+          <p:cNvSpPr/>
+          <p:nvPr/>
+        </p:nvSpPr>
+        <p:spPr>
+          <a:xfrm>
+            <a:off x="594360" y="2688336"/>
+            <a:ext cx="7863840" cy="402336"/>
+          </a:xfrm>
+          <a:prstGeom prst="rect">
+            <a:avLst/>
+          </a:prstGeom>
+          <a:noFill/>
+          <a:ln/>
+        </p:spPr>
+        <p:txBody>
+          <a:bodyPr wrap="square" lIns="0" tIns="0" rIns="0" bIns="0" rtlCol="0" anchor="ctr"/>
+          <a:lstStyle/>
+          <a:p>
+            <a:pPr indent="0" marL="0">
+              <a:buNone/>
+            </a:pPr>
+            <a:r>
+              <a:rPr lang="en-US" sz="1600" dirty="0">
+                <a:solidFill>
+                  <a:srgbClr val="1E293B"/>
+                </a:solidFill>
+                <a:latin typeface="Calibri" pitchFamily="34" charset="0"/>
+                <a:ea typeface="Calibri" pitchFamily="34" charset="-122"/>
+                <a:cs typeface="Calibri" pitchFamily="34" charset="-120"/>
+              </a:rPr>
+              <a:t>The </a:t>
+            </a:r>
+            <a:pPr indent="0" marL="0">
+              <a:buNone/>
+            </a:pPr>
+            <a:r>
+              <a:rPr lang="en-US" sz="1600" b="1" dirty="0">
+                <a:solidFill>
+                  <a:srgbClr val="34B76F"/>
+                </a:solidFill>
+                <a:latin typeface="Calibri" pitchFamily="34" charset="0"/>
+                <a:ea typeface="Calibri" pitchFamily="34" charset="-122"/>
+                <a:cs typeface="Calibri" pitchFamily="34" charset="-120"/>
+              </a:rPr>
+              <a:t>doctor</a:t>
+            </a:r>
+            <a:pPr indent="0" marL="0">
+              <a:buNone/>
+            </a:pPr>
+            <a:r>
+              <a:rPr lang="en-US" sz="1600" dirty="0">
+                <a:solidFill>
+                  <a:srgbClr val="1E293B"/>
+                </a:solidFill>
+                <a:latin typeface="Calibri" pitchFamily="34" charset="0"/>
+                <a:ea typeface="Calibri" pitchFamily="34" charset="-122"/>
+                <a:cs typeface="Calibri" pitchFamily="34" charset="-120"/>
+              </a:rPr>
+              <a:t> examined him all over.</a:t>
+            </a:r>
+            <a:endParaRPr lang="en-US" sz="1600" dirty="0"/>
+          </a:p>
+        </p:txBody>
+      </p:sp>
+      <p:sp>
+        <p:nvSpPr>
+          <p:cNvPr id="11" name="Shape 9"/>
+          <p:cNvSpPr/>
+          <p:nvPr/>
+        </p:nvSpPr>
+        <p:spPr>
+          <a:xfrm>
+            <a:off x="365760" y="3273552"/>
+            <a:ext cx="8412480" cy="658368"/>
+          </a:xfrm>
+          <a:prstGeom prst="roundRect">
+            <a:avLst>
+              <a:gd name="adj" fmla="val 13889"/>
+            </a:avLst>
+          </a:prstGeom>
+          <a:solidFill>
+            <a:srgbClr val="FFFFFF"/>
+          </a:solidFill>
+          <a:ln/>
+          <a:effectLst>
+            <a:outerShdw sx="100000" sy="100000" kx="0" ky="0" algn="bl" rotWithShape="0" blurRad="101600" dist="38100" dir="2700000">
+              <a:srgbClr val="000000">
+                <a:alpha val="12000"/>
+              </a:srgbClr>
+            </a:outerShdw>
+          </a:effectLst>
+        </p:spPr>
+      </p:sp>
+      <p:sp>
+        <p:nvSpPr>
           <p:cNvPr id="12" name="Text 10"/>
           <p:cNvSpPr/>
           <p:nvPr/>
         </p:nvSpPr>
         <p:spPr>
           <a:xfrm>
-            <a:off x="4572000" y="2514600"/>
-            <a:ext cx="3611880" cy="365760"/>
-          </a:xfrm>
-          <a:prstGeom prst="rect">
-            <a:avLst/>
-          </a:prstGeom>
-          <a:noFill/>
-          <a:ln/>
-        </p:spPr>
-        <p:txBody>
-          <a:bodyPr wrap="square" lIns="0" tIns="0" rIns="0" bIns="0" rtlCol="0" anchor="ctr"/>
-          <a:lstStyle/>
-          <a:p>
-            <a:pPr algn="ctr" indent="0" marL="0">
-              <a:buNone/>
-            </a:pPr>
-            <a:r>
-              <a:rPr lang="en-US" sz="1400" b="1" dirty="0">
-                <a:solidFill>
-                  <a:srgbClr val="0E1C42"/>
-                </a:solidFill>
-                <a:latin typeface="Calibri" pitchFamily="34" charset="0"/>
-                <a:ea typeface="Calibri" pitchFamily="34" charset="-122"/>
-                <a:cs typeface="Calibri" pitchFamily="34" charset="-120"/>
-              </a:rPr>
-              <a:t>closed</a:t>
-            </a:r>
-            <a:endParaRPr lang="en-US" sz="1400" dirty="0"/>
+            <a:off x="594360" y="3419856"/>
+            <a:ext cx="7863840" cy="402336"/>
+          </a:xfrm>
+          <a:prstGeom prst="rect">
+            <a:avLst/>
+          </a:prstGeom>
+          <a:noFill/>
+          <a:ln/>
+        </p:spPr>
+        <p:txBody>
+          <a:bodyPr wrap="square" lIns="0" tIns="0" rIns="0" bIns="0" rtlCol="0" anchor="ctr"/>
+          <a:lstStyle/>
+          <a:p>
+            <a:pPr indent="0" marL="0">
+              <a:buNone/>
+            </a:pPr>
+            <a:r>
+              <a:rPr lang="en-US" sz="1600" b="1" dirty="0">
+                <a:solidFill>
+                  <a:srgbClr val="34B76F"/>
+                </a:solidFill>
+                <a:latin typeface="Calibri" pitchFamily="34" charset="0"/>
+                <a:ea typeface="Calibri" pitchFamily="34" charset="-122"/>
+                <a:cs typeface="Calibri" pitchFamily="34" charset="-120"/>
+              </a:rPr>
+              <a:t>Stanley</a:t>
+            </a:r>
+            <a:pPr indent="0" marL="0">
+              <a:buNone/>
+            </a:pPr>
+            <a:r>
+              <a:rPr lang="en-US" sz="1600" dirty="0">
+                <a:solidFill>
+                  <a:srgbClr val="1E293B"/>
+                </a:solidFill>
+                <a:latin typeface="Calibri" pitchFamily="34" charset="0"/>
+                <a:ea typeface="Calibri" pitchFamily="34" charset="-122"/>
+                <a:cs typeface="Calibri" pitchFamily="34" charset="-120"/>
+              </a:rPr>
+              <a:t> folded himself into the envelope.</a:t>
+            </a:r>
+            <a:endParaRPr lang="en-US" sz="1600" dirty="0"/>
+          </a:p>
+        </p:txBody>
+      </p:sp>
+      <p:sp>
+        <p:nvSpPr>
+          <p:cNvPr id="13" name="Text 11"/>
+          <p:cNvSpPr/>
+          <p:nvPr/>
+        </p:nvSpPr>
+        <p:spPr>
+          <a:xfrm>
+            <a:off x="365760" y="4050792"/>
+            <a:ext cx="8412480" cy="365760"/>
+          </a:xfrm>
+          <a:prstGeom prst="rect">
+            <a:avLst/>
+          </a:prstGeom>
+          <a:noFill/>
+          <a:ln/>
+        </p:spPr>
+        <p:txBody>
+          <a:bodyPr wrap="square" lIns="0" tIns="0" rIns="0" bIns="0" rtlCol="0" anchor="ctr"/>
+          <a:lstStyle/>
+          <a:p>
+            <a:pPr indent="0" marL="0">
+              <a:buNone/>
+            </a:pPr>
+            <a:r>
+              <a:rPr lang="en-US" sz="1500" b="1" dirty="0">
+                <a:solidFill>
+                  <a:srgbClr val="34B76F"/>
+                </a:solidFill>
+                <a:latin typeface="Calibri" pitchFamily="34" charset="0"/>
+                <a:ea typeface="Calibri" pitchFamily="34" charset="-122"/>
+                <a:cs typeface="Calibri" pitchFamily="34" charset="-120"/>
+              </a:rPr>
+              <a:t>✅  Answers revealed</a:t>
+            </a:r>
+            <a:endParaRPr lang="en-US" sz="1500" dirty="0"/>
           </a:p>
         </p:txBody>
       </p:sp>
@@ -3635,7 +3803,7 @@
     <p:bg>
       <p:bgPr>
         <a:solidFill>
-          <a:srgbClr val="E5F7FC"/>
+          <a:srgbClr val="F8FAFC"/>
         </a:solidFill>
       </p:bgPr>
     </p:bg>
@@ -3655,30 +3823,89 @@
       </p:grpSpPr>
       <p:sp>
         <p:nvSpPr>
-          <p:cNvPr id="2" name="Text 0"/>
-          <p:cNvSpPr/>
-          <p:nvPr/>
-        </p:nvSpPr>
-        <p:spPr>
-          <a:xfrm>
-            <a:off x="365760" y="164592"/>
-            <a:ext cx="5943600" cy="566928"/>
-          </a:xfrm>
-          <a:prstGeom prst="rect">
-            <a:avLst/>
-          </a:prstGeom>
-          <a:noFill/>
-          <a:ln/>
-        </p:spPr>
-        <p:txBody>
-          <a:bodyPr wrap="square" lIns="0" tIns="0" rIns="0" bIns="0" rtlCol="0" anchor="ctr"/>
-          <a:lstStyle/>
-          <a:p>
-            <a:pPr algn="l" indent="0" marL="0">
-              <a:buNone/>
-            </a:pPr>
-            <a:r>
-              <a:rPr lang="en-US" sz="2800" b="1" dirty="0">
+          <p:cNvPr id="2" name="Shape 0"/>
+          <p:cNvSpPr/>
+          <p:nvPr/>
+        </p:nvSpPr>
+        <p:spPr>
+          <a:xfrm>
+            <a:off x="0" y="0"/>
+            <a:ext cx="9144000" cy="566928"/>
+          </a:xfrm>
+          <a:prstGeom prst="rect">
+            <a:avLst/>
+          </a:prstGeom>
+          <a:solidFill>
+            <a:srgbClr val="0E1C42"/>
+          </a:solidFill>
+          <a:ln/>
+        </p:spPr>
+      </p:sp>
+      <p:sp>
+        <p:nvSpPr>
+          <p:cNvPr id="3" name="Text 1"/>
+          <p:cNvSpPr/>
+          <p:nvPr/>
+        </p:nvSpPr>
+        <p:spPr>
+          <a:xfrm>
+            <a:off x="365760" y="54864"/>
+            <a:ext cx="8412480" cy="457200"/>
+          </a:xfrm>
+          <a:prstGeom prst="rect">
+            <a:avLst/>
+          </a:prstGeom>
+          <a:noFill/>
+          <a:ln/>
+        </p:spPr>
+        <p:txBody>
+          <a:bodyPr wrap="square" lIns="0" tIns="0" rIns="0" bIns="0" rtlCol="0" anchor="ctr"/>
+          <a:lstStyle/>
+          <a:p>
+            <a:pPr indent="0" marL="0">
+              <a:buNone/>
+            </a:pPr>
+            <a:r>
+              <a:rPr lang="en-US" sz="2200" b="1" dirty="0">
+                <a:solidFill>
+                  <a:srgbClr val="FFFFFF"/>
+                </a:solidFill>
+                <a:latin typeface="Calibri" pitchFamily="34" charset="0"/>
+                <a:ea typeface="Calibri" pitchFamily="34" charset="-122"/>
+                <a:cs typeface="Calibri" pitchFamily="34" charset="-120"/>
+              </a:rPr>
+              <a:t>🔠  Spelling</a:t>
+            </a:r>
+            <a:endParaRPr lang="en-US" sz="2200" dirty="0"/>
+          </a:p>
+        </p:txBody>
+      </p:sp>
+      <p:sp>
+        <p:nvSpPr>
+          <p:cNvPr id="4" name="Text 2"/>
+          <p:cNvSpPr/>
+          <p:nvPr/>
+        </p:nvSpPr>
+        <p:spPr>
+          <a:xfrm>
+            <a:off x="365760" y="777240"/>
+            <a:ext cx="8229600" cy="237744"/>
+          </a:xfrm>
+          <a:prstGeom prst="rect">
+            <a:avLst/>
+          </a:prstGeom>
+          <a:noFill/>
+          <a:ln/>
+        </p:spPr>
+        <p:txBody>
+          <a:bodyPr wrap="square" lIns="0" tIns="0" rIns="0" bIns="0" rtlCol="0" anchor="ctr"/>
+          <a:lstStyle/>
+          <a:p>
+            <a:pPr indent="0" marL="0">
+              <a:buNone/>
+            </a:pPr>
+            <a:r>
+              <a:rPr lang="en-US" sz="1100" b="1" spc="100" kern="0" dirty="0">
                 <a:solidFill>
                   <a:srgbClr val="0E1C42"/>
                 </a:solidFill>
@@ -3686,116 +3913,76 @@
                 <a:ea typeface="Calibri" pitchFamily="34" charset="-122"/>
                 <a:cs typeface="Calibri" pitchFamily="34" charset="-120"/>
               </a:rPr>
-              <a:t>🔠 Spelling: Long vowels and silent-e review — Sorted</a:t>
-            </a:r>
-            <a:endParaRPr lang="en-US" sz="2800" dirty="0"/>
-          </a:p>
-        </p:txBody>
-      </p:sp>
-      <p:sp>
-        <p:nvSpPr>
-          <p:cNvPr id="3" name="Shape 1"/>
-          <p:cNvSpPr/>
-          <p:nvPr/>
-        </p:nvSpPr>
-        <p:spPr>
-          <a:xfrm>
-            <a:off x="365760" y="749808"/>
-            <a:ext cx="8412480" cy="0"/>
-          </a:xfrm>
-          <a:prstGeom prst="line">
-            <a:avLst/>
-          </a:prstGeom>
-          <a:noFill/>
+              <a:t>LONG VOWELS AND SILENT-E REVIEW</a:t>
+            </a:r>
+            <a:endParaRPr lang="en-US" sz="1100" dirty="0"/>
+          </a:p>
+        </p:txBody>
+      </p:sp>
+      <p:sp>
+        <p:nvSpPr>
+          <p:cNvPr id="5" name="Text 3"/>
+          <p:cNvSpPr/>
+          <p:nvPr/>
+        </p:nvSpPr>
+        <p:spPr>
+          <a:xfrm>
+            <a:off x="365760" y="1078992"/>
+            <a:ext cx="8229600" cy="237744"/>
+          </a:xfrm>
+          <a:prstGeom prst="rect">
+            <a:avLst/>
+          </a:prstGeom>
+          <a:noFill/>
+          <a:ln/>
+        </p:spPr>
+        <p:txBody>
+          <a:bodyPr wrap="square" lIns="0" tIns="0" rIns="0" bIns="0" rtlCol="0" anchor="ctr"/>
+          <a:lstStyle/>
+          <a:p>
+            <a:pPr indent="0" marL="0">
+              <a:buNone/>
+            </a:pPr>
+            <a:r>
+              <a:rPr lang="en-US" sz="1100" b="1" spc="100" kern="0" dirty="0">
+                <a:solidFill>
+                  <a:srgbClr val="64748B"/>
+                </a:solidFill>
+                <a:latin typeface="Calibri" pitchFamily="34" charset="0"/>
+                <a:ea typeface="Calibri" pitchFamily="34" charset="-122"/>
+                <a:cs typeface="Calibri" pitchFamily="34" charset="-120"/>
+              </a:rPr>
+              <a:t>WORD BANK</a:t>
+            </a:r>
+            <a:endParaRPr lang="en-US" sz="1100" dirty="0"/>
+          </a:p>
+        </p:txBody>
+      </p:sp>
+      <p:sp>
+        <p:nvSpPr>
+          <p:cNvPr id="6" name="Shape 4"/>
+          <p:cNvSpPr/>
+          <p:nvPr/>
+        </p:nvSpPr>
+        <p:spPr>
+          <a:xfrm>
+            <a:off x="365760" y="1353312"/>
+            <a:ext cx="8412480" cy="1005840"/>
+          </a:xfrm>
+          <a:prstGeom prst="roundRect">
+            <a:avLst>
+              <a:gd name="adj" fmla="val 9091"/>
+            </a:avLst>
+          </a:prstGeom>
+          <a:solidFill>
+            <a:srgbClr val="FFFFFF"/>
+          </a:solidFill>
           <a:ln w="19050">
             <a:solidFill>
-              <a:srgbClr val="F5D76E"/>
+              <a:srgbClr val="0E1C42"/>
             </a:solidFill>
             <a:prstDash val="solid"/>
           </a:ln>
-        </p:spPr>
-      </p:sp>
-      <p:sp>
-        <p:nvSpPr>
-          <p:cNvPr id="4" name="Shape 2"/>
-          <p:cNvSpPr/>
-          <p:nvPr/>
-        </p:nvSpPr>
-        <p:spPr>
-          <a:xfrm>
-            <a:off x="6492240" y="173736"/>
-            <a:ext cx="2286000" cy="502920"/>
-          </a:xfrm>
-          <a:prstGeom prst="roundRect">
-            <a:avLst>
-              <a:gd name="adj" fmla="val 21818"/>
-            </a:avLst>
-          </a:prstGeom>
-          <a:solidFill>
-            <a:srgbClr val="F5D76E"/>
-          </a:solidFill>
-          <a:ln/>
-        </p:spPr>
-      </p:sp>
-      <p:sp>
-        <p:nvSpPr>
-          <p:cNvPr id="5" name="Text 3"/>
-          <p:cNvSpPr/>
-          <p:nvPr/>
-        </p:nvSpPr>
-        <p:spPr>
-          <a:xfrm>
-            <a:off x="6492240" y="173736"/>
-            <a:ext cx="2286000" cy="502920"/>
-          </a:xfrm>
-          <a:prstGeom prst="rect">
-            <a:avLst/>
-          </a:prstGeom>
-          <a:noFill/>
-          <a:ln/>
-        </p:spPr>
-        <p:txBody>
-          <a:bodyPr wrap="square" lIns="0" tIns="0" rIns="0" bIns="0" rtlCol="0" anchor="ctr"/>
-          <a:lstStyle/>
-          <a:p>
-            <a:pPr algn="ctr" indent="0" marL="0">
-              <a:buNone/>
-            </a:pPr>
-            <a:r>
-              <a:rPr lang="en-US" sz="1100" b="1" dirty="0">
-                <a:solidFill>
-                  <a:srgbClr val="0E1C42"/>
-                </a:solidFill>
-                <a:latin typeface="Calibri" pitchFamily="34" charset="0"/>
-                <a:ea typeface="Calibri" pitchFamily="34" charset="-122"/>
-                <a:cs typeface="Calibri" pitchFamily="34" charset="-120"/>
-              </a:rPr>
-              <a:t>CHAT PROMPT</a:t>
-            </a:r>
-            <a:endParaRPr lang="en-US" sz="1100" dirty="0"/>
-          </a:p>
-        </p:txBody>
-      </p:sp>
-      <p:sp>
-        <p:nvSpPr>
-          <p:cNvPr id="6" name="Shape 4"/>
-          <p:cNvSpPr/>
-          <p:nvPr/>
-        </p:nvSpPr>
-        <p:spPr>
-          <a:xfrm>
-            <a:off x="457200" y="1005840"/>
-            <a:ext cx="3794760" cy="457200"/>
-          </a:xfrm>
-          <a:prstGeom prst="roundRect">
-            <a:avLst>
-              <a:gd name="adj" fmla="val 20000"/>
-            </a:avLst>
-          </a:prstGeom>
-          <a:solidFill>
-            <a:srgbClr val="F0E8FF"/>
-          </a:solidFill>
-          <a:ln/>
           <a:effectLst>
             <a:outerShdw sx="100000" sy="100000" kx="0" ky="0" algn="bl" rotWithShape="0" blurRad="101600" dist="38100" dir="2700000">
               <a:srgbClr val="000000">
@@ -3813,24 +4000,24 @@
         </p:nvSpPr>
         <p:spPr>
           <a:xfrm>
-            <a:off x="548640" y="1051560"/>
-            <a:ext cx="3611880" cy="365760"/>
-          </a:xfrm>
-          <a:prstGeom prst="rect">
-            <a:avLst/>
-          </a:prstGeom>
-          <a:noFill/>
-          <a:ln/>
-        </p:spPr>
-        <p:txBody>
-          <a:bodyPr wrap="square" lIns="0" tIns="0" rIns="0" bIns="0" rtlCol="0" anchor="ctr"/>
-          <a:lstStyle/>
-          <a:p>
-            <a:pPr algn="ctr" indent="0" marL="0">
-              <a:buNone/>
-            </a:pPr>
-            <a:r>
-              <a:rPr lang="en-US" sz="1400" b="1" dirty="0">
+            <a:off x="594360" y="1481328"/>
+            <a:ext cx="7955280" cy="749808"/>
+          </a:xfrm>
+          <a:prstGeom prst="rect">
+            <a:avLst/>
+          </a:prstGeom>
+          <a:noFill/>
+          <a:ln/>
+        </p:spPr>
+        <p:txBody>
+          <a:bodyPr wrap="square" lIns="0" tIns="0" rIns="0" bIns="0" rtlCol="0" anchor="ctr"/>
+          <a:lstStyle/>
+          <a:p>
+            <a:pPr indent="0" marL="0">
+              <a:buNone/>
+            </a:pPr>
+            <a:r>
+              <a:rPr lang="en-US" sz="1700" dirty="0">
                 <a:solidFill>
                   <a:srgbClr val="0E1C42"/>
                 </a:solidFill>
@@ -3838,9 +4025,9 @@
                 <a:ea typeface="Calibri" pitchFamily="34" charset="-122"/>
                 <a:cs typeface="Calibri" pitchFamily="34" charset="-120"/>
               </a:rPr>
-              <a:t>silent-e</a:t>
-            </a:r>
-            <a:endParaRPr lang="en-US" sz="1400" dirty="0"/>
+              <a:t>broke   ·   slide   ·   kite   ·   stone   ·   slid   ·   trip   ·   stuck   ·   cross</a:t>
+            </a:r>
+            <a:endParaRPr lang="en-US" sz="1700" dirty="0"/>
           </a:p>
         </p:txBody>
       </p:sp>
@@ -3852,375 +4039,34 @@
         </p:nvSpPr>
         <p:spPr>
           <a:xfrm>
-            <a:off x="548640" y="1554480"/>
-            <a:ext cx="3611880" cy="320040"/>
-          </a:xfrm>
-          <a:prstGeom prst="rect">
-            <a:avLst/>
-          </a:prstGeom>
-          <a:noFill/>
-          <a:ln/>
-        </p:spPr>
-        <p:txBody>
-          <a:bodyPr wrap="square" lIns="0" tIns="0" rIns="0" bIns="0" rtlCol="0" anchor="ctr"/>
-          <a:lstStyle/>
-          <a:p>
-            <a:pPr algn="ctr" indent="0" marL="0">
-              <a:buNone/>
-            </a:pPr>
-            <a:r>
-              <a:rPr lang="en-US" sz="1400" b="1" dirty="0">
-                <a:solidFill>
-                  <a:srgbClr val="34B76F"/>
-                </a:solidFill>
-                <a:latin typeface="Calibri" pitchFamily="34" charset="0"/>
-                <a:ea typeface="Calibri" pitchFamily="34" charset="-122"/>
-                <a:cs typeface="Calibri" pitchFamily="34" charset="-120"/>
-              </a:rPr>
-              <a:t>broke</a:t>
-            </a:r>
-            <a:endParaRPr lang="en-US" sz="1400" dirty="0"/>
-          </a:p>
-        </p:txBody>
-      </p:sp>
-      <p:sp>
-        <p:nvSpPr>
-          <p:cNvPr id="9" name="Text 7"/>
-          <p:cNvSpPr/>
-          <p:nvPr/>
-        </p:nvSpPr>
-        <p:spPr>
-          <a:xfrm>
-            <a:off x="548640" y="1901952"/>
-            <a:ext cx="3611880" cy="320040"/>
-          </a:xfrm>
-          <a:prstGeom prst="rect">
-            <a:avLst/>
-          </a:prstGeom>
-          <a:noFill/>
-          <a:ln/>
-        </p:spPr>
-        <p:txBody>
-          <a:bodyPr wrap="square" lIns="0" tIns="0" rIns="0" bIns="0" rtlCol="0" anchor="ctr"/>
-          <a:lstStyle/>
-          <a:p>
-            <a:pPr algn="ctr" indent="0" marL="0">
-              <a:buNone/>
-            </a:pPr>
-            <a:r>
-              <a:rPr lang="en-US" sz="1400" b="1" dirty="0">
-                <a:solidFill>
-                  <a:srgbClr val="34B76F"/>
-                </a:solidFill>
-                <a:latin typeface="Calibri" pitchFamily="34" charset="0"/>
-                <a:ea typeface="Calibri" pitchFamily="34" charset="-122"/>
-                <a:cs typeface="Calibri" pitchFamily="34" charset="-120"/>
-              </a:rPr>
-              <a:t>slide</a:t>
-            </a:r>
-            <a:endParaRPr lang="en-US" sz="1400" dirty="0"/>
-          </a:p>
-        </p:txBody>
-      </p:sp>
-      <p:sp>
-        <p:nvSpPr>
-          <p:cNvPr id="10" name="Text 8"/>
-          <p:cNvSpPr/>
-          <p:nvPr/>
-        </p:nvSpPr>
-        <p:spPr>
-          <a:xfrm>
-            <a:off x="548640" y="2249424"/>
-            <a:ext cx="3611880" cy="320040"/>
-          </a:xfrm>
-          <a:prstGeom prst="rect">
-            <a:avLst/>
-          </a:prstGeom>
-          <a:noFill/>
-          <a:ln/>
-        </p:spPr>
-        <p:txBody>
-          <a:bodyPr wrap="square" lIns="0" tIns="0" rIns="0" bIns="0" rtlCol="0" anchor="ctr"/>
-          <a:lstStyle/>
-          <a:p>
-            <a:pPr algn="ctr" indent="0" marL="0">
-              <a:buNone/>
-            </a:pPr>
-            <a:r>
-              <a:rPr lang="en-US" sz="1400" b="1" dirty="0">
-                <a:solidFill>
-                  <a:srgbClr val="34B76F"/>
-                </a:solidFill>
-                <a:latin typeface="Calibri" pitchFamily="34" charset="0"/>
-                <a:ea typeface="Calibri" pitchFamily="34" charset="-122"/>
-                <a:cs typeface="Calibri" pitchFamily="34" charset="-120"/>
-              </a:rPr>
-              <a:t>kite</a:t>
-            </a:r>
-            <a:endParaRPr lang="en-US" sz="1400" dirty="0"/>
-          </a:p>
-        </p:txBody>
-      </p:sp>
-      <p:sp>
-        <p:nvSpPr>
-          <p:cNvPr id="11" name="Text 9"/>
-          <p:cNvSpPr/>
-          <p:nvPr/>
-        </p:nvSpPr>
-        <p:spPr>
-          <a:xfrm>
-            <a:off x="548640" y="2596896"/>
-            <a:ext cx="3611880" cy="320040"/>
-          </a:xfrm>
-          <a:prstGeom prst="rect">
-            <a:avLst/>
-          </a:prstGeom>
-          <a:noFill/>
-          <a:ln/>
-        </p:spPr>
-        <p:txBody>
-          <a:bodyPr wrap="square" lIns="0" tIns="0" rIns="0" bIns="0" rtlCol="0" anchor="ctr"/>
-          <a:lstStyle/>
-          <a:p>
-            <a:pPr algn="ctr" indent="0" marL="0">
-              <a:buNone/>
-            </a:pPr>
-            <a:r>
-              <a:rPr lang="en-US" sz="1400" b="1" dirty="0">
-                <a:solidFill>
-                  <a:srgbClr val="34B76F"/>
-                </a:solidFill>
-                <a:latin typeface="Calibri" pitchFamily="34" charset="0"/>
-                <a:ea typeface="Calibri" pitchFamily="34" charset="-122"/>
-                <a:cs typeface="Calibri" pitchFamily="34" charset="-120"/>
-              </a:rPr>
-              <a:t>stone</a:t>
-            </a:r>
-            <a:endParaRPr lang="en-US" sz="1400" dirty="0"/>
-          </a:p>
-        </p:txBody>
-      </p:sp>
-      <p:sp>
-        <p:nvSpPr>
-          <p:cNvPr id="12" name="Shape 10"/>
-          <p:cNvSpPr/>
-          <p:nvPr/>
-        </p:nvSpPr>
-        <p:spPr>
-          <a:xfrm>
-            <a:off x="4480560" y="1005840"/>
-            <a:ext cx="3794760" cy="457200"/>
-          </a:xfrm>
-          <a:prstGeom prst="roundRect">
-            <a:avLst>
-              <a:gd name="adj" fmla="val 20000"/>
-            </a:avLst>
-          </a:prstGeom>
-          <a:solidFill>
-            <a:srgbClr val="F0E8FF"/>
-          </a:solidFill>
-          <a:ln/>
-          <a:effectLst>
-            <a:outerShdw sx="100000" sy="100000" kx="0" ky="0" algn="bl" rotWithShape="0" blurRad="101600" dist="38100" dir="2700000">
-              <a:srgbClr val="000000">
-                <a:alpha val="12000"/>
-              </a:srgbClr>
-            </a:outerShdw>
-          </a:effectLst>
-        </p:spPr>
-      </p:sp>
-      <p:sp>
-        <p:nvSpPr>
-          <p:cNvPr id="13" name="Text 11"/>
-          <p:cNvSpPr/>
-          <p:nvPr/>
-        </p:nvSpPr>
-        <p:spPr>
-          <a:xfrm>
-            <a:off x="4572000" y="1051560"/>
-            <a:ext cx="3611880" cy="365760"/>
-          </a:xfrm>
-          <a:prstGeom prst="rect">
-            <a:avLst/>
-          </a:prstGeom>
-          <a:noFill/>
-          <a:ln/>
-        </p:spPr>
-        <p:txBody>
-          <a:bodyPr wrap="square" lIns="0" tIns="0" rIns="0" bIns="0" rtlCol="0" anchor="ctr"/>
-          <a:lstStyle/>
-          <a:p>
-            <a:pPr algn="ctr" indent="0" marL="0">
-              <a:buNone/>
-            </a:pPr>
-            <a:r>
-              <a:rPr lang="en-US" sz="1400" b="1" dirty="0">
-                <a:solidFill>
-                  <a:srgbClr val="0E1C42"/>
-                </a:solidFill>
-                <a:latin typeface="Calibri" pitchFamily="34" charset="0"/>
-                <a:ea typeface="Calibri" pitchFamily="34" charset="-122"/>
-                <a:cs typeface="Calibri" pitchFamily="34" charset="-120"/>
-              </a:rPr>
-              <a:t>closed</a:t>
-            </a:r>
-            <a:endParaRPr lang="en-US" sz="1400" dirty="0"/>
-          </a:p>
-        </p:txBody>
-      </p:sp>
-      <p:sp>
-        <p:nvSpPr>
-          <p:cNvPr id="14" name="Text 12"/>
-          <p:cNvSpPr/>
-          <p:nvPr/>
-        </p:nvSpPr>
-        <p:spPr>
-          <a:xfrm>
-            <a:off x="4572000" y="1554480"/>
-            <a:ext cx="3611880" cy="320040"/>
-          </a:xfrm>
-          <a:prstGeom prst="rect">
-            <a:avLst/>
-          </a:prstGeom>
-          <a:noFill/>
-          <a:ln/>
-        </p:spPr>
-        <p:txBody>
-          <a:bodyPr wrap="square" lIns="0" tIns="0" rIns="0" bIns="0" rtlCol="0" anchor="ctr"/>
-          <a:lstStyle/>
-          <a:p>
-            <a:pPr algn="ctr" indent="0" marL="0">
-              <a:buNone/>
-            </a:pPr>
-            <a:r>
-              <a:rPr lang="en-US" sz="1400" b="1" dirty="0">
-                <a:solidFill>
-                  <a:srgbClr val="34B76F"/>
-                </a:solidFill>
-                <a:latin typeface="Calibri" pitchFamily="34" charset="0"/>
-                <a:ea typeface="Calibri" pitchFamily="34" charset="-122"/>
-                <a:cs typeface="Calibri" pitchFamily="34" charset="-120"/>
-              </a:rPr>
-              <a:t>slid</a:t>
-            </a:r>
-            <a:endParaRPr lang="en-US" sz="1400" dirty="0"/>
-          </a:p>
-        </p:txBody>
-      </p:sp>
-      <p:sp>
-        <p:nvSpPr>
-          <p:cNvPr id="15" name="Text 13"/>
-          <p:cNvSpPr/>
-          <p:nvPr/>
-        </p:nvSpPr>
-        <p:spPr>
-          <a:xfrm>
-            <a:off x="4572000" y="1901952"/>
-            <a:ext cx="3611880" cy="320040"/>
-          </a:xfrm>
-          <a:prstGeom prst="rect">
-            <a:avLst/>
-          </a:prstGeom>
-          <a:noFill/>
-          <a:ln/>
-        </p:spPr>
-        <p:txBody>
-          <a:bodyPr wrap="square" lIns="0" tIns="0" rIns="0" bIns="0" rtlCol="0" anchor="ctr"/>
-          <a:lstStyle/>
-          <a:p>
-            <a:pPr algn="ctr" indent="0" marL="0">
-              <a:buNone/>
-            </a:pPr>
-            <a:r>
-              <a:rPr lang="en-US" sz="1400" b="1" dirty="0">
-                <a:solidFill>
-                  <a:srgbClr val="34B76F"/>
-                </a:solidFill>
-                <a:latin typeface="Calibri" pitchFamily="34" charset="0"/>
-                <a:ea typeface="Calibri" pitchFamily="34" charset="-122"/>
-                <a:cs typeface="Calibri" pitchFamily="34" charset="-120"/>
-              </a:rPr>
-              <a:t>trip</a:t>
-            </a:r>
-            <a:endParaRPr lang="en-US" sz="1400" dirty="0"/>
-          </a:p>
-        </p:txBody>
-      </p:sp>
-      <p:sp>
-        <p:nvSpPr>
-          <p:cNvPr id="16" name="Text 14"/>
-          <p:cNvSpPr/>
-          <p:nvPr/>
-        </p:nvSpPr>
-        <p:spPr>
-          <a:xfrm>
-            <a:off x="4572000" y="2249424"/>
-            <a:ext cx="3611880" cy="320040"/>
-          </a:xfrm>
-          <a:prstGeom prst="rect">
-            <a:avLst/>
-          </a:prstGeom>
-          <a:noFill/>
-          <a:ln/>
-        </p:spPr>
-        <p:txBody>
-          <a:bodyPr wrap="square" lIns="0" tIns="0" rIns="0" bIns="0" rtlCol="0" anchor="ctr"/>
-          <a:lstStyle/>
-          <a:p>
-            <a:pPr algn="ctr" indent="0" marL="0">
-              <a:buNone/>
-            </a:pPr>
-            <a:r>
-              <a:rPr lang="en-US" sz="1400" b="1" dirty="0">
-                <a:solidFill>
-                  <a:srgbClr val="34B76F"/>
-                </a:solidFill>
-                <a:latin typeface="Calibri" pitchFamily="34" charset="0"/>
-                <a:ea typeface="Calibri" pitchFamily="34" charset="-122"/>
-                <a:cs typeface="Calibri" pitchFamily="34" charset="-120"/>
-              </a:rPr>
-              <a:t>stuck</a:t>
-            </a:r>
-            <a:endParaRPr lang="en-US" sz="1400" dirty="0"/>
-          </a:p>
-        </p:txBody>
-      </p:sp>
-      <p:sp>
-        <p:nvSpPr>
-          <p:cNvPr id="17" name="Text 15"/>
-          <p:cNvSpPr/>
-          <p:nvPr/>
-        </p:nvSpPr>
-        <p:spPr>
-          <a:xfrm>
-            <a:off x="4572000" y="2596896"/>
-            <a:ext cx="3611880" cy="320040"/>
-          </a:xfrm>
-          <a:prstGeom prst="rect">
-            <a:avLst/>
-          </a:prstGeom>
-          <a:noFill/>
-          <a:ln/>
-        </p:spPr>
-        <p:txBody>
-          <a:bodyPr wrap="square" lIns="0" tIns="0" rIns="0" bIns="0" rtlCol="0" anchor="ctr"/>
-          <a:lstStyle/>
-          <a:p>
-            <a:pPr algn="ctr" indent="0" marL="0">
-              <a:buNone/>
-            </a:pPr>
-            <a:r>
-              <a:rPr lang="en-US" sz="1400" b="1" dirty="0">
-                <a:solidFill>
-                  <a:srgbClr val="34B76F"/>
-                </a:solidFill>
-                <a:latin typeface="Calibri" pitchFamily="34" charset="0"/>
-                <a:ea typeface="Calibri" pitchFamily="34" charset="-122"/>
-                <a:cs typeface="Calibri" pitchFamily="34" charset="-120"/>
-              </a:rPr>
-              <a:t>cross</a:t>
-            </a:r>
-            <a:endParaRPr lang="en-US" sz="1400" dirty="0"/>
+            <a:off x="365760" y="2514600"/>
+            <a:ext cx="8412480" cy="457200"/>
+          </a:xfrm>
+          <a:prstGeom prst="rect">
+            <a:avLst/>
+          </a:prstGeom>
+          <a:noFill/>
+          <a:ln/>
+        </p:spPr>
+        <p:txBody>
+          <a:bodyPr wrap="square" lIns="0" tIns="0" rIns="0" bIns="0" rtlCol="0" anchor="ctr"/>
+          <a:lstStyle/>
+          <a:p>
+            <a:pPr indent="0" marL="0">
+              <a:buNone/>
+            </a:pPr>
+            <a:r>
+              <a:rPr lang="en-US" sz="1500" i="1" dirty="0">
+                <a:solidFill>
+                  <a:srgbClr val="64748B"/>
+                </a:solidFill>
+                <a:latin typeface="Calibri" pitchFamily="34" charset="0"/>
+                <a:ea typeface="Calibri" pitchFamily="34" charset="-122"/>
+                <a:cs typeface="Calibri" pitchFamily="34" charset="-120"/>
+              </a:rPr>
+              <a:t>Which column does each word belong in?  Columns: silent-e  |  closed</a:t>
+            </a:r>
+            <a:endParaRPr lang="en-US" sz="1500" dirty="0"/>
           </a:p>
         </p:txBody>
       </p:sp>
@@ -4238,7 +4084,7 @@
     <p:bg>
       <p:bgPr>
         <a:solidFill>
-          <a:srgbClr val="FFFFFF"/>
+          <a:srgbClr val="F8FAFC"/>
         </a:solidFill>
       </p:bgPr>
     </p:bg>
@@ -4258,30 +4104,89 @@
       </p:grpSpPr>
       <p:sp>
         <p:nvSpPr>
-          <p:cNvPr id="2" name="Text 0"/>
-          <p:cNvSpPr/>
-          <p:nvPr/>
-        </p:nvSpPr>
-        <p:spPr>
-          <a:xfrm>
-            <a:off x="365760" y="164592"/>
-            <a:ext cx="8412480" cy="566928"/>
-          </a:xfrm>
-          <a:prstGeom prst="rect">
-            <a:avLst/>
-          </a:prstGeom>
-          <a:noFill/>
-          <a:ln/>
-        </p:spPr>
-        <p:txBody>
-          <a:bodyPr wrap="square" lIns="0" tIns="0" rIns="0" bIns="0" rtlCol="0" anchor="ctr"/>
-          <a:lstStyle/>
-          <a:p>
-            <a:pPr algn="l" indent="0" marL="0">
-              <a:buNone/>
-            </a:pPr>
-            <a:r>
-              <a:rPr lang="en-US" sz="2800" b="1" dirty="0">
+          <p:cNvPr id="2" name="Shape 0"/>
+          <p:cNvSpPr/>
+          <p:nvPr/>
+        </p:nvSpPr>
+        <p:spPr>
+          <a:xfrm>
+            <a:off x="0" y="0"/>
+            <a:ext cx="9144000" cy="566928"/>
+          </a:xfrm>
+          <a:prstGeom prst="rect">
+            <a:avLst/>
+          </a:prstGeom>
+          <a:solidFill>
+            <a:srgbClr val="0E1C42"/>
+          </a:solidFill>
+          <a:ln/>
+        </p:spPr>
+      </p:sp>
+      <p:sp>
+        <p:nvSpPr>
+          <p:cNvPr id="3" name="Text 1"/>
+          <p:cNvSpPr/>
+          <p:nvPr/>
+        </p:nvSpPr>
+        <p:spPr>
+          <a:xfrm>
+            <a:off x="365760" y="54864"/>
+            <a:ext cx="8412480" cy="457200"/>
+          </a:xfrm>
+          <a:prstGeom prst="rect">
+            <a:avLst/>
+          </a:prstGeom>
+          <a:noFill/>
+          <a:ln/>
+        </p:spPr>
+        <p:txBody>
+          <a:bodyPr wrap="square" lIns="0" tIns="0" rIns="0" bIns="0" rtlCol="0" anchor="ctr"/>
+          <a:lstStyle/>
+          <a:p>
+            <a:pPr indent="0" marL="0">
+              <a:buNone/>
+            </a:pPr>
+            <a:r>
+              <a:rPr lang="en-US" sz="2200" b="1" dirty="0">
+                <a:solidFill>
+                  <a:srgbClr val="FFFFFF"/>
+                </a:solidFill>
+                <a:latin typeface="Calibri" pitchFamily="34" charset="0"/>
+                <a:ea typeface="Calibri" pitchFamily="34" charset="-122"/>
+                <a:cs typeface="Calibri" pitchFamily="34" charset="-120"/>
+              </a:rPr>
+              <a:t>🔠  Spelling</a:t>
+            </a:r>
+            <a:endParaRPr lang="en-US" sz="2200" dirty="0"/>
+          </a:p>
+        </p:txBody>
+      </p:sp>
+      <p:sp>
+        <p:nvSpPr>
+          <p:cNvPr id="4" name="Text 2"/>
+          <p:cNvSpPr/>
+          <p:nvPr/>
+        </p:nvSpPr>
+        <p:spPr>
+          <a:xfrm>
+            <a:off x="365760" y="777240"/>
+            <a:ext cx="8229600" cy="237744"/>
+          </a:xfrm>
+          <a:prstGeom prst="rect">
+            <a:avLst/>
+          </a:prstGeom>
+          <a:noFill/>
+          <a:ln/>
+        </p:spPr>
+        <p:txBody>
+          <a:bodyPr wrap="square" lIns="0" tIns="0" rIns="0" bIns="0" rtlCol="0" anchor="ctr"/>
+          <a:lstStyle/>
+          <a:p>
+            <a:pPr indent="0" marL="0">
+              <a:buNone/>
+            </a:pPr>
+            <a:r>
+              <a:rPr lang="en-US" sz="1100" b="1" spc="100" kern="0" dirty="0">
                 <a:solidFill>
                   <a:srgbClr val="0E1C42"/>
                 </a:solidFill>
@@ -4289,69 +4194,7 @@
                 <a:ea typeface="Calibri" pitchFamily="34" charset="-122"/>
                 <a:cs typeface="Calibri" pitchFamily="34" charset="-120"/>
               </a:rPr>
-              <a:t>📕 Read: Chapter 3</a:t>
-            </a:r>
-            <a:endParaRPr lang="en-US" sz="2800" dirty="0"/>
-          </a:p>
-        </p:txBody>
-      </p:sp>
-      <p:sp>
-        <p:nvSpPr>
-          <p:cNvPr id="3" name="Shape 1"/>
-          <p:cNvSpPr/>
-          <p:nvPr/>
-        </p:nvSpPr>
-        <p:spPr>
-          <a:xfrm>
-            <a:off x="365760" y="749808"/>
-            <a:ext cx="8412480" cy="0"/>
-          </a:xfrm>
-          <a:prstGeom prst="line">
-            <a:avLst/>
-          </a:prstGeom>
-          <a:noFill/>
-          <a:ln w="19050">
-            <a:solidFill>
-              <a:srgbClr val="55C8E8"/>
-            </a:solidFill>
-            <a:prstDash val="solid"/>
-          </a:ln>
-        </p:spPr>
-      </p:sp>
-      <p:sp>
-        <p:nvSpPr>
-          <p:cNvPr id="4" name="Text 2"/>
-          <p:cNvSpPr/>
-          <p:nvPr/>
-        </p:nvSpPr>
-        <p:spPr>
-          <a:xfrm>
-            <a:off x="457200" y="1005840"/>
-            <a:ext cx="8046720" cy="292608"/>
-          </a:xfrm>
-          <a:prstGeom prst="rect">
-            <a:avLst/>
-          </a:prstGeom>
-          <a:noFill/>
-          <a:ln/>
-        </p:spPr>
-        <p:txBody>
-          <a:bodyPr wrap="square" lIns="0" tIns="0" rIns="0" bIns="0" rtlCol="0" anchor="ctr"/>
-          <a:lstStyle/>
-          <a:p>
-            <a:pPr indent="0" marL="0">
-              <a:buNone/>
-            </a:pPr>
-            <a:r>
-              <a:rPr lang="en-US" sz="1100" b="1" spc="200" kern="0" dirty="0">
-                <a:solidFill>
-                  <a:srgbClr val="C7922C"/>
-                </a:solidFill>
-                <a:latin typeface="Calibri" pitchFamily="34" charset="0"/>
-                <a:ea typeface="Calibri" pitchFamily="34" charset="-122"/>
-                <a:cs typeface="Calibri" pitchFamily="34" charset="-120"/>
-              </a:rPr>
-              <a:t>COPYWORK</a:t>
+              <a:t>LONG VOWELS AND SILENT-E REVIEW</a:t>
             </a:r>
             <a:endParaRPr lang="en-US" sz="1100" dirty="0"/>
           </a:p>
@@ -4365,23 +4208,79 @@
         </p:nvSpPr>
         <p:spPr>
           <a:xfrm>
-            <a:off x="457200" y="1325880"/>
-            <a:ext cx="8229600" cy="731520"/>
+            <a:off x="411480" y="1078992"/>
+            <a:ext cx="4114800" cy="457200"/>
           </a:xfrm>
           <a:prstGeom prst="roundRect">
             <a:avLst>
-              <a:gd name="adj" fmla="val 12500"/>
+              <a:gd name="adj" fmla="val 16000"/>
             </a:avLst>
           </a:prstGeom>
           <a:solidFill>
-            <a:srgbClr val="FEF6E8"/>
+            <a:srgbClr val="0E1C42"/>
           </a:solidFill>
-          <a:ln w="12700">
-            <a:solidFill>
-              <a:srgbClr val="C7922C"/>
-            </a:solidFill>
-            <a:prstDash val="solid"/>
-          </a:ln>
+          <a:ln/>
+        </p:spPr>
+      </p:sp>
+      <p:sp>
+        <p:nvSpPr>
+          <p:cNvPr id="6" name="Text 4"/>
+          <p:cNvSpPr/>
+          <p:nvPr/>
+        </p:nvSpPr>
+        <p:spPr>
+          <a:xfrm>
+            <a:off x="457200" y="1133856"/>
+            <a:ext cx="4023360" cy="347472"/>
+          </a:xfrm>
+          <a:prstGeom prst="rect">
+            <a:avLst/>
+          </a:prstGeom>
+          <a:noFill/>
+          <a:ln/>
+        </p:spPr>
+        <p:txBody>
+          <a:bodyPr wrap="square" lIns="0" tIns="0" rIns="0" bIns="0" rtlCol="0" anchor="ctr"/>
+          <a:lstStyle/>
+          <a:p>
+            <a:pPr algn="ctr" indent="0" marL="0">
+              <a:buNone/>
+            </a:pPr>
+            <a:r>
+              <a:rPr lang="en-US" sz="1300" b="1" dirty="0">
+                <a:solidFill>
+                  <a:srgbClr val="FFFFFF"/>
+                </a:solidFill>
+                <a:latin typeface="Calibri" pitchFamily="34" charset="0"/>
+                <a:ea typeface="Calibri" pitchFamily="34" charset="-122"/>
+                <a:cs typeface="Calibri" pitchFamily="34" charset="-120"/>
+              </a:rPr>
+              <a:t>silent-e</a:t>
+            </a:r>
+            <a:endParaRPr lang="en-US" sz="1300" dirty="0"/>
+          </a:p>
+        </p:txBody>
+      </p:sp>
+      <p:sp>
+        <p:nvSpPr>
+          <p:cNvPr id="7" name="Shape 5"/>
+          <p:cNvSpPr/>
+          <p:nvPr/>
+        </p:nvSpPr>
+        <p:spPr>
+          <a:xfrm>
+            <a:off x="411480" y="1591056"/>
+            <a:ext cx="4114800" cy="2103120"/>
+          </a:xfrm>
+          <a:prstGeom prst="roundRect">
+            <a:avLst>
+              <a:gd name="adj" fmla="val 4348"/>
+            </a:avLst>
+          </a:prstGeom>
+          <a:solidFill>
+            <a:srgbClr val="FFFFFF"/>
+          </a:solidFill>
+          <a:ln/>
           <a:effectLst>
             <a:outerShdw sx="100000" sy="100000" kx="0" ky="0" algn="bl" rotWithShape="0" blurRad="101600" dist="38100" dir="2700000">
               <a:srgbClr val="000000">
@@ -4393,30 +4292,30 @@
       </p:sp>
       <p:sp>
         <p:nvSpPr>
-          <p:cNvPr id="6" name="Text 4"/>
-          <p:cNvSpPr/>
-          <p:nvPr/>
-        </p:nvSpPr>
-        <p:spPr>
-          <a:xfrm>
-            <a:off x="640080" y="1435608"/>
-            <a:ext cx="7863840" cy="502920"/>
-          </a:xfrm>
-          <a:prstGeom prst="rect">
-            <a:avLst/>
-          </a:prstGeom>
-          <a:noFill/>
-          <a:ln/>
-        </p:spPr>
-        <p:txBody>
-          <a:bodyPr wrap="square" lIns="0" tIns="0" rIns="0" bIns="0" rtlCol="0" anchor="ctr"/>
-          <a:lstStyle/>
-          <a:p>
-            <a:pPr indent="0" marL="0">
-              <a:buNone/>
-            </a:pPr>
-            <a:r>
-              <a:rPr lang="en-US" sz="1800" i="1" dirty="0">
+          <p:cNvPr id="8" name="Text 6"/>
+          <p:cNvSpPr/>
+          <p:nvPr/>
+        </p:nvSpPr>
+        <p:spPr>
+          <a:xfrm>
+            <a:off x="502920" y="1700784"/>
+            <a:ext cx="3931920" cy="1883664"/>
+          </a:xfrm>
+          <a:prstGeom prst="rect">
+            <a:avLst/>
+          </a:prstGeom>
+          <a:noFill/>
+          <a:ln/>
+        </p:spPr>
+        <p:txBody>
+          <a:bodyPr wrap="square" lIns="0" tIns="0" rIns="0" bIns="0" rtlCol="0" anchor="ctr"/>
+          <a:lstStyle/>
+          <a:p>
+            <a:pPr algn="ctr" indent="0" marL="0">
+              <a:buNone/>
+            </a:pPr>
+            <a:r>
+              <a:rPr lang="en-US" sz="1400" dirty="0">
                 <a:solidFill>
                   <a:srgbClr val="1E293B"/>
                 </a:solidFill>
@@ -4424,9 +4323,240 @@
                 <a:ea typeface="Calibri" pitchFamily="34" charset="-122"/>
                 <a:cs typeface="Calibri" pitchFamily="34" charset="-120"/>
               </a:rPr>
-              <a:t>Stanley remembered what his parents had said. He went to a boy whose kite was broken and borrowed a large spool of string.</a:t>
-            </a:r>
-            <a:endParaRPr lang="en-US" sz="1800" dirty="0"/>
+              <a:t>broke</a:t>
+            </a:r>
+            <a:endParaRPr lang="en-US" sz="1400" dirty="0"/>
+          </a:p>
+          <a:p>
+            <a:pPr algn="ctr" indent="0" marL="0">
+              <a:buNone/>
+            </a:pPr>
+            <a:r>
+              <a:rPr lang="en-US" sz="1400" dirty="0">
+                <a:solidFill>
+                  <a:srgbClr val="1E293B"/>
+                </a:solidFill>
+                <a:latin typeface="Calibri" pitchFamily="34" charset="0"/>
+                <a:ea typeface="Calibri" pitchFamily="34" charset="-122"/>
+                <a:cs typeface="Calibri" pitchFamily="34" charset="-120"/>
+              </a:rPr>
+              <a:t>slide</a:t>
+            </a:r>
+            <a:endParaRPr lang="en-US" sz="1400" dirty="0"/>
+          </a:p>
+          <a:p>
+            <a:pPr algn="ctr" indent="0" marL="0">
+              <a:buNone/>
+            </a:pPr>
+            <a:r>
+              <a:rPr lang="en-US" sz="1400" dirty="0">
+                <a:solidFill>
+                  <a:srgbClr val="1E293B"/>
+                </a:solidFill>
+                <a:latin typeface="Calibri" pitchFamily="34" charset="0"/>
+                <a:ea typeface="Calibri" pitchFamily="34" charset="-122"/>
+                <a:cs typeface="Calibri" pitchFamily="34" charset="-120"/>
+              </a:rPr>
+              <a:t>kite</a:t>
+            </a:r>
+            <a:endParaRPr lang="en-US" sz="1400" dirty="0"/>
+          </a:p>
+          <a:p>
+            <a:pPr algn="ctr" indent="0" marL="0">
+              <a:buNone/>
+            </a:pPr>
+            <a:r>
+              <a:rPr lang="en-US" sz="1400" dirty="0">
+                <a:solidFill>
+                  <a:srgbClr val="1E293B"/>
+                </a:solidFill>
+                <a:latin typeface="Calibri" pitchFamily="34" charset="0"/>
+                <a:ea typeface="Calibri" pitchFamily="34" charset="-122"/>
+                <a:cs typeface="Calibri" pitchFamily="34" charset="-120"/>
+              </a:rPr>
+              <a:t>stone</a:t>
+            </a:r>
+            <a:endParaRPr lang="en-US" sz="1400" dirty="0"/>
+          </a:p>
+        </p:txBody>
+      </p:sp>
+      <p:sp>
+        <p:nvSpPr>
+          <p:cNvPr id="9" name="Shape 7"/>
+          <p:cNvSpPr/>
+          <p:nvPr/>
+        </p:nvSpPr>
+        <p:spPr>
+          <a:xfrm>
+            <a:off x="4617720" y="1078992"/>
+            <a:ext cx="4114800" cy="457200"/>
+          </a:xfrm>
+          <a:prstGeom prst="roundRect">
+            <a:avLst>
+              <a:gd name="adj" fmla="val 16000"/>
+            </a:avLst>
+          </a:prstGeom>
+          <a:solidFill>
+            <a:srgbClr val="0E1C42"/>
+          </a:solidFill>
+          <a:ln/>
+        </p:spPr>
+      </p:sp>
+      <p:sp>
+        <p:nvSpPr>
+          <p:cNvPr id="10" name="Text 8"/>
+          <p:cNvSpPr/>
+          <p:nvPr/>
+        </p:nvSpPr>
+        <p:spPr>
+          <a:xfrm>
+            <a:off x="4663440" y="1133856"/>
+            <a:ext cx="4023360" cy="347472"/>
+          </a:xfrm>
+          <a:prstGeom prst="rect">
+            <a:avLst/>
+          </a:prstGeom>
+          <a:noFill/>
+          <a:ln/>
+        </p:spPr>
+        <p:txBody>
+          <a:bodyPr wrap="square" lIns="0" tIns="0" rIns="0" bIns="0" rtlCol="0" anchor="ctr"/>
+          <a:lstStyle/>
+          <a:p>
+            <a:pPr algn="ctr" indent="0" marL="0">
+              <a:buNone/>
+            </a:pPr>
+            <a:r>
+              <a:rPr lang="en-US" sz="1300" b="1" dirty="0">
+                <a:solidFill>
+                  <a:srgbClr val="FFFFFF"/>
+                </a:solidFill>
+                <a:latin typeface="Calibri" pitchFamily="34" charset="0"/>
+                <a:ea typeface="Calibri" pitchFamily="34" charset="-122"/>
+                <a:cs typeface="Calibri" pitchFamily="34" charset="-120"/>
+              </a:rPr>
+              <a:t>closed</a:t>
+            </a:r>
+            <a:endParaRPr lang="en-US" sz="1300" dirty="0"/>
+          </a:p>
+        </p:txBody>
+      </p:sp>
+      <p:sp>
+        <p:nvSpPr>
+          <p:cNvPr id="11" name="Shape 9"/>
+          <p:cNvSpPr/>
+          <p:nvPr/>
+        </p:nvSpPr>
+        <p:spPr>
+          <a:xfrm>
+            <a:off x="4617720" y="1591056"/>
+            <a:ext cx="4114800" cy="2103120"/>
+          </a:xfrm>
+          <a:prstGeom prst="roundRect">
+            <a:avLst>
+              <a:gd name="adj" fmla="val 4348"/>
+            </a:avLst>
+          </a:prstGeom>
+          <a:solidFill>
+            <a:srgbClr val="FFFFFF"/>
+          </a:solidFill>
+          <a:ln/>
+          <a:effectLst>
+            <a:outerShdw sx="100000" sy="100000" kx="0" ky="0" algn="bl" rotWithShape="0" blurRad="101600" dist="38100" dir="2700000">
+              <a:srgbClr val="000000">
+                <a:alpha val="12000"/>
+              </a:srgbClr>
+            </a:outerShdw>
+          </a:effectLst>
+        </p:spPr>
+      </p:sp>
+      <p:sp>
+        <p:nvSpPr>
+          <p:cNvPr id="12" name="Text 10"/>
+          <p:cNvSpPr/>
+          <p:nvPr/>
+        </p:nvSpPr>
+        <p:spPr>
+          <a:xfrm>
+            <a:off x="4709160" y="1700784"/>
+            <a:ext cx="3931920" cy="1883664"/>
+          </a:xfrm>
+          <a:prstGeom prst="rect">
+            <a:avLst/>
+          </a:prstGeom>
+          <a:noFill/>
+          <a:ln/>
+        </p:spPr>
+        <p:txBody>
+          <a:bodyPr wrap="square" lIns="0" tIns="0" rIns="0" bIns="0" rtlCol="0" anchor="ctr"/>
+          <a:lstStyle/>
+          <a:p>
+            <a:pPr algn="ctr" indent="0" marL="0">
+              <a:buNone/>
+            </a:pPr>
+            <a:r>
+              <a:rPr lang="en-US" sz="1400" dirty="0">
+                <a:solidFill>
+                  <a:srgbClr val="1E293B"/>
+                </a:solidFill>
+                <a:latin typeface="Calibri" pitchFamily="34" charset="0"/>
+                <a:ea typeface="Calibri" pitchFamily="34" charset="-122"/>
+                <a:cs typeface="Calibri" pitchFamily="34" charset="-120"/>
+              </a:rPr>
+              <a:t>slid</a:t>
+            </a:r>
+            <a:endParaRPr lang="en-US" sz="1400" dirty="0"/>
+          </a:p>
+          <a:p>
+            <a:pPr algn="ctr" indent="0" marL="0">
+              <a:buNone/>
+            </a:pPr>
+            <a:r>
+              <a:rPr lang="en-US" sz="1400" dirty="0">
+                <a:solidFill>
+                  <a:srgbClr val="1E293B"/>
+                </a:solidFill>
+                <a:latin typeface="Calibri" pitchFamily="34" charset="0"/>
+                <a:ea typeface="Calibri" pitchFamily="34" charset="-122"/>
+                <a:cs typeface="Calibri" pitchFamily="34" charset="-120"/>
+              </a:rPr>
+              <a:t>trip</a:t>
+            </a:r>
+            <a:endParaRPr lang="en-US" sz="1400" dirty="0"/>
+          </a:p>
+          <a:p>
+            <a:pPr algn="ctr" indent="0" marL="0">
+              <a:buNone/>
+            </a:pPr>
+            <a:r>
+              <a:rPr lang="en-US" sz="1400" dirty="0">
+                <a:solidFill>
+                  <a:srgbClr val="1E293B"/>
+                </a:solidFill>
+                <a:latin typeface="Calibri" pitchFamily="34" charset="0"/>
+                <a:ea typeface="Calibri" pitchFamily="34" charset="-122"/>
+                <a:cs typeface="Calibri" pitchFamily="34" charset="-120"/>
+              </a:rPr>
+              <a:t>stuck</a:t>
+            </a:r>
+            <a:endParaRPr lang="en-US" sz="1400" dirty="0"/>
+          </a:p>
+          <a:p>
+            <a:pPr algn="ctr" indent="0" marL="0">
+              <a:buNone/>
+            </a:pPr>
+            <a:r>
+              <a:rPr lang="en-US" sz="1400" dirty="0">
+                <a:solidFill>
+                  <a:srgbClr val="1E293B"/>
+                </a:solidFill>
+                <a:latin typeface="Calibri" pitchFamily="34" charset="0"/>
+                <a:ea typeface="Calibri" pitchFamily="34" charset="-122"/>
+                <a:cs typeface="Calibri" pitchFamily="34" charset="-120"/>
+              </a:rPr>
+              <a:t>cross</a:t>
+            </a:r>
+            <a:endParaRPr lang="en-US" sz="1400" dirty="0"/>
           </a:p>
         </p:txBody>
       </p:sp>
@@ -4464,30 +4594,89 @@
       </p:grpSpPr>
       <p:sp>
         <p:nvSpPr>
-          <p:cNvPr id="2" name="Text 0"/>
-          <p:cNvSpPr/>
-          <p:nvPr/>
-        </p:nvSpPr>
-        <p:spPr>
-          <a:xfrm>
-            <a:off x="365760" y="164592"/>
-            <a:ext cx="8412480" cy="566928"/>
-          </a:xfrm>
-          <a:prstGeom prst="rect">
-            <a:avLst/>
-          </a:prstGeom>
-          <a:noFill/>
-          <a:ln/>
-        </p:spPr>
-        <p:txBody>
-          <a:bodyPr wrap="square" lIns="0" tIns="0" rIns="0" bIns="0" rtlCol="0" anchor="ctr"/>
-          <a:lstStyle/>
-          <a:p>
-            <a:pPr algn="l" indent="0" marL="0">
-              <a:buNone/>
-            </a:pPr>
-            <a:r>
-              <a:rPr lang="en-US" sz="2800" b="1" dirty="0">
+          <p:cNvPr id="2" name="Shape 0"/>
+          <p:cNvSpPr/>
+          <p:nvPr/>
+        </p:nvSpPr>
+        <p:spPr>
+          <a:xfrm>
+            <a:off x="0" y="0"/>
+            <a:ext cx="9144000" cy="566928"/>
+          </a:xfrm>
+          <a:prstGeom prst="rect">
+            <a:avLst/>
+          </a:prstGeom>
+          <a:solidFill>
+            <a:srgbClr val="55C8E8"/>
+          </a:solidFill>
+          <a:ln/>
+        </p:spPr>
+      </p:sp>
+      <p:sp>
+        <p:nvSpPr>
+          <p:cNvPr id="3" name="Text 1"/>
+          <p:cNvSpPr/>
+          <p:nvPr/>
+        </p:nvSpPr>
+        <p:spPr>
+          <a:xfrm>
+            <a:off x="365760" y="54864"/>
+            <a:ext cx="8412480" cy="457200"/>
+          </a:xfrm>
+          <a:prstGeom prst="rect">
+            <a:avLst/>
+          </a:prstGeom>
+          <a:noFill/>
+          <a:ln/>
+        </p:spPr>
+        <p:txBody>
+          <a:bodyPr wrap="square" lIns="0" tIns="0" rIns="0" bIns="0" rtlCol="0" anchor="ctr"/>
+          <a:lstStyle/>
+          <a:p>
+            <a:pPr indent="0" marL="0">
+              <a:buNone/>
+            </a:pPr>
+            <a:r>
+              <a:rPr lang="en-US" sz="2200" b="1" dirty="0">
+                <a:solidFill>
+                  <a:srgbClr val="FFFFFF"/>
+                </a:solidFill>
+                <a:latin typeface="Calibri" pitchFamily="34" charset="0"/>
+                <a:ea typeface="Calibri" pitchFamily="34" charset="-122"/>
+                <a:cs typeface="Calibri" pitchFamily="34" charset="-120"/>
+              </a:rPr>
+              <a:t>📕  Read</a:t>
+            </a:r>
+            <a:endParaRPr lang="en-US" sz="2200" dirty="0"/>
+          </a:p>
+        </p:txBody>
+      </p:sp>
+      <p:sp>
+        <p:nvSpPr>
+          <p:cNvPr id="4" name="Text 2"/>
+          <p:cNvSpPr/>
+          <p:nvPr/>
+        </p:nvSpPr>
+        <p:spPr>
+          <a:xfrm>
+            <a:off x="365760" y="868680"/>
+            <a:ext cx="8412480" cy="502920"/>
+          </a:xfrm>
+          <a:prstGeom prst="rect">
+            <a:avLst/>
+          </a:prstGeom>
+          <a:noFill/>
+          <a:ln/>
+        </p:spPr>
+        <p:txBody>
+          <a:bodyPr wrap="square" lIns="0" tIns="0" rIns="0" bIns="0" rtlCol="0" anchor="ctr"/>
+          <a:lstStyle/>
+          <a:p>
+            <a:pPr indent="0" marL="0">
+              <a:buNone/>
+            </a:pPr>
+            <a:r>
+              <a:rPr lang="en-US" sz="2600" b="1" dirty="0">
                 <a:solidFill>
                   <a:srgbClr val="0E1C42"/>
                 </a:solidFill>
@@ -4495,34 +4684,309 @@
                 <a:ea typeface="Calibri" pitchFamily="34" charset="-122"/>
                 <a:cs typeface="Calibri" pitchFamily="34" charset="-120"/>
               </a:rPr>
-              <a:t>🪶 Writing Connection</a:t>
-            </a:r>
-            <a:endParaRPr lang="en-US" sz="2800" dirty="0"/>
-          </a:p>
-        </p:txBody>
-      </p:sp>
-      <p:sp>
-        <p:nvSpPr>
-          <p:cNvPr id="3" name="Shape 1"/>
-          <p:cNvSpPr/>
-          <p:nvPr/>
-        </p:nvSpPr>
-        <p:spPr>
-          <a:xfrm>
-            <a:off x="365760" y="749808"/>
-            <a:ext cx="8412480" cy="0"/>
-          </a:xfrm>
-          <a:prstGeom prst="line">
-            <a:avLst/>
-          </a:prstGeom>
-          <a:noFill/>
+              <a:t>Chapter 3</a:t>
+            </a:r>
+            <a:endParaRPr lang="en-US" sz="2600" dirty="0"/>
+          </a:p>
+        </p:txBody>
+      </p:sp>
+      <p:sp>
+        <p:nvSpPr>
+          <p:cNvPr id="5" name="Text 3"/>
+          <p:cNvSpPr/>
+          <p:nvPr/>
+        </p:nvSpPr>
+        <p:spPr>
+          <a:xfrm>
+            <a:off x="365760" y="1463040"/>
+            <a:ext cx="8229600" cy="237744"/>
+          </a:xfrm>
+          <a:prstGeom prst="rect">
+            <a:avLst/>
+          </a:prstGeom>
+          <a:noFill/>
+          <a:ln/>
+        </p:spPr>
+        <p:txBody>
+          <a:bodyPr wrap="square" lIns="0" tIns="0" rIns="0" bIns="0" rtlCol="0" anchor="ctr"/>
+          <a:lstStyle/>
+          <a:p>
+            <a:pPr indent="0" marL="0">
+              <a:buNone/>
+            </a:pPr>
+            <a:r>
+              <a:rPr lang="en-US" sz="1100" b="1" spc="100" kern="0" dirty="0">
+                <a:solidFill>
+                  <a:srgbClr val="8B6FC0"/>
+                </a:solidFill>
+                <a:latin typeface="Calibri" pitchFamily="34" charset="0"/>
+                <a:ea typeface="Calibri" pitchFamily="34" charset="-122"/>
+                <a:cs typeface="Calibri" pitchFamily="34" charset="-120"/>
+              </a:rPr>
+              <a:t>COPYWORK — FROM THE NOVEL</a:t>
+            </a:r>
+            <a:endParaRPr lang="en-US" sz="1100" dirty="0"/>
+          </a:p>
+        </p:txBody>
+      </p:sp>
+      <p:sp>
+        <p:nvSpPr>
+          <p:cNvPr id="6" name="Shape 4"/>
+          <p:cNvSpPr/>
+          <p:nvPr/>
+        </p:nvSpPr>
+        <p:spPr>
+          <a:xfrm>
+            <a:off x="365760" y="1719072"/>
+            <a:ext cx="8412480" cy="1143000"/>
+          </a:xfrm>
+          <a:prstGeom prst="roundRect">
+            <a:avLst>
+              <a:gd name="adj" fmla="val 8000"/>
+            </a:avLst>
+          </a:prstGeom>
+          <a:solidFill>
+            <a:srgbClr val="F0E8FF"/>
+          </a:solidFill>
           <a:ln w="19050">
             <a:solidFill>
-              <a:srgbClr val="34B76F"/>
+              <a:srgbClr val="8B6FC0"/>
             </a:solidFill>
             <a:prstDash val="solid"/>
           </a:ln>
-        </p:spPr>
+          <a:effectLst>
+            <a:outerShdw sx="100000" sy="100000" kx="0" ky="0" algn="bl" rotWithShape="0" blurRad="101600" dist="38100" dir="2700000">
+              <a:srgbClr val="000000">
+                <a:alpha val="12000"/>
+              </a:srgbClr>
+            </a:outerShdw>
+          </a:effectLst>
+        </p:spPr>
+      </p:sp>
+      <p:sp>
+        <p:nvSpPr>
+          <p:cNvPr id="7" name="Text 5"/>
+          <p:cNvSpPr/>
+          <p:nvPr/>
+        </p:nvSpPr>
+        <p:spPr>
+          <a:xfrm>
+            <a:off x="594360" y="1847088"/>
+            <a:ext cx="7955280" cy="886968"/>
+          </a:xfrm>
+          <a:prstGeom prst="rect">
+            <a:avLst/>
+          </a:prstGeom>
+          <a:noFill/>
+          <a:ln/>
+        </p:spPr>
+        <p:txBody>
+          <a:bodyPr wrap="square" lIns="0" tIns="0" rIns="0" bIns="0" rtlCol="0" anchor="ctr"/>
+          <a:lstStyle/>
+          <a:p>
+            <a:pPr indent="0" marL="0">
+              <a:buNone/>
+            </a:pPr>
+            <a:r>
+              <a:rPr lang="en-US" sz="1700" dirty="0">
+                <a:solidFill>
+                  <a:srgbClr val="1E293B"/>
+                </a:solidFill>
+                <a:latin typeface="Calibri" pitchFamily="34" charset="0"/>
+                <a:ea typeface="Calibri" pitchFamily="34" charset="-122"/>
+                <a:cs typeface="Calibri" pitchFamily="34" charset="-120"/>
+              </a:rPr>
+              <a:t>“Stanley remembered what his parents had said. He went to a boy whose kite was broken and borrowed a large spool of string.”</a:t>
+            </a:r>
+            <a:endParaRPr lang="en-US" sz="1700" dirty="0"/>
+          </a:p>
+        </p:txBody>
+      </p:sp>
+      <p:sp>
+        <p:nvSpPr>
+          <p:cNvPr id="8" name="Text 6"/>
+          <p:cNvSpPr/>
+          <p:nvPr/>
+        </p:nvSpPr>
+        <p:spPr>
+          <a:xfrm>
+            <a:off x="365760" y="3017520"/>
+            <a:ext cx="8229600" cy="237744"/>
+          </a:xfrm>
+          <a:prstGeom prst="rect">
+            <a:avLst/>
+          </a:prstGeom>
+          <a:noFill/>
+          <a:ln/>
+        </p:spPr>
+        <p:txBody>
+          <a:bodyPr wrap="square" lIns="0" tIns="0" rIns="0" bIns="0" rtlCol="0" anchor="ctr"/>
+          <a:lstStyle/>
+          <a:p>
+            <a:pPr indent="0" marL="0">
+              <a:buNone/>
+            </a:pPr>
+            <a:r>
+              <a:rPr lang="en-US" sz="1100" b="1" spc="100" kern="0" dirty="0">
+                <a:solidFill>
+                  <a:srgbClr val="C7922C"/>
+                </a:solidFill>
+                <a:latin typeface="Calibri" pitchFamily="34" charset="0"/>
+                <a:ea typeface="Calibri" pitchFamily="34" charset="-122"/>
+                <a:cs typeface="Calibri" pitchFamily="34" charset="-120"/>
+              </a:rPr>
+              <a:t>PAUSE &amp; THINK</a:t>
+            </a:r>
+            <a:endParaRPr lang="en-US" sz="1100" dirty="0"/>
+          </a:p>
+        </p:txBody>
+      </p:sp>
+      <p:sp>
+        <p:nvSpPr>
+          <p:cNvPr id="9" name="Text 7"/>
+          <p:cNvSpPr/>
+          <p:nvPr/>
+        </p:nvSpPr>
+        <p:spPr>
+          <a:xfrm>
+            <a:off x="365760" y="3273552"/>
+            <a:ext cx="8412480" cy="914400"/>
+          </a:xfrm>
+          <a:prstGeom prst="rect">
+            <a:avLst/>
+          </a:prstGeom>
+          <a:noFill/>
+          <a:ln/>
+        </p:spPr>
+        <p:txBody>
+          <a:bodyPr wrap="square" lIns="0" tIns="0" rIns="0" bIns="0" rtlCol="0" anchor="ctr"/>
+          <a:lstStyle/>
+          <a:p>
+            <a:pPr indent="0" marL="0">
+              <a:buNone/>
+            </a:pPr>
+            <a:r>
+              <a:rPr lang="en-US" sz="1500" dirty="0">
+                <a:solidFill>
+                  <a:srgbClr val="1E293B"/>
+                </a:solidFill>
+                <a:latin typeface="Calibri" pitchFamily="34" charset="0"/>
+                <a:ea typeface="Calibri" pitchFamily="34" charset="-122"/>
+                <a:cs typeface="Calibri" pitchFamily="34" charset="-120"/>
+              </a:rPr>
+              <a:t>•  Arthur leaves the spool in a tree and Stanley gets tangled. How do you think Stanley feels about Arthur right now?</a:t>
+            </a:r>
+            <a:endParaRPr lang="en-US" sz="1500" dirty="0"/>
+          </a:p>
+          <a:p>
+            <a:pPr indent="0" marL="0">
+              <a:buNone/>
+            </a:pPr>
+            <a:r>
+              <a:rPr lang="en-US" sz="1500" dirty="0">
+                <a:solidFill>
+                  <a:srgbClr val="1E293B"/>
+                </a:solidFill>
+                <a:latin typeface="Calibri" pitchFamily="34" charset="0"/>
+                <a:ea typeface="Calibri" pitchFamily="34" charset="-122"/>
+                <a:cs typeface="Calibri" pitchFamily="34" charset="-120"/>
+              </a:rPr>
+              <a:t>•  Arthur leaves the spool in a tree and Stanley gets tangled. How do you think Stanley feels about Arthur right now?</a:t>
+            </a:r>
+            <a:endParaRPr lang="en-US" sz="1500" dirty="0"/>
+          </a:p>
+        </p:txBody>
+      </p:sp>
+    </p:spTree>
+  </p:cSld>
+  <p:clrMapOvr>
+    <a:masterClrMapping/>
+  </p:clrMapOvr>
+</p:sld>
+</file>
+
+<file path=ppt/slides/slide16.xml><?xml version="1.0" encoding="utf-8"?>
+<p:sld xmlns:a="http://schemas.openxmlformats.org/drawingml/2006/main" xmlns:r="http://schemas.openxmlformats.org/officeDocument/2006/relationships" xmlns:p="http://schemas.openxmlformats.org/presentationml/2006/main">
+  <p:cSld name="Slide 16">
+    <p:bg>
+      <p:bgPr>
+        <a:solidFill>
+          <a:srgbClr val="FFFFFF"/>
+        </a:solidFill>
+      </p:bgPr>
+    </p:bg>
+    <p:spTree>
+      <p:nvGrpSpPr>
+        <p:cNvPr id="1" name=""/>
+        <p:cNvGrpSpPr/>
+        <p:nvPr/>
+      </p:nvGrpSpPr>
+      <p:grpSpPr>
+        <a:xfrm>
+          <a:off x="0" y="0"/>
+          <a:ext cx="0" cy="0"/>
+          <a:chOff x="0" y="0"/>
+          <a:chExt cx="0" cy="0"/>
+        </a:xfrm>
+      </p:grpSpPr>
+      <p:sp>
+        <p:nvSpPr>
+          <p:cNvPr id="2" name="Shape 0"/>
+          <p:cNvSpPr/>
+          <p:nvPr/>
+        </p:nvSpPr>
+        <p:spPr>
+          <a:xfrm>
+            <a:off x="0" y="0"/>
+            <a:ext cx="9144000" cy="566928"/>
+          </a:xfrm>
+          <a:prstGeom prst="rect">
+            <a:avLst/>
+          </a:prstGeom>
+          <a:solidFill>
+            <a:srgbClr val="34B76F"/>
+          </a:solidFill>
+          <a:ln/>
+        </p:spPr>
+      </p:sp>
+      <p:sp>
+        <p:nvSpPr>
+          <p:cNvPr id="3" name="Text 1"/>
+          <p:cNvSpPr/>
+          <p:nvPr/>
+        </p:nvSpPr>
+        <p:spPr>
+          <a:xfrm>
+            <a:off x="365760" y="54864"/>
+            <a:ext cx="8412480" cy="457200"/>
+          </a:xfrm>
+          <a:prstGeom prst="rect">
+            <a:avLst/>
+          </a:prstGeom>
+          <a:noFill/>
+          <a:ln/>
+        </p:spPr>
+        <p:txBody>
+          <a:bodyPr wrap="square" lIns="0" tIns="0" rIns="0" bIns="0" rtlCol="0" anchor="ctr"/>
+          <a:lstStyle/>
+          <a:p>
+            <a:pPr indent="0" marL="0">
+              <a:buNone/>
+            </a:pPr>
+            <a:r>
+              <a:rPr lang="en-US" sz="2200" b="1" dirty="0">
+                <a:solidFill>
+                  <a:srgbClr val="FFFFFF"/>
+                </a:solidFill>
+                <a:latin typeface="Calibri" pitchFamily="34" charset="0"/>
+                <a:ea typeface="Calibri" pitchFamily="34" charset="-122"/>
+                <a:cs typeface="Calibri" pitchFamily="34" charset="-120"/>
+              </a:rPr>
+              <a:t>🪶  Writer’s Workshop</a:t>
+            </a:r>
+            <a:endParaRPr lang="en-US" sz="2200" dirty="0"/>
+          </a:p>
+        </p:txBody>
       </p:sp>
       <p:sp>
         <p:nvSpPr>
@@ -4532,24 +4996,102 @@
         </p:nvSpPr>
         <p:spPr>
           <a:xfrm>
-            <a:off x="640080" y="1371600"/>
-            <a:ext cx="7863840" cy="457200"/>
-          </a:xfrm>
-          <a:prstGeom prst="rect">
-            <a:avLst/>
-          </a:prstGeom>
-          <a:noFill/>
-          <a:ln/>
-        </p:spPr>
-        <p:txBody>
-          <a:bodyPr wrap="square" lIns="0" tIns="0" rIns="0" bIns="0" rtlCol="0" anchor="ctr"/>
-          <a:lstStyle/>
-          <a:p>
-            <a:pPr indent="0" marL="0">
-              <a:buNone/>
-            </a:pPr>
-            <a:r>
-              <a:rPr lang="en-US" sz="1600" dirty="0">
+            <a:off x="365760" y="822960"/>
+            <a:ext cx="8229600" cy="237744"/>
+          </a:xfrm>
+          <a:prstGeom prst="rect">
+            <a:avLst/>
+          </a:prstGeom>
+          <a:noFill/>
+          <a:ln/>
+        </p:spPr>
+        <p:txBody>
+          <a:bodyPr wrap="square" lIns="0" tIns="0" rIns="0" bIns="0" rtlCol="0" anchor="ctr"/>
+          <a:lstStyle/>
+          <a:p>
+            <a:pPr indent="0" marL="0">
+              <a:buNone/>
+            </a:pPr>
+            <a:r>
+              <a:rPr lang="en-US" sz="1100" b="1" spc="100" kern="0" dirty="0">
+                <a:solidFill>
+                  <a:srgbClr val="34B76F"/>
+                </a:solidFill>
+                <a:latin typeface="Calibri" pitchFamily="34" charset="0"/>
+                <a:ea typeface="Calibri" pitchFamily="34" charset="-122"/>
+                <a:cs typeface="Calibri" pitchFamily="34" charset="-120"/>
+              </a:rPr>
+              <a:t>THIS WEEK’S STAGE</a:t>
+            </a:r>
+            <a:endParaRPr lang="en-US" sz="1100" dirty="0"/>
+          </a:p>
+        </p:txBody>
+      </p:sp>
+      <p:sp>
+        <p:nvSpPr>
+          <p:cNvPr id="5" name="Text 3"/>
+          <p:cNvSpPr/>
+          <p:nvPr/>
+        </p:nvSpPr>
+        <p:spPr>
+          <a:xfrm>
+            <a:off x="365760" y="1078992"/>
+            <a:ext cx="8412480" cy="548640"/>
+          </a:xfrm>
+          <a:prstGeom prst="rect">
+            <a:avLst/>
+          </a:prstGeom>
+          <a:noFill/>
+          <a:ln/>
+        </p:spPr>
+        <p:txBody>
+          <a:bodyPr wrap="square" lIns="0" tIns="0" rIns="0" bIns="0" rtlCol="0" anchor="ctr"/>
+          <a:lstStyle/>
+          <a:p>
+            <a:pPr indent="0" marL="0">
+              <a:buNone/>
+            </a:pPr>
+            <a:r>
+              <a:rPr lang="en-US" sz="3000" b="1" dirty="0">
+                <a:solidFill>
+                  <a:srgbClr val="0E1C42"/>
+                </a:solidFill>
+                <a:latin typeface="Calibri" pitchFamily="34" charset="0"/>
+                <a:ea typeface="Calibri" pitchFamily="34" charset="-122"/>
+                <a:cs typeface="Calibri" pitchFamily="34" charset="-120"/>
+              </a:rPr>
+              <a:t>DRAFT</a:t>
+            </a:r>
+            <a:endParaRPr lang="en-US" sz="3000" dirty="0"/>
+          </a:p>
+        </p:txBody>
+      </p:sp>
+      <p:sp>
+        <p:nvSpPr>
+          <p:cNvPr id="6" name="Text 4"/>
+          <p:cNvSpPr/>
+          <p:nvPr/>
+        </p:nvSpPr>
+        <p:spPr>
+          <a:xfrm>
+            <a:off x="365760" y="1691640"/>
+            <a:ext cx="8412480" cy="457200"/>
+          </a:xfrm>
+          <a:prstGeom prst="rect">
+            <a:avLst/>
+          </a:prstGeom>
+          <a:noFill/>
+          <a:ln/>
+        </p:spPr>
+        <p:txBody>
+          <a:bodyPr wrap="square" lIns="0" tIns="0" rIns="0" bIns="0" rtlCol="0" anchor="ctr"/>
+          <a:lstStyle/>
+          <a:p>
+            <a:pPr indent="0" marL="0">
+              <a:buNone/>
+            </a:pPr>
+            <a:r>
+              <a:rPr lang="en-US" sz="1800" dirty="0">
                 <a:solidFill>
                   <a:srgbClr val="1E293B"/>
                 </a:solidFill>
@@ -4557,48 +5099,9 @@
                 <a:ea typeface="Calibri" pitchFamily="34" charset="-122"/>
                 <a:cs typeface="Calibri" pitchFamily="34" charset="-120"/>
               </a:rPr>
-              <a:t>Open your writing assignment in Canvas.</a:t>
-            </a:r>
-            <a:endParaRPr lang="en-US" sz="1600" dirty="0"/>
-          </a:p>
-        </p:txBody>
-      </p:sp>
-      <p:sp>
-        <p:nvSpPr>
-          <p:cNvPr id="5" name="Text 3"/>
-          <p:cNvSpPr/>
-          <p:nvPr/>
-        </p:nvSpPr>
-        <p:spPr>
-          <a:xfrm>
-            <a:off x="640080" y="2011680"/>
-            <a:ext cx="7863840" cy="457200"/>
-          </a:xfrm>
-          <a:prstGeom prst="rect">
-            <a:avLst/>
-          </a:prstGeom>
-          <a:noFill/>
-          <a:ln/>
-        </p:spPr>
-        <p:txBody>
-          <a:bodyPr wrap="square" lIns="0" tIns="0" rIns="0" bIns="0" rtlCol="0" anchor="ctr"/>
-          <a:lstStyle/>
-          <a:p>
-            <a:pPr indent="0" marL="0">
-              <a:buNone/>
-            </a:pPr>
-            <a:r>
-              <a:rPr lang="en-US" sz="1400" dirty="0">
-                <a:solidFill>
-                  <a:srgbClr val="64748B"/>
-                </a:solidFill>
-                <a:latin typeface="Calibri" pitchFamily="34" charset="0"/>
-                <a:ea typeface="Calibri" pitchFamily="34" charset="-122"/>
-                <a:cs typeface="Calibri" pitchFamily="34" charset="-120"/>
-              </a:rPr>
-              <a:t>Follow the writing prompt for today's workshop.</a:t>
-            </a:r>
-            <a:endParaRPr lang="en-US" sz="1400" dirty="0"/>
+              <a:t>Draft your middle</a:t>
+            </a:r>
+            <a:endParaRPr lang="en-US" sz="1800" dirty="0"/>
           </a:p>
         </p:txBody>
       </p:sp>
@@ -4636,65 +5139,62 @@
       </p:grpSpPr>
       <p:sp>
         <p:nvSpPr>
-          <p:cNvPr id="2" name="Text 0"/>
-          <p:cNvSpPr/>
-          <p:nvPr/>
-        </p:nvSpPr>
-        <p:spPr>
-          <a:xfrm>
-            <a:off x="365760" y="164592"/>
-            <a:ext cx="8412480" cy="566928"/>
-          </a:xfrm>
-          <a:prstGeom prst="rect">
-            <a:avLst/>
-          </a:prstGeom>
-          <a:noFill/>
-          <a:ln/>
-        </p:spPr>
-        <p:txBody>
-          <a:bodyPr wrap="square" lIns="0" tIns="0" rIns="0" bIns="0" rtlCol="0" anchor="ctr"/>
-          <a:lstStyle/>
-          <a:p>
-            <a:pPr algn="l" indent="0" marL="0">
-              <a:buNone/>
-            </a:pPr>
-            <a:r>
-              <a:rPr lang="en-US" sz="2800" b="1" dirty="0">
-                <a:solidFill>
-                  <a:srgbClr val="0E1C42"/>
-                </a:solidFill>
-                <a:latin typeface="Calibri" pitchFamily="34" charset="0"/>
-                <a:ea typeface="Calibri" pitchFamily="34" charset="-122"/>
-                <a:cs typeface="Calibri" pitchFamily="34" charset="-120"/>
-              </a:rPr>
-              <a:t>✏️ 10-Minute Write</a:t>
-            </a:r>
-            <a:endParaRPr lang="en-US" sz="2800" dirty="0"/>
-          </a:p>
-        </p:txBody>
-      </p:sp>
-      <p:sp>
-        <p:nvSpPr>
-          <p:cNvPr id="3" name="Shape 1"/>
-          <p:cNvSpPr/>
-          <p:nvPr/>
-        </p:nvSpPr>
-        <p:spPr>
-          <a:xfrm>
-            <a:off x="365760" y="749808"/>
-            <a:ext cx="8412480" cy="0"/>
-          </a:xfrm>
-          <a:prstGeom prst="line">
-            <a:avLst/>
-          </a:prstGeom>
-          <a:noFill/>
-          <a:ln w="19050">
-            <a:solidFill>
-              <a:srgbClr val="C7922C"/>
-            </a:solidFill>
-            <a:prstDash val="solid"/>
-          </a:ln>
-        </p:spPr>
+          <p:cNvPr id="2" name="Shape 0"/>
+          <p:cNvSpPr/>
+          <p:nvPr/>
+        </p:nvSpPr>
+        <p:spPr>
+          <a:xfrm>
+            <a:off x="0" y="0"/>
+            <a:ext cx="9144000" cy="566928"/>
+          </a:xfrm>
+          <a:prstGeom prst="rect">
+            <a:avLst/>
+          </a:prstGeom>
+          <a:solidFill>
+            <a:srgbClr val="C7922C"/>
+          </a:solidFill>
+          <a:ln/>
+        </p:spPr>
+      </p:sp>
+      <p:sp>
+        <p:nvSpPr>
+          <p:cNvPr id="3" name="Text 1"/>
+          <p:cNvSpPr/>
+          <p:nvPr/>
+        </p:nvSpPr>
+        <p:spPr>
+          <a:xfrm>
+            <a:off x="365760" y="54864"/>
+            <a:ext cx="8412480" cy="457200"/>
+          </a:xfrm>
+          <a:prstGeom prst="rect">
+            <a:avLst/>
+          </a:prstGeom>
+          <a:noFill/>
+          <a:ln/>
+        </p:spPr>
+        <p:txBody>
+          <a:bodyPr wrap="square" lIns="0" tIns="0" rIns="0" bIns="0" rtlCol="0" anchor="ctr"/>
+          <a:lstStyle/>
+          <a:p>
+            <a:pPr indent="0" marL="0">
+              <a:buNone/>
+            </a:pPr>
+            <a:r>
+              <a:rPr lang="en-US" sz="2200" b="1" dirty="0">
+                <a:solidFill>
+                  <a:srgbClr val="FFFFFF"/>
+                </a:solidFill>
+                <a:latin typeface="Calibri" pitchFamily="34" charset="0"/>
+                <a:ea typeface="Calibri" pitchFamily="34" charset="-122"/>
+                <a:cs typeface="Calibri" pitchFamily="34" charset="-120"/>
+              </a:rPr>
+              <a:t>✍️  10-Minute Write</a:t>
+            </a:r>
+            <a:endParaRPr lang="en-US" sz="2200" dirty="0"/>
+          </a:p>
+        </p:txBody>
       </p:sp>
       <p:sp>
         <p:nvSpPr>
@@ -4704,24 +5204,24 @@
         </p:nvSpPr>
         <p:spPr>
           <a:xfrm>
-            <a:off x="457200" y="1005840"/>
-            <a:ext cx="8046720" cy="292608"/>
-          </a:xfrm>
-          <a:prstGeom prst="rect">
-            <a:avLst/>
-          </a:prstGeom>
-          <a:noFill/>
-          <a:ln/>
-        </p:spPr>
-        <p:txBody>
-          <a:bodyPr wrap="square" lIns="0" tIns="0" rIns="0" bIns="0" rtlCol="0" anchor="ctr"/>
-          <a:lstStyle/>
-          <a:p>
-            <a:pPr indent="0" marL="0">
-              <a:buNone/>
-            </a:pPr>
-            <a:r>
-              <a:rPr lang="en-US" sz="1100" b="1" spc="200" kern="0" dirty="0">
+            <a:off x="365760" y="822960"/>
+            <a:ext cx="8229600" cy="237744"/>
+          </a:xfrm>
+          <a:prstGeom prst="rect">
+            <a:avLst/>
+          </a:prstGeom>
+          <a:noFill/>
+          <a:ln/>
+        </p:spPr>
+        <p:txBody>
+          <a:bodyPr wrap="square" lIns="0" tIns="0" rIns="0" bIns="0" rtlCol="0" anchor="ctr"/>
+          <a:lstStyle/>
+          <a:p>
+            <a:pPr indent="0" marL="0">
+              <a:buNone/>
+            </a:pPr>
+            <a:r>
+              <a:rPr lang="en-US" sz="1100" b="1" spc="100" kern="0" dirty="0">
                 <a:solidFill>
                   <a:srgbClr val="C7922C"/>
                 </a:solidFill>
@@ -4729,7 +5229,7 @@
                 <a:ea typeface="Calibri" pitchFamily="34" charset="-122"/>
                 <a:cs typeface="Calibri" pitchFamily="34" charset="-120"/>
               </a:rPr>
-              <a:t>📖 READ THE PROMPT — 1 MINUTE</a:t>
+              <a:t>READ THE PROMPT — 1 MINUTE</a:t>
             </a:r>
             <a:endParaRPr lang="en-US" sz="1100" dirty="0"/>
           </a:p>
@@ -4743,18 +5243,18 @@
         </p:nvSpPr>
         <p:spPr>
           <a:xfrm>
-            <a:off x="457200" y="1417320"/>
-            <a:ext cx="8229600" cy="1645920"/>
+            <a:off x="365760" y="1143000"/>
+            <a:ext cx="8412480" cy="1737360"/>
           </a:xfrm>
           <a:prstGeom prst="roundRect">
             <a:avLst>
-              <a:gd name="adj" fmla="val 5556"/>
+              <a:gd name="adj" fmla="val 5263"/>
             </a:avLst>
           </a:prstGeom>
           <a:solidFill>
             <a:srgbClr val="FEF6E8"/>
           </a:solidFill>
-          <a:ln w="12700">
+          <a:ln w="19050">
             <a:solidFill>
               <a:srgbClr val="C7922C"/>
             </a:solidFill>
@@ -4777,24 +5277,24 @@
         </p:nvSpPr>
         <p:spPr>
           <a:xfrm>
-            <a:off x="640080" y="1527048"/>
-            <a:ext cx="7863840" cy="1417320"/>
-          </a:xfrm>
-          <a:prstGeom prst="rect">
-            <a:avLst/>
-          </a:prstGeom>
-          <a:noFill/>
-          <a:ln/>
-        </p:spPr>
-        <p:txBody>
-          <a:bodyPr wrap="square" lIns="0" tIns="0" rIns="0" bIns="0" rtlCol="0" anchor="ctr"/>
-          <a:lstStyle/>
-          <a:p>
-            <a:pPr indent="0" marL="0">
-              <a:buNone/>
-            </a:pPr>
-            <a:r>
-              <a:rPr lang="en-US" sz="1800" i="1" dirty="0">
+            <a:off x="594360" y="1271016"/>
+            <a:ext cx="7955280" cy="1481328"/>
+          </a:xfrm>
+          <a:prstGeom prst="rect">
+            <a:avLst/>
+          </a:prstGeom>
+          <a:noFill/>
+          <a:ln/>
+        </p:spPr>
+        <p:txBody>
+          <a:bodyPr wrap="square" lIns="0" tIns="0" rIns="0" bIns="0" rtlCol="0" anchor="ctr"/>
+          <a:lstStyle/>
+          <a:p>
+            <a:pPr indent="0" marL="0">
+              <a:buNone/>
+            </a:pPr>
+            <a:r>
+              <a:rPr lang="en-US" sz="1700" dirty="0">
                 <a:solidFill>
                   <a:srgbClr val="1E293B"/>
                 </a:solidFill>
@@ -4802,9 +5302,9 @@
                 <a:ea typeface="Calibri" pitchFamily="34" charset="-122"/>
                 <a:cs typeface="Calibri" pitchFamily="34" charset="-120"/>
               </a:rPr>
-              <a:t>Stanley gets to fly like a kite! Imagine you are floating up in the sky, looking down at your town. What do you see below you? How does the wind feel? Write about it using your senses. Start with: 'Up in the air, I could see...'</a:t>
-            </a:r>
-            <a:endParaRPr lang="en-US" sz="1800" dirty="0"/>
+              <a:t>Stanley gets to fly like a kite. Write about the most exciting thing you have ever done.</a:t>
+            </a:r>
+            <a:endParaRPr lang="en-US" sz="1700" dirty="0"/>
           </a:p>
         </p:txBody>
       </p:sp>
@@ -4816,76 +5316,34 @@
         </p:nvSpPr>
         <p:spPr>
           <a:xfrm>
-            <a:off x="640080" y="3246120"/>
-            <a:ext cx="7863840" cy="457200"/>
-          </a:xfrm>
-          <a:prstGeom prst="rect">
-            <a:avLst/>
-          </a:prstGeom>
-          <a:noFill/>
-          <a:ln/>
-        </p:spPr>
-        <p:txBody>
-          <a:bodyPr wrap="square" lIns="0" tIns="0" rIns="0" bIns="0" rtlCol="0" anchor="ctr"/>
-          <a:lstStyle/>
-          <a:p>
-            <a:pPr indent="0" marL="0">
-              <a:buNone/>
-            </a:pPr>
-            <a:r>
-              <a:rPr lang="en-US" sz="1400" b="1" dirty="0">
-                <a:solidFill>
-                  <a:srgbClr val="0E1C42"/>
-                </a:solidFill>
-                <a:latin typeface="Calibri" pitchFamily="34" charset="0"/>
-                <a:ea typeface="Calibri" pitchFamily="34" charset="-122"/>
-                <a:cs typeface="Calibri" pitchFamily="34" charset="-120"/>
-              </a:rPr>
-              <a:t>Type in the chat </a:t>
-            </a:r>
-            <a:pPr indent="0" marL="0">
-              <a:buNone/>
-            </a:pPr>
-            <a:r>
-              <a:rPr lang="en-US" sz="1400" dirty="0">
-                <a:solidFill>
-                  <a:srgbClr val="1E293B"/>
-                </a:solidFill>
-                <a:latin typeface="Calibri" pitchFamily="34" charset="0"/>
-                <a:ea typeface="Calibri" pitchFamily="34" charset="-122"/>
-                <a:cs typeface="Calibri" pitchFamily="34" charset="-120"/>
-              </a:rPr>
-              <a:t>or </a:t>
-            </a:r>
-            <a:pPr indent="0" marL="0">
-              <a:buNone/>
-            </a:pPr>
-            <a:r>
-              <a:rPr lang="en-US" sz="1400" b="1" dirty="0">
-                <a:solidFill>
-                  <a:srgbClr val="0E1C42"/>
-                </a:solidFill>
-                <a:latin typeface="Calibri" pitchFamily="34" charset="0"/>
-                <a:ea typeface="Calibri" pitchFamily="34" charset="-122"/>
-                <a:cs typeface="Calibri" pitchFamily="34" charset="-120"/>
-              </a:rPr>
-              <a:t>write on paper</a:t>
-            </a:r>
-            <a:pPr indent="0" marL="0">
-              <a:buNone/>
-            </a:pPr>
-            <a:r>
-              <a:rPr lang="en-US" sz="1400" dirty="0">
-                <a:solidFill>
-                  <a:srgbClr val="1E293B"/>
-                </a:solidFill>
-                <a:latin typeface="Calibri" pitchFamily="34" charset="0"/>
-                <a:ea typeface="Calibri" pitchFamily="34" charset="-122"/>
-                <a:cs typeface="Calibri" pitchFamily="34" charset="-120"/>
-              </a:rPr>
-              <a:t> to hold up when we share.</a:t>
-            </a:r>
-            <a:endParaRPr lang="en-US" sz="1400" dirty="0"/>
+            <a:off x="365760" y="3063240"/>
+            <a:ext cx="8412480" cy="365760"/>
+          </a:xfrm>
+          <a:prstGeom prst="rect">
+            <a:avLst/>
+          </a:prstGeom>
+          <a:noFill/>
+          <a:ln/>
+        </p:spPr>
+        <p:txBody>
+          <a:bodyPr wrap="square" lIns="0" tIns="0" rIns="0" bIns="0" rtlCol="0" anchor="ctr"/>
+          <a:lstStyle/>
+          <a:p>
+            <a:pPr indent="0" marL="0">
+              <a:buNone/>
+            </a:pPr>
+            <a:r>
+              <a:rPr lang="en-US" sz="1600" i="1" dirty="0">
+                <a:solidFill>
+                  <a:srgbClr val="64748B"/>
+                </a:solidFill>
+                <a:latin typeface="Calibri" pitchFamily="34" charset="0"/>
+                <a:ea typeface="Calibri" pitchFamily="34" charset="-122"/>
+                <a:cs typeface="Calibri" pitchFamily="34" charset="-120"/>
+              </a:rPr>
+              <a:t>Think first. You will have five minutes to write.</a:t>
+            </a:r>
+            <a:endParaRPr lang="en-US" sz="1600" dirty="0"/>
           </a:p>
         </p:txBody>
       </p:sp>
@@ -4923,30 +5381,89 @@
       </p:grpSpPr>
       <p:sp>
         <p:nvSpPr>
-          <p:cNvPr id="2" name="Text 0"/>
-          <p:cNvSpPr/>
-          <p:nvPr/>
-        </p:nvSpPr>
-        <p:spPr>
-          <a:xfrm>
-            <a:off x="457200" y="228600"/>
-            <a:ext cx="8229600" cy="640080"/>
-          </a:xfrm>
-          <a:prstGeom prst="rect">
-            <a:avLst/>
-          </a:prstGeom>
-          <a:noFill/>
-          <a:ln/>
-        </p:spPr>
-        <p:txBody>
-          <a:bodyPr wrap="square" lIns="0" tIns="0" rIns="0" bIns="0" rtlCol="0" anchor="ctr"/>
-          <a:lstStyle/>
-          <a:p>
-            <a:pPr algn="ctr" indent="0" marL="0">
-              <a:buNone/>
-            </a:pPr>
-            <a:r>
-              <a:rPr lang="en-US" sz="3200" b="1" dirty="0">
+          <p:cNvPr id="2" name="Shape 0"/>
+          <p:cNvSpPr/>
+          <p:nvPr/>
+        </p:nvSpPr>
+        <p:spPr>
+          <a:xfrm>
+            <a:off x="0" y="0"/>
+            <a:ext cx="9144000" cy="566928"/>
+          </a:xfrm>
+          <a:prstGeom prst="rect">
+            <a:avLst/>
+          </a:prstGeom>
+          <a:solidFill>
+            <a:srgbClr val="C7922C"/>
+          </a:solidFill>
+          <a:ln/>
+        </p:spPr>
+      </p:sp>
+      <p:sp>
+        <p:nvSpPr>
+          <p:cNvPr id="3" name="Text 1"/>
+          <p:cNvSpPr/>
+          <p:nvPr/>
+        </p:nvSpPr>
+        <p:spPr>
+          <a:xfrm>
+            <a:off x="365760" y="54864"/>
+            <a:ext cx="8412480" cy="457200"/>
+          </a:xfrm>
+          <a:prstGeom prst="rect">
+            <a:avLst/>
+          </a:prstGeom>
+          <a:noFill/>
+          <a:ln/>
+        </p:spPr>
+        <p:txBody>
+          <a:bodyPr wrap="square" lIns="0" tIns="0" rIns="0" bIns="0" rtlCol="0" anchor="ctr"/>
+          <a:lstStyle/>
+          <a:p>
+            <a:pPr indent="0" marL="0">
+              <a:buNone/>
+            </a:pPr>
+            <a:r>
+              <a:rPr lang="en-US" sz="2200" b="1" dirty="0">
+                <a:solidFill>
+                  <a:srgbClr val="FFFFFF"/>
+                </a:solidFill>
+                <a:latin typeface="Calibri" pitchFamily="34" charset="0"/>
+                <a:ea typeface="Calibri" pitchFamily="34" charset="-122"/>
+                <a:cs typeface="Calibri" pitchFamily="34" charset="-120"/>
+              </a:rPr>
+              <a:t>✍️  Writing Time</a:t>
+            </a:r>
+            <a:endParaRPr lang="en-US" sz="2200" dirty="0"/>
+          </a:p>
+        </p:txBody>
+      </p:sp>
+      <p:sp>
+        <p:nvSpPr>
+          <p:cNvPr id="4" name="Text 2"/>
+          <p:cNvSpPr/>
+          <p:nvPr/>
+        </p:nvSpPr>
+        <p:spPr>
+          <a:xfrm>
+            <a:off x="365760" y="868680"/>
+            <a:ext cx="8412480" cy="502920"/>
+          </a:xfrm>
+          <a:prstGeom prst="rect">
+            <a:avLst/>
+          </a:prstGeom>
+          <a:noFill/>
+          <a:ln/>
+        </p:spPr>
+        <p:txBody>
+          <a:bodyPr wrap="square" lIns="0" tIns="0" rIns="0" bIns="0" rtlCol="0" anchor="ctr"/>
+          <a:lstStyle/>
+          <a:p>
+            <a:pPr indent="0" marL="0">
+              <a:buNone/>
+            </a:pPr>
+            <a:r>
+              <a:rPr lang="en-US" sz="2600" b="1" dirty="0">
                 <a:solidFill>
                   <a:srgbClr val="0E1C42"/>
                 </a:solidFill>
@@ -4954,38 +5471,38 @@
                 <a:ea typeface="Calibri" pitchFamily="34" charset="-122"/>
                 <a:cs typeface="Calibri" pitchFamily="34" charset="-120"/>
               </a:rPr>
-              <a:t>✏️  Writing Time</a:t>
-            </a:r>
-            <a:endParaRPr lang="en-US" sz="3200" dirty="0"/>
-          </a:p>
-        </p:txBody>
-      </p:sp>
-      <p:sp>
-        <p:nvSpPr>
-          <p:cNvPr id="3" name="Text 1"/>
-          <p:cNvSpPr/>
-          <p:nvPr/>
-        </p:nvSpPr>
-        <p:spPr>
-          <a:xfrm>
-            <a:off x="914400" y="822960"/>
-            <a:ext cx="7315200" cy="365760"/>
-          </a:xfrm>
-          <a:prstGeom prst="rect">
-            <a:avLst/>
-          </a:prstGeom>
-          <a:noFill/>
-          <a:ln/>
-        </p:spPr>
-        <p:txBody>
-          <a:bodyPr wrap="square" lIns="0" tIns="0" rIns="0" bIns="0" rtlCol="0" anchor="ctr"/>
-          <a:lstStyle/>
-          <a:p>
-            <a:pPr algn="ctr" indent="0" marL="0">
-              <a:buNone/>
-            </a:pPr>
-            <a:r>
-              <a:rPr lang="en-US" sz="1600" dirty="0">
+              <a:t>5 minutes — keep your pencil moving!</a:t>
+            </a:r>
+            <a:endParaRPr lang="en-US" sz="2600" dirty="0"/>
+          </a:p>
+        </p:txBody>
+      </p:sp>
+      <p:sp>
+        <p:nvSpPr>
+          <p:cNvPr id="5" name="Text 3"/>
+          <p:cNvSpPr/>
+          <p:nvPr/>
+        </p:nvSpPr>
+        <p:spPr>
+          <a:xfrm>
+            <a:off x="365760" y="1463040"/>
+            <a:ext cx="8229600" cy="237744"/>
+          </a:xfrm>
+          <a:prstGeom prst="rect">
+            <a:avLst/>
+          </a:prstGeom>
+          <a:noFill/>
+          <a:ln/>
+        </p:spPr>
+        <p:txBody>
+          <a:bodyPr wrap="square" lIns="0" tIns="0" rIns="0" bIns="0" rtlCol="0" anchor="ctr"/>
+          <a:lstStyle/>
+          <a:p>
+            <a:pPr indent="0" marL="0">
+              <a:buNone/>
+            </a:pPr>
+            <a:r>
+              <a:rPr lang="en-US" sz="1100" b="1" spc="100" kern="0" dirty="0">
                 <a:solidFill>
                   <a:srgbClr val="C7922C"/>
                 </a:solidFill>
@@ -4993,32 +5510,32 @@
                 <a:ea typeface="Calibri" pitchFamily="34" charset="-122"/>
                 <a:cs typeface="Calibri" pitchFamily="34" charset="-120"/>
               </a:rPr>
-              <a:t>5 minutes — keep your pencil moving!</a:t>
-            </a:r>
-            <a:endParaRPr lang="en-US" sz="1600" dirty="0"/>
-          </a:p>
-        </p:txBody>
-      </p:sp>
-      <p:sp>
-        <p:nvSpPr>
-          <p:cNvPr id="4" name="Shape 2"/>
-          <p:cNvSpPr/>
-          <p:nvPr/>
-        </p:nvSpPr>
-        <p:spPr>
-          <a:xfrm>
-            <a:off x="457200" y="1371600"/>
-            <a:ext cx="8229600" cy="1280160"/>
+              <a:t>YOUR PROMPT</a:t>
+            </a:r>
+            <a:endParaRPr lang="en-US" sz="1100" dirty="0"/>
+          </a:p>
+        </p:txBody>
+      </p:sp>
+      <p:sp>
+        <p:nvSpPr>
+          <p:cNvPr id="6" name="Shape 4"/>
+          <p:cNvSpPr/>
+          <p:nvPr/>
+        </p:nvSpPr>
+        <p:spPr>
+          <a:xfrm>
+            <a:off x="365760" y="1737360"/>
+            <a:ext cx="8412480" cy="1417320"/>
           </a:xfrm>
           <a:prstGeom prst="roundRect">
             <a:avLst>
-              <a:gd name="adj" fmla="val 7143"/>
+              <a:gd name="adj" fmla="val 6452"/>
             </a:avLst>
           </a:prstGeom>
           <a:solidFill>
             <a:srgbClr val="FFFFFF"/>
           </a:solidFill>
-          <a:ln w="12700">
+          <a:ln w="19050">
             <a:solidFill>
               <a:srgbClr val="C7922C"/>
             </a:solidFill>
@@ -5035,44 +5552,30 @@
       </p:sp>
       <p:sp>
         <p:nvSpPr>
-          <p:cNvPr id="5" name="Text 3"/>
-          <p:cNvSpPr/>
-          <p:nvPr/>
-        </p:nvSpPr>
-        <p:spPr>
-          <a:xfrm>
-            <a:off x="640080" y="1417320"/>
-            <a:ext cx="7863840" cy="1188720"/>
-          </a:xfrm>
-          <a:prstGeom prst="rect">
-            <a:avLst/>
-          </a:prstGeom>
-          <a:noFill/>
-          <a:ln/>
-        </p:spPr>
-        <p:txBody>
-          <a:bodyPr wrap="square" lIns="0" tIns="0" rIns="0" bIns="0" rtlCol="0" anchor="t"/>
-          <a:lstStyle/>
-          <a:p>
-            <a:pPr indent="0" marL="0">
-              <a:buNone/>
-            </a:pPr>
-            <a:r>
-              <a:rPr lang="en-US" sz="1200" b="1" dirty="0">
-                <a:solidFill>
-                  <a:srgbClr val="C7922C"/>
-                </a:solidFill>
-                <a:latin typeface="Calibri" pitchFamily="34" charset="0"/>
-                <a:ea typeface="Calibri" pitchFamily="34" charset="-122"/>
-                <a:cs typeface="Calibri" pitchFamily="34" charset="-120"/>
-              </a:rPr>
-              <a:t>📖 Prompt: </a:t>
-            </a:r>
-            <a:pPr indent="0" marL="0">
-              <a:buNone/>
-            </a:pPr>
-            <a:r>
-              <a:rPr lang="en-US" sz="1200" i="1" dirty="0">
+          <p:cNvPr id="7" name="Text 5"/>
+          <p:cNvSpPr/>
+          <p:nvPr/>
+        </p:nvSpPr>
+        <p:spPr>
+          <a:xfrm>
+            <a:off x="594360" y="1865376"/>
+            <a:ext cx="7955280" cy="1161288"/>
+          </a:xfrm>
+          <a:prstGeom prst="rect">
+            <a:avLst/>
+          </a:prstGeom>
+          <a:noFill/>
+          <a:ln/>
+        </p:spPr>
+        <p:txBody>
+          <a:bodyPr wrap="square" lIns="0" tIns="0" rIns="0" bIns="0" rtlCol="0" anchor="ctr"/>
+          <a:lstStyle/>
+          <a:p>
+            <a:pPr indent="0" marL="0">
+              <a:buNone/>
+            </a:pPr>
+            <a:r>
+              <a:rPr lang="en-US" sz="1700" dirty="0">
                 <a:solidFill>
                   <a:srgbClr val="1E293B"/>
                 </a:solidFill>
@@ -5080,122 +5583,48 @@
                 <a:ea typeface="Calibri" pitchFamily="34" charset="-122"/>
                 <a:cs typeface="Calibri" pitchFamily="34" charset="-120"/>
               </a:rPr>
-              <a:t>Stanley gets to fly like a kite! Imagine you are floating up in the sky, looking down at your town. What do you see below you? How does the wind feel? Write about it using your senses. Start with: 'Up in the air, I could see...'</a:t>
-            </a:r>
-            <a:endParaRPr lang="en-US" sz="1200" dirty="0"/>
-          </a:p>
-        </p:txBody>
-      </p:sp>
-      <p:sp>
-        <p:nvSpPr>
-          <p:cNvPr id="6" name="Shape 4"/>
-          <p:cNvSpPr/>
-          <p:nvPr/>
-        </p:nvSpPr>
-        <p:spPr>
-          <a:xfrm>
-            <a:off x="2286000" y="2926080"/>
-            <a:ext cx="4572000" cy="1280160"/>
-          </a:xfrm>
-          <a:prstGeom prst="roundRect">
-            <a:avLst>
-              <a:gd name="adj" fmla="val 8571"/>
-            </a:avLst>
-          </a:prstGeom>
-          <a:solidFill>
-            <a:srgbClr val="FFFFFF"/>
-          </a:solidFill>
-          <a:ln/>
-          <a:effectLst>
-            <a:outerShdw sx="100000" sy="100000" kx="0" ky="0" algn="bl" rotWithShape="0" blurRad="101600" dist="38100" dir="2700000">
-              <a:srgbClr val="000000">
-                <a:alpha val="12000"/>
-              </a:srgbClr>
-            </a:outerShdw>
-          </a:effectLst>
-        </p:spPr>
-      </p:sp>
-      <p:sp>
-        <p:nvSpPr>
-          <p:cNvPr id="7" name="Text 5"/>
-          <p:cNvSpPr/>
-          <p:nvPr/>
-        </p:nvSpPr>
-        <p:spPr>
-          <a:xfrm>
-            <a:off x="2468880" y="3017520"/>
-            <a:ext cx="4206240" cy="1097280"/>
-          </a:xfrm>
-          <a:prstGeom prst="rect">
-            <a:avLst/>
-          </a:prstGeom>
-          <a:noFill/>
-          <a:ln/>
-        </p:spPr>
-        <p:txBody>
-          <a:bodyPr wrap="square" lIns="0" tIns="0" rIns="0" bIns="0" rtlCol="0" anchor="t"/>
-          <a:lstStyle/>
-          <a:p>
-            <a:pPr indent="0" marL="0">
-              <a:buNone/>
-            </a:pPr>
-            <a:r>
-              <a:rPr lang="en-US" sz="1400" b="1" dirty="0">
-                <a:solidFill>
-                  <a:srgbClr val="0E1C42"/>
-                </a:solidFill>
-                <a:latin typeface="Calibri" pitchFamily="34" charset="0"/>
-                <a:ea typeface="Calibri" pitchFamily="34" charset="-122"/>
-                <a:cs typeface="Calibri" pitchFamily="34" charset="-120"/>
-              </a:rPr>
-              <a:t>If you get stuck:
-</a:t>
-            </a:r>
-            <a:pPr indent="0" marL="0">
-              <a:buNone/>
-            </a:pPr>
-            <a:r>
-              <a:rPr lang="en-US" sz="1300" dirty="0">
-                <a:solidFill>
-                  <a:srgbClr val="1E293B"/>
-                </a:solidFill>
-                <a:latin typeface="Calibri" pitchFamily="34" charset="0"/>
-                <a:ea typeface="Calibri" pitchFamily="34" charset="-122"/>
-                <a:cs typeface="Calibri" pitchFamily="34" charset="-120"/>
-              </a:rPr>
-              <a:t>• Reread the prompt above
-</a:t>
-            </a:r>
-            <a:pPr indent="0" marL="0">
-              <a:buNone/>
-            </a:pPr>
-            <a:r>
-              <a:rPr lang="en-US" sz="1300" dirty="0">
-                <a:solidFill>
-                  <a:srgbClr val="1E293B"/>
-                </a:solidFill>
-                <a:latin typeface="Calibri" pitchFamily="34" charset="0"/>
-                <a:ea typeface="Calibri" pitchFamily="34" charset="-122"/>
-                <a:cs typeface="Calibri" pitchFamily="34" charset="-120"/>
-              </a:rPr>
-              <a:t>• Write "I'm thinking..." until a new idea comes
-</a:t>
-            </a:r>
-            <a:pPr indent="0" marL="0">
-              <a:buNone/>
-            </a:pPr>
-            <a:r>
-              <a:rPr lang="en-US" sz="1300" dirty="0">
-                <a:solidFill>
-                  <a:srgbClr val="1E293B"/>
-                </a:solidFill>
-                <a:latin typeface="Calibri" pitchFamily="34" charset="0"/>
-                <a:ea typeface="Calibri" pitchFamily="34" charset="-122"/>
-                <a:cs typeface="Calibri" pitchFamily="34" charset="-120"/>
-              </a:rPr>
-              <a:t>• Keep going — don't erase!</a:t>
-            </a:r>
-            <a:endParaRPr lang="en-US" sz="1400" dirty="0"/>
+              <a:t>Stanley gets to fly like a kite. Write about the most exciting thing you have ever done.</a:t>
+            </a:r>
+            <a:endParaRPr lang="en-US" sz="1700" dirty="0"/>
+          </a:p>
+        </p:txBody>
+      </p:sp>
+      <p:sp>
+        <p:nvSpPr>
+          <p:cNvPr id="8" name="Text 6"/>
+          <p:cNvSpPr/>
+          <p:nvPr/>
+        </p:nvSpPr>
+        <p:spPr>
+          <a:xfrm>
+            <a:off x="365760" y="3291840"/>
+            <a:ext cx="8412480" cy="365760"/>
+          </a:xfrm>
+          <a:prstGeom prst="rect">
+            <a:avLst/>
+          </a:prstGeom>
+          <a:noFill/>
+          <a:ln/>
+        </p:spPr>
+        <p:txBody>
+          <a:bodyPr wrap="square" lIns="0" tIns="0" rIns="0" bIns="0" rtlCol="0" anchor="ctr"/>
+          <a:lstStyle/>
+          <a:p>
+            <a:pPr indent="0" marL="0">
+              <a:buNone/>
+            </a:pPr>
+            <a:r>
+              <a:rPr lang="en-US" sz="1500" i="1" dirty="0">
+                <a:solidFill>
+                  <a:srgbClr val="64748B"/>
+                </a:solidFill>
+                <a:latin typeface="Calibri" pitchFamily="34" charset="0"/>
+                <a:ea typeface="Calibri" pitchFamily="34" charset="-122"/>
+                <a:cs typeface="Calibri" pitchFamily="34" charset="-120"/>
+              </a:rPr>
+              <a:t>Do not stop to erase. If you get stuck, write the last word again and keep going.</a:t>
+            </a:r>
+            <a:endParaRPr lang="en-US" sz="1500" dirty="0"/>
           </a:p>
         </p:txBody>
       </p:sp>
@@ -5233,39 +5662,23 @@
       </p:grpSpPr>
       <p:sp>
         <p:nvSpPr>
-          <p:cNvPr id="2" name="Text 0"/>
-          <p:cNvSpPr/>
-          <p:nvPr/>
-        </p:nvSpPr>
-        <p:spPr>
-          <a:xfrm>
-            <a:off x="3657600" y="365760"/>
-            <a:ext cx="1828800" cy="640080"/>
-          </a:xfrm>
-          <a:prstGeom prst="rect">
-            <a:avLst/>
-          </a:prstGeom>
-          <a:noFill/>
-          <a:ln/>
-        </p:spPr>
-        <p:txBody>
-          <a:bodyPr wrap="square" lIns="0" tIns="0" rIns="0" bIns="0" rtlCol="0" anchor="ctr"/>
-          <a:lstStyle/>
-          <a:p>
-            <a:pPr algn="ctr" indent="0" marL="0">
-              <a:buNone/>
-            </a:pPr>
-            <a:r>
-              <a:rPr lang="en-US" sz="4000" dirty="0">
-                <a:solidFill>
-                  <a:srgbClr val="000000"/>
-                </a:solidFill>
-              </a:rPr>
-              <a:t>🔍</a:t>
-            </a:r>
-            <a:endParaRPr lang="en-US" sz="4000" dirty="0"/>
-          </a:p>
-        </p:txBody>
+          <p:cNvPr id="2" name="Shape 0"/>
+          <p:cNvSpPr/>
+          <p:nvPr/>
+        </p:nvSpPr>
+        <p:spPr>
+          <a:xfrm>
+            <a:off x="0" y="0"/>
+            <a:ext cx="9144000" cy="566928"/>
+          </a:xfrm>
+          <a:prstGeom prst="rect">
+            <a:avLst/>
+          </a:prstGeom>
+          <a:solidFill>
+            <a:srgbClr val="34B76F"/>
+          </a:solidFill>
+          <a:ln/>
+        </p:spPr>
       </p:sp>
       <p:sp>
         <p:nvSpPr>
@@ -5275,24 +5688,63 @@
         </p:nvSpPr>
         <p:spPr>
           <a:xfrm>
-            <a:off x="914400" y="914400"/>
-            <a:ext cx="7315200" cy="640080"/>
-          </a:xfrm>
-          <a:prstGeom prst="rect">
-            <a:avLst/>
-          </a:prstGeom>
-          <a:noFill/>
-          <a:ln/>
-        </p:spPr>
-        <p:txBody>
-          <a:bodyPr wrap="square" lIns="0" tIns="0" rIns="0" bIns="0" rtlCol="0" anchor="ctr"/>
-          <a:lstStyle/>
-          <a:p>
-            <a:pPr algn="ctr" indent="0" marL="0">
-              <a:buNone/>
-            </a:pPr>
-            <a:r>
-              <a:rPr lang="en-US" sz="3200" b="1" dirty="0">
+            <a:off x="365760" y="54864"/>
+            <a:ext cx="8412480" cy="457200"/>
+          </a:xfrm>
+          <a:prstGeom prst="rect">
+            <a:avLst/>
+          </a:prstGeom>
+          <a:noFill/>
+          <a:ln/>
+        </p:spPr>
+        <p:txBody>
+          <a:bodyPr wrap="square" lIns="0" tIns="0" rIns="0" bIns="0" rtlCol="0" anchor="ctr"/>
+          <a:lstStyle/>
+          <a:p>
+            <a:pPr indent="0" marL="0">
+              <a:buNone/>
+            </a:pPr>
+            <a:r>
+              <a:rPr lang="en-US" sz="2200" b="1" dirty="0">
+                <a:solidFill>
+                  <a:srgbClr val="FFFFFF"/>
+                </a:solidFill>
+                <a:latin typeface="Calibri" pitchFamily="34" charset="0"/>
+                <a:ea typeface="Calibri" pitchFamily="34" charset="-122"/>
+                <a:cs typeface="Calibri" pitchFamily="34" charset="-120"/>
+              </a:rPr>
+              <a:t>🔍  Edit &amp; Revise</a:t>
+            </a:r>
+            <a:endParaRPr lang="en-US" sz="2200" dirty="0"/>
+          </a:p>
+        </p:txBody>
+      </p:sp>
+      <p:sp>
+        <p:nvSpPr>
+          <p:cNvPr id="4" name="Text 2"/>
+          <p:cNvSpPr/>
+          <p:nvPr/>
+        </p:nvSpPr>
+        <p:spPr>
+          <a:xfrm>
+            <a:off x="365760" y="868680"/>
+            <a:ext cx="8412480" cy="457200"/>
+          </a:xfrm>
+          <a:prstGeom prst="rect">
+            <a:avLst/>
+          </a:prstGeom>
+          <a:noFill/>
+          <a:ln/>
+        </p:spPr>
+        <p:txBody>
+          <a:bodyPr wrap="square" lIns="0" tIns="0" rIns="0" bIns="0" rtlCol="0" anchor="ctr"/>
+          <a:lstStyle/>
+          <a:p>
+            <a:pPr indent="0" marL="0">
+              <a:buNone/>
+            </a:pPr>
+            <a:r>
+              <a:rPr lang="en-US" sz="2400" b="1" dirty="0">
                 <a:solidFill>
                   <a:srgbClr val="0E1C42"/>
                 </a:solidFill>
@@ -5300,38 +5752,38 @@
                 <a:ea typeface="Calibri" pitchFamily="34" charset="-122"/>
                 <a:cs typeface="Calibri" pitchFamily="34" charset="-120"/>
               </a:rPr>
-              <a:t>Edit &amp; Revise</a:t>
-            </a:r>
-            <a:endParaRPr lang="en-US" sz="3200" dirty="0"/>
-          </a:p>
-        </p:txBody>
-      </p:sp>
-      <p:sp>
-        <p:nvSpPr>
-          <p:cNvPr id="4" name="Text 2"/>
-          <p:cNvSpPr/>
-          <p:nvPr/>
-        </p:nvSpPr>
-        <p:spPr>
-          <a:xfrm>
-            <a:off x="914400" y="1508760"/>
-            <a:ext cx="7315200" cy="457200"/>
-          </a:xfrm>
-          <a:prstGeom prst="rect">
-            <a:avLst/>
-          </a:prstGeom>
-          <a:noFill/>
-          <a:ln/>
-        </p:spPr>
-        <p:txBody>
-          <a:bodyPr wrap="square" lIns="0" tIns="0" rIns="0" bIns="0" rtlCol="0" anchor="ctr"/>
-          <a:lstStyle/>
-          <a:p>
-            <a:pPr algn="ctr" indent="0" marL="0">
-              <a:buNone/>
-            </a:pPr>
-            <a:r>
-              <a:rPr lang="en-US" sz="1600" dirty="0">
+              <a:t>1 minute — pick ONE thing to fix.</a:t>
+            </a:r>
+            <a:endParaRPr lang="en-US" sz="2400" dirty="0"/>
+          </a:p>
+        </p:txBody>
+      </p:sp>
+      <p:sp>
+        <p:nvSpPr>
+          <p:cNvPr id="5" name="Text 3"/>
+          <p:cNvSpPr/>
+          <p:nvPr/>
+        </p:nvSpPr>
+        <p:spPr>
+          <a:xfrm>
+            <a:off x="365760" y="1417320"/>
+            <a:ext cx="8229600" cy="237744"/>
+          </a:xfrm>
+          <a:prstGeom prst="rect">
+            <a:avLst/>
+          </a:prstGeom>
+          <a:noFill/>
+          <a:ln/>
+        </p:spPr>
+        <p:txBody>
+          <a:bodyPr wrap="square" lIns="0" tIns="0" rIns="0" bIns="0" rtlCol="0" anchor="ctr"/>
+          <a:lstStyle/>
+          <a:p>
+            <a:pPr indent="0" marL="0">
+              <a:buNone/>
+            </a:pPr>
+            <a:r>
+              <a:rPr lang="en-US" sz="1100" b="1" spc="100" kern="0" dirty="0">
                 <a:solidFill>
                   <a:srgbClr val="34B76F"/>
                 </a:solidFill>
@@ -5339,26 +5791,26 @@
                 <a:ea typeface="Calibri" pitchFamily="34" charset="-122"/>
                 <a:cs typeface="Calibri" pitchFamily="34" charset="-120"/>
               </a:rPr>
-              <a:t>1 minute — pick ONE thing to fix</a:t>
-            </a:r>
-            <a:endParaRPr lang="en-US" sz="1600" dirty="0"/>
-          </a:p>
-        </p:txBody>
-      </p:sp>
-      <p:sp>
-        <p:nvSpPr>
-          <p:cNvPr id="5" name="Shape 3"/>
-          <p:cNvSpPr/>
-          <p:nvPr/>
-        </p:nvSpPr>
-        <p:spPr>
-          <a:xfrm>
-            <a:off x="1371600" y="2103120"/>
-            <a:ext cx="6400800" cy="640080"/>
+              <a:t>TODAY'S EDIT FOCUS</a:t>
+            </a:r>
+            <a:endParaRPr lang="en-US" sz="1100" dirty="0"/>
+          </a:p>
+        </p:txBody>
+      </p:sp>
+      <p:sp>
+        <p:nvSpPr>
+          <p:cNvPr id="6" name="Shape 4"/>
+          <p:cNvSpPr/>
+          <p:nvPr/>
+        </p:nvSpPr>
+        <p:spPr>
+          <a:xfrm>
+            <a:off x="365760" y="1691640"/>
+            <a:ext cx="8412480" cy="777240"/>
           </a:xfrm>
           <a:prstGeom prst="roundRect">
             <a:avLst>
-              <a:gd name="adj" fmla="val 14286"/>
+              <a:gd name="adj" fmla="val 11765"/>
             </a:avLst>
           </a:prstGeom>
           <a:solidFill>
@@ -5381,44 +5833,30 @@
       </p:sp>
       <p:sp>
         <p:nvSpPr>
-          <p:cNvPr id="6" name="Text 4"/>
-          <p:cNvSpPr/>
-          <p:nvPr/>
-        </p:nvSpPr>
-        <p:spPr>
-          <a:xfrm>
-            <a:off x="1554480" y="2148840"/>
-            <a:ext cx="6035040" cy="548640"/>
-          </a:xfrm>
-          <a:prstGeom prst="rect">
-            <a:avLst/>
-          </a:prstGeom>
-          <a:noFill/>
-          <a:ln/>
-        </p:spPr>
-        <p:txBody>
-          <a:bodyPr wrap="square" lIns="0" tIns="0" rIns="0" bIns="0" rtlCol="0" anchor="ctr"/>
-          <a:lstStyle/>
-          <a:p>
-            <a:pPr indent="0" marL="0">
-              <a:buNone/>
-            </a:pPr>
-            <a:r>
-              <a:rPr lang="en-US" sz="1400" b="1" dirty="0">
-                <a:solidFill>
-                  <a:srgbClr val="34B76F"/>
-                </a:solidFill>
-                <a:latin typeface="Calibri" pitchFamily="34" charset="0"/>
-                <a:ea typeface="Calibri" pitchFamily="34" charset="-122"/>
-                <a:cs typeface="Calibri" pitchFamily="34" charset="-120"/>
-              </a:rPr>
-              <a:t>Today's check: </a:t>
-            </a:r>
-            <a:pPr indent="0" marL="0">
-              <a:buNone/>
-            </a:pPr>
-            <a:r>
-              <a:rPr lang="en-US" sz="1400" dirty="0">
+          <p:cNvPr id="7" name="Text 5"/>
+          <p:cNvSpPr/>
+          <p:nvPr/>
+        </p:nvSpPr>
+        <p:spPr>
+          <a:xfrm>
+            <a:off x="594360" y="1819656"/>
+            <a:ext cx="7955280" cy="521208"/>
+          </a:xfrm>
+          <a:prstGeom prst="rect">
+            <a:avLst/>
+          </a:prstGeom>
+          <a:noFill/>
+          <a:ln/>
+        </p:spPr>
+        <p:txBody>
+          <a:bodyPr wrap="square" lIns="0" tIns="0" rIns="0" bIns="0" rtlCol="0" anchor="ctr"/>
+          <a:lstStyle/>
+          <a:p>
+            <a:pPr indent="0" marL="0">
+              <a:buNone/>
+            </a:pPr>
+            <a:r>
+              <a:rPr lang="en-US" sz="1700" dirty="0">
                 <a:solidFill>
                   <a:srgbClr val="1E293B"/>
                 </a:solidFill>
@@ -5426,40 +5864,11 @@
                 <a:ea typeface="Calibri" pitchFamily="34" charset="-122"/>
                 <a:cs typeface="Calibri" pitchFamily="34" charset="-120"/>
               </a:rPr>
-              <a:t>Did I use at least two different senses (sight, sound, touch, smell) in my writing?</a:t>
-            </a:r>
-            <a:endParaRPr lang="en-US" sz="1400" dirty="0"/>
-          </a:p>
-        </p:txBody>
-      </p:sp>
-      <p:sp>
-        <p:nvSpPr>
-          <p:cNvPr id="7" name="Shape 5"/>
-          <p:cNvSpPr/>
-          <p:nvPr/>
-        </p:nvSpPr>
-        <p:spPr>
-          <a:xfrm>
-            <a:off x="1371600" y="2926080"/>
-            <a:ext cx="6400800" cy="1463040"/>
-          </a:xfrm>
-          <a:prstGeom prst="roundRect">
-            <a:avLst>
-              <a:gd name="adj" fmla="val 6250"/>
-            </a:avLst>
-          </a:prstGeom>
-          <a:solidFill>
-            <a:srgbClr val="FFFFFF"/>
-          </a:solidFill>
-          <a:ln/>
-          <a:effectLst>
-            <a:outerShdw sx="100000" sy="100000" kx="0" ky="0" algn="bl" rotWithShape="0" blurRad="101600" dist="38100" dir="2700000">
-              <a:srgbClr val="000000">
-                <a:alpha val="12000"/>
-              </a:srgbClr>
-            </a:outerShdw>
-          </a:effectLst>
-        </p:spPr>
+              <a:t>Did I start each sentence with a capital letter?</a:t>
+            </a:r>
+            <a:endParaRPr lang="en-US" sz="1700" dirty="0"/>
+          </a:p>
+        </p:txBody>
       </p:sp>
       <p:sp>
         <p:nvSpPr>
@@ -5469,45 +5878,24 @@
         </p:nvSpPr>
         <p:spPr>
           <a:xfrm>
-            <a:off x="1554480" y="3017520"/>
-            <a:ext cx="6035040" cy="1280160"/>
-          </a:xfrm>
-          <a:prstGeom prst="rect">
-            <a:avLst/>
-          </a:prstGeom>
-          <a:noFill/>
-          <a:ln/>
-        </p:spPr>
-        <p:txBody>
-          <a:bodyPr wrap="square" lIns="0" tIns="0" rIns="0" bIns="0" rtlCol="0" anchor="t"/>
-          <a:lstStyle/>
-          <a:p>
-            <a:pPr indent="0" marL="0">
-              <a:spcAft>
-                <a:spcPts val="200"/>
-              </a:spcAft>
-              <a:buNone/>
-            </a:pPr>
-            <a:r>
-              <a:rPr lang="en-US" sz="1300" b="1" dirty="0">
-                <a:solidFill>
-                  <a:srgbClr val="0E1C42"/>
-                </a:solidFill>
-                <a:latin typeface="Calibri" pitchFamily="34" charset="0"/>
-                <a:ea typeface="Calibri" pitchFamily="34" charset="-122"/>
-                <a:cs typeface="Calibri" pitchFamily="34" charset="-120"/>
-              </a:rPr>
-              <a:t>Quick check:
-</a:t>
-            </a:r>
-            <a:pPr indent="0" marL="0">
-              <a:spcAft>
-                <a:spcPts val="200"/>
-              </a:spcAft>
-              <a:buNone/>
-            </a:pPr>
-            <a:r>
-              <a:rPr lang="en-US" sz="1200" dirty="0">
+            <a:off x="365760" y="2651760"/>
+            <a:ext cx="8412480" cy="365760"/>
+          </a:xfrm>
+          <a:prstGeom prst="rect">
+            <a:avLst/>
+          </a:prstGeom>
+          <a:noFill/>
+          <a:ln/>
+        </p:spPr>
+        <p:txBody>
+          <a:bodyPr wrap="square" lIns="0" tIns="0" rIns="0" bIns="0" rtlCol="0" anchor="ctr"/>
+          <a:lstStyle/>
+          <a:p>
+            <a:pPr indent="0" marL="0">
+              <a:buNone/>
+            </a:pPr>
+            <a:r>
+              <a:rPr lang="en-US" sz="1500" b="1" dirty="0">
                 <a:solidFill>
                   <a:srgbClr val="1E293B"/>
                 </a:solidFill>
@@ -5515,17 +5903,13 @@
                 <a:ea typeface="Calibri" pitchFamily="34" charset="-122"/>
                 <a:cs typeface="Calibri" pitchFamily="34" charset="-120"/>
               </a:rPr>
-              <a:t>□ Capital letters at the start of every sentence
-</a:t>
-            </a:r>
-            <a:pPr indent="0" marL="0">
-              <a:spcAft>
-                <a:spcPts val="200"/>
-              </a:spcAft>
-              <a:buNone/>
-            </a:pPr>
-            <a:r>
-              <a:rPr lang="en-US" sz="1200" dirty="0">
+              <a:t>Quick check:  </a:t>
+            </a:r>
+            <a:pPr indent="0" marL="0">
+              <a:buNone/>
+            </a:pPr>
+            <a:r>
+              <a:rPr lang="en-US" sz="1500" dirty="0">
                 <a:solidFill>
                   <a:srgbClr val="1E293B"/>
                 </a:solidFill>
@@ -5533,45 +5917,9 @@
                 <a:ea typeface="Calibri" pitchFamily="34" charset="-122"/>
                 <a:cs typeface="Calibri" pitchFamily="34" charset="-120"/>
               </a:rPr>
-              <a:t>□ End punctuation ( .  ?  ! )
-</a:t>
-            </a:r>
-            <a:pPr indent="0" marL="0">
-              <a:spcAft>
-                <a:spcPts val="200"/>
-              </a:spcAft>
-              <a:buNone/>
-            </a:pPr>
-            <a:r>
-              <a:rPr lang="en-US" sz="1200" dirty="0">
-                <a:solidFill>
-                  <a:srgbClr val="1E293B"/>
-                </a:solidFill>
-                <a:latin typeface="Calibri" pitchFamily="34" charset="0"/>
-                <a:ea typeface="Calibri" pitchFamily="34" charset="-122"/>
-                <a:cs typeface="Calibri" pitchFamily="34" charset="-120"/>
-              </a:rPr>
-              <a:t>□ Spelling — circle any words that look wrong
-</a:t>
-            </a:r>
-            <a:pPr indent="0" marL="0">
-              <a:spcAft>
-                <a:spcPts val="200"/>
-              </a:spcAft>
-              <a:buNone/>
-            </a:pPr>
-            <a:r>
-              <a:rPr lang="en-US" sz="1200" dirty="0">
-                <a:solidFill>
-                  <a:srgbClr val="1E293B"/>
-                </a:solidFill>
-                <a:latin typeface="Calibri" pitchFamily="34" charset="0"/>
-                <a:ea typeface="Calibri" pitchFamily="34" charset="-122"/>
-                <a:cs typeface="Calibri" pitchFamily="34" charset="-120"/>
-              </a:rPr>
-              <a:t>□ Read it quietly to yourself — does it sound right?</a:t>
-            </a:r>
-            <a:endParaRPr lang="en-US" sz="1300" dirty="0"/>
+              <a:t>capitals  ·  end punctuation  ·  circle a word you are unsure of  ·  read it aloud</a:t>
+            </a:r>
+            <a:endParaRPr lang="en-US" sz="1500" dirty="0"/>
           </a:p>
         </p:txBody>
       </p:sp>
@@ -5609,39 +5957,23 @@
       </p:grpSpPr>
       <p:sp>
         <p:nvSpPr>
-          <p:cNvPr id="2" name="Text 0"/>
-          <p:cNvSpPr/>
-          <p:nvPr/>
-        </p:nvSpPr>
-        <p:spPr>
-          <a:xfrm>
-            <a:off x="3657600" y="457200"/>
-            <a:ext cx="1828800" cy="731520"/>
-          </a:xfrm>
-          <a:prstGeom prst="rect">
-            <a:avLst/>
-          </a:prstGeom>
-          <a:noFill/>
-          <a:ln/>
-        </p:spPr>
-        <p:txBody>
-          <a:bodyPr wrap="square" lIns="0" tIns="0" rIns="0" bIns="0" rtlCol="0" anchor="ctr"/>
-          <a:lstStyle/>
-          <a:p>
-            <a:pPr algn="ctr" indent="0" marL="0">
-              <a:buNone/>
-            </a:pPr>
-            <a:r>
-              <a:rPr lang="en-US" sz="4400" dirty="0">
-                <a:solidFill>
-                  <a:srgbClr val="000000"/>
-                </a:solidFill>
-              </a:rPr>
-              <a:t>🗣️</a:t>
-            </a:r>
-            <a:endParaRPr lang="en-US" sz="4400" dirty="0"/>
-          </a:p>
-        </p:txBody>
+          <p:cNvPr id="2" name="Shape 0"/>
+          <p:cNvSpPr/>
+          <p:nvPr/>
+        </p:nvSpPr>
+        <p:spPr>
+          <a:xfrm>
+            <a:off x="0" y="0"/>
+            <a:ext cx="9144000" cy="566928"/>
+          </a:xfrm>
+          <a:prstGeom prst="rect">
+            <a:avLst/>
+          </a:prstGeom>
+          <a:solidFill>
+            <a:srgbClr val="55C8E8"/>
+          </a:solidFill>
+          <a:ln/>
+        </p:spPr>
       </p:sp>
       <p:sp>
         <p:nvSpPr>
@@ -5651,24 +5983,63 @@
         </p:nvSpPr>
         <p:spPr>
           <a:xfrm>
-            <a:off x="914400" y="1097280"/>
-            <a:ext cx="7315200" cy="640080"/>
-          </a:xfrm>
-          <a:prstGeom prst="rect">
-            <a:avLst/>
-          </a:prstGeom>
-          <a:noFill/>
-          <a:ln/>
-        </p:spPr>
-        <p:txBody>
-          <a:bodyPr wrap="square" lIns="0" tIns="0" rIns="0" bIns="0" rtlCol="0" anchor="ctr"/>
-          <a:lstStyle/>
-          <a:p>
-            <a:pPr algn="ctr" indent="0" marL="0">
-              <a:buNone/>
-            </a:pPr>
-            <a:r>
-              <a:rPr lang="en-US" sz="3400" b="1" dirty="0">
+            <a:off x="365760" y="54864"/>
+            <a:ext cx="8412480" cy="457200"/>
+          </a:xfrm>
+          <a:prstGeom prst="rect">
+            <a:avLst/>
+          </a:prstGeom>
+          <a:noFill/>
+          <a:ln/>
+        </p:spPr>
+        <p:txBody>
+          <a:bodyPr wrap="square" lIns="0" tIns="0" rIns="0" bIns="0" rtlCol="0" anchor="ctr"/>
+          <a:lstStyle/>
+          <a:p>
+            <a:pPr indent="0" marL="0">
+              <a:buNone/>
+            </a:pPr>
+            <a:r>
+              <a:rPr lang="en-US" sz="2200" b="1" dirty="0">
+                <a:solidFill>
+                  <a:srgbClr val="FFFFFF"/>
+                </a:solidFill>
+                <a:latin typeface="Calibri" pitchFamily="34" charset="0"/>
+                <a:ea typeface="Calibri" pitchFamily="34" charset="-122"/>
+                <a:cs typeface="Calibri" pitchFamily="34" charset="-120"/>
+              </a:rPr>
+              <a:t>🗣️  Share Time</a:t>
+            </a:r>
+            <a:endParaRPr lang="en-US" sz="2200" dirty="0"/>
+          </a:p>
+        </p:txBody>
+      </p:sp>
+      <p:sp>
+        <p:nvSpPr>
+          <p:cNvPr id="4" name="Text 2"/>
+          <p:cNvSpPr/>
+          <p:nvPr/>
+        </p:nvSpPr>
+        <p:spPr>
+          <a:xfrm>
+            <a:off x="365760" y="1005840"/>
+            <a:ext cx="8412480" cy="548640"/>
+          </a:xfrm>
+          <a:prstGeom prst="rect">
+            <a:avLst/>
+          </a:prstGeom>
+          <a:noFill/>
+          <a:ln/>
+        </p:spPr>
+        <p:txBody>
+          <a:bodyPr wrap="square" lIns="0" tIns="0" rIns="0" bIns="0" rtlCol="0" anchor="ctr"/>
+          <a:lstStyle/>
+          <a:p>
+            <a:pPr indent="0" marL="0">
+              <a:buNone/>
+            </a:pPr>
+            <a:r>
+              <a:rPr lang="en-US" sz="2600" b="1" dirty="0">
                 <a:solidFill>
                   <a:srgbClr val="0E1C42"/>
                 </a:solidFill>
@@ -5676,191 +6047,48 @@
                 <a:ea typeface="Calibri" pitchFamily="34" charset="-122"/>
                 <a:cs typeface="Calibri" pitchFamily="34" charset="-120"/>
               </a:rPr>
-              <a:t>Share Time</a:t>
-            </a:r>
-            <a:endParaRPr lang="en-US" sz="3400" dirty="0"/>
-          </a:p>
-        </p:txBody>
-      </p:sp>
-      <p:sp>
-        <p:nvSpPr>
-          <p:cNvPr id="4" name="Text 2"/>
-          <p:cNvSpPr/>
-          <p:nvPr/>
-        </p:nvSpPr>
-        <p:spPr>
-          <a:xfrm>
-            <a:off x="914400" y="1737360"/>
-            <a:ext cx="7315200" cy="457200"/>
-          </a:xfrm>
-          <a:prstGeom prst="rect">
-            <a:avLst/>
-          </a:prstGeom>
-          <a:noFill/>
-          <a:ln/>
-        </p:spPr>
-        <p:txBody>
-          <a:bodyPr wrap="square" lIns="0" tIns="0" rIns="0" bIns="0" rtlCol="0" anchor="ctr"/>
-          <a:lstStyle/>
-          <a:p>
-            <a:pPr algn="ctr" indent="0" marL="0">
+              <a:t>3 minutes — let's hear your writing!</a:t>
+            </a:r>
+            <a:endParaRPr lang="en-US" sz="2600" dirty="0"/>
+          </a:p>
+        </p:txBody>
+      </p:sp>
+      <p:sp>
+        <p:nvSpPr>
+          <p:cNvPr id="5" name="Text 3"/>
+          <p:cNvSpPr/>
+          <p:nvPr/>
+        </p:nvSpPr>
+        <p:spPr>
+          <a:xfrm>
+            <a:off x="365760" y="1691640"/>
+            <a:ext cx="8412480" cy="457200"/>
+          </a:xfrm>
+          <a:prstGeom prst="rect">
+            <a:avLst/>
+          </a:prstGeom>
+          <a:noFill/>
+          <a:ln/>
+        </p:spPr>
+        <p:txBody>
+          <a:bodyPr wrap="square" lIns="0" tIns="0" rIns="0" bIns="0" rtlCol="0" anchor="ctr"/>
+          <a:lstStyle/>
+          <a:p>
+            <a:pPr indent="0" marL="0">
               <a:buNone/>
             </a:pPr>
             <a:r>
               <a:rPr lang="en-US" sz="1700" dirty="0">
                 <a:solidFill>
-                  <a:srgbClr val="55C8E8"/>
-                </a:solidFill>
-                <a:latin typeface="Calibri" pitchFamily="34" charset="0"/>
-                <a:ea typeface="Calibri" pitchFamily="34" charset="-122"/>
-                <a:cs typeface="Calibri" pitchFamily="34" charset="-120"/>
-              </a:rPr>
-              <a:t>3 minutes — let's hear your writing!</a:t>
+                  <a:srgbClr val="1E293B"/>
+                </a:solidFill>
+                <a:latin typeface="Calibri" pitchFamily="34" charset="0"/>
+                <a:ea typeface="Calibri" pitchFamily="34" charset="-122"/>
+                <a:cs typeface="Calibri" pitchFamily="34" charset="-120"/>
+              </a:rPr>
+              <a:t>Raise your hand  ·  paste it in the chat  ·  or hold your paper up to the camera</a:t>
             </a:r>
             <a:endParaRPr lang="en-US" sz="1700" dirty="0"/>
-          </a:p>
-        </p:txBody>
-      </p:sp>
-      <p:sp>
-        <p:nvSpPr>
-          <p:cNvPr id="5" name="Shape 3"/>
-          <p:cNvSpPr/>
-          <p:nvPr/>
-        </p:nvSpPr>
-        <p:spPr>
-          <a:xfrm>
-            <a:off x="1828800" y="2468880"/>
-            <a:ext cx="5486400" cy="1645920"/>
-          </a:xfrm>
-          <a:prstGeom prst="roundRect">
-            <a:avLst>
-              <a:gd name="adj" fmla="val 6667"/>
-            </a:avLst>
-          </a:prstGeom>
-          <a:solidFill>
-            <a:srgbClr val="FFFFFF"/>
-          </a:solidFill>
-          <a:ln/>
-          <a:effectLst>
-            <a:outerShdw sx="100000" sy="100000" kx="0" ky="0" algn="bl" rotWithShape="0" blurRad="101600" dist="38100" dir="2700000">
-              <a:srgbClr val="000000">
-                <a:alpha val="12000"/>
-              </a:srgbClr>
-            </a:outerShdw>
-          </a:effectLst>
-        </p:spPr>
-      </p:sp>
-      <p:sp>
-        <p:nvSpPr>
-          <p:cNvPr id="6" name="Text 4"/>
-          <p:cNvSpPr/>
-          <p:nvPr/>
-        </p:nvSpPr>
-        <p:spPr>
-          <a:xfrm>
-            <a:off x="2103120" y="2560320"/>
-            <a:ext cx="4937760" cy="1463040"/>
-          </a:xfrm>
-          <a:prstGeom prst="rect">
-            <a:avLst/>
-          </a:prstGeom>
-          <a:noFill/>
-          <a:ln/>
-        </p:spPr>
-        <p:txBody>
-          <a:bodyPr wrap="square" lIns="0" tIns="0" rIns="0" bIns="0" rtlCol="0" anchor="t"/>
-          <a:lstStyle/>
-          <a:p>
-            <a:pPr indent="0" marL="0">
-              <a:spcAft>
-                <a:spcPts val="200"/>
-              </a:spcAft>
-              <a:buNone/>
-            </a:pPr>
-            <a:r>
-              <a:rPr lang="en-US" sz="1400" b="1" dirty="0">
-                <a:solidFill>
-                  <a:srgbClr val="0E1C42"/>
-                </a:solidFill>
-                <a:latin typeface="Calibri" pitchFamily="34" charset="0"/>
-                <a:ea typeface="Calibri" pitchFamily="34" charset="-122"/>
-                <a:cs typeface="Calibri" pitchFamily="34" charset="-120"/>
-              </a:rPr>
-              <a:t>How to share:
-</a:t>
-            </a:r>
-            <a:pPr indent="0" marL="0">
-              <a:spcAft>
-                <a:spcPts val="200"/>
-              </a:spcAft>
-              <a:buNone/>
-            </a:pPr>
-            <a:r>
-              <a:rPr lang="en-US" sz="1300" dirty="0">
-                <a:solidFill>
-                  <a:srgbClr val="1E293B"/>
-                </a:solidFill>
-                <a:latin typeface="Calibri" pitchFamily="34" charset="0"/>
-                <a:ea typeface="Calibri" pitchFamily="34" charset="-122"/>
-                <a:cs typeface="Calibri" pitchFamily="34" charset="-120"/>
-              </a:rPr>
-              <a:t>✋ Raise your hand if you want to read yours aloud
-</a:t>
-            </a:r>
-            <a:pPr indent="0" marL="0">
-              <a:spcAft>
-                <a:spcPts val="200"/>
-              </a:spcAft>
-              <a:buNone/>
-            </a:pPr>
-            <a:r>
-              <a:rPr lang="en-US" sz="1300" dirty="0">
-                <a:solidFill>
-                  <a:srgbClr val="1E293B"/>
-                </a:solidFill>
-                <a:latin typeface="Calibri" pitchFamily="34" charset="0"/>
-                <a:ea typeface="Calibri" pitchFamily="34" charset="-122"/>
-                <a:cs typeface="Calibri" pitchFamily="34" charset="-120"/>
-              </a:rPr>
-              <a:t>💬 Or paste your writing in the chat
-</a:t>
-            </a:r>
-            <a:pPr indent="0" marL="0">
-              <a:spcAft>
-                <a:spcPts val="200"/>
-              </a:spcAft>
-              <a:buNone/>
-            </a:pPr>
-            <a:r>
-              <a:rPr lang="en-US" sz="1300" dirty="0">
-                <a:solidFill>
-                  <a:srgbClr val="1E293B"/>
-                </a:solidFill>
-                <a:latin typeface="Calibri" pitchFamily="34" charset="0"/>
-                <a:ea typeface="Calibri" pitchFamily="34" charset="-122"/>
-                <a:cs typeface="Calibri" pitchFamily="34" charset="-120"/>
-              </a:rPr>
-              <a:t>👂 Listen respectfully when others share
-</a:t>
-            </a:r>
-            <a:pPr indent="0" marL="0">
-              <a:spcAft>
-                <a:spcPts val="200"/>
-              </a:spcAft>
-              <a:buNone/>
-            </a:pPr>
-            <a:r>
-              <a:rPr lang="en-US" sz="1200" i="1" dirty="0">
-                <a:solidFill>
-                  <a:srgbClr val="64748B"/>
-                </a:solidFill>
-                <a:latin typeface="Calibri" pitchFamily="34" charset="0"/>
-                <a:ea typeface="Calibri" pitchFamily="34" charset="-122"/>
-                <a:cs typeface="Calibri" pitchFamily="34" charset="-120"/>
-              </a:rPr>
-              <a:t>Every writer's ideas matter — there are no wrong answers.</a:t>
-            </a:r>
-            <a:endParaRPr lang="en-US" sz="1400" dirty="0"/>
           </a:p>
         </p:txBody>
       </p:sp>
@@ -5878,7 +6106,7 @@
     <p:bg>
       <p:bgPr>
         <a:solidFill>
-          <a:srgbClr val="E5F7FC"/>
+          <a:srgbClr val="F8FAFC"/>
         </a:solidFill>
       </p:bgPr>
     </p:bg>
@@ -5898,30 +6126,128 @@
       </p:grpSpPr>
       <p:sp>
         <p:nvSpPr>
-          <p:cNvPr id="2" name="Text 0"/>
-          <p:cNvSpPr/>
-          <p:nvPr/>
-        </p:nvSpPr>
-        <p:spPr>
-          <a:xfrm>
-            <a:off x="365760" y="164592"/>
-            <a:ext cx="5943600" cy="566928"/>
-          </a:xfrm>
-          <a:prstGeom prst="rect">
-            <a:avLst/>
-          </a:prstGeom>
-          <a:noFill/>
-          <a:ln/>
-        </p:spPr>
-        <p:txBody>
-          <a:bodyPr wrap="square" lIns="0" tIns="0" rIns="0" bIns="0" rtlCol="0" anchor="ctr"/>
-          <a:lstStyle/>
-          <a:p>
-            <a:pPr algn="l" indent="0" marL="0">
-              <a:buNone/>
-            </a:pPr>
-            <a:r>
-              <a:rPr lang="en-US" sz="2800" b="1" dirty="0">
+          <p:cNvPr id="2" name="Shape 0"/>
+          <p:cNvSpPr/>
+          <p:nvPr/>
+        </p:nvSpPr>
+        <p:spPr>
+          <a:xfrm>
+            <a:off x="0" y="0"/>
+            <a:ext cx="9144000" cy="566928"/>
+          </a:xfrm>
+          <a:prstGeom prst="rect">
+            <a:avLst/>
+          </a:prstGeom>
+          <a:solidFill>
+            <a:srgbClr val="55C8E8"/>
+          </a:solidFill>
+          <a:ln/>
+        </p:spPr>
+      </p:sp>
+      <p:sp>
+        <p:nvSpPr>
+          <p:cNvPr id="3" name="Text 1"/>
+          <p:cNvSpPr/>
+          <p:nvPr/>
+        </p:nvSpPr>
+        <p:spPr>
+          <a:xfrm>
+            <a:off x="365760" y="54864"/>
+            <a:ext cx="8412480" cy="457200"/>
+          </a:xfrm>
+          <a:prstGeom prst="rect">
+            <a:avLst/>
+          </a:prstGeom>
+          <a:noFill/>
+          <a:ln/>
+        </p:spPr>
+        <p:txBody>
+          <a:bodyPr wrap="square" lIns="0" tIns="0" rIns="0" bIns="0" rtlCol="0" anchor="ctr"/>
+          <a:lstStyle/>
+          <a:p>
+            <a:pPr indent="0" marL="0">
+              <a:buNone/>
+            </a:pPr>
+            <a:r>
+              <a:rPr lang="en-US" sz="2200" b="1" dirty="0">
+                <a:solidFill>
+                  <a:srgbClr val="FFFFFF"/>
+                </a:solidFill>
+                <a:latin typeface="Calibri" pitchFamily="34" charset="0"/>
+                <a:ea typeface="Calibri" pitchFamily="34" charset="-122"/>
+                <a:cs typeface="Calibri" pitchFamily="34" charset="-120"/>
+              </a:rPr>
+              <a:t>📖  Today</a:t>
+            </a:r>
+            <a:endParaRPr lang="en-US" sz="2200" dirty="0"/>
+          </a:p>
+        </p:txBody>
+      </p:sp>
+      <p:sp>
+        <p:nvSpPr>
+          <p:cNvPr id="4" name="Text 2"/>
+          <p:cNvSpPr/>
+          <p:nvPr/>
+        </p:nvSpPr>
+        <p:spPr>
+          <a:xfrm>
+            <a:off x="365760" y="777240"/>
+            <a:ext cx="8229600" cy="237744"/>
+          </a:xfrm>
+          <a:prstGeom prst="rect">
+            <a:avLst/>
+          </a:prstGeom>
+          <a:noFill/>
+          <a:ln/>
+        </p:spPr>
+        <p:txBody>
+          <a:bodyPr wrap="square" lIns="0" tIns="0" rIns="0" bIns="0" rtlCol="0" anchor="ctr"/>
+          <a:lstStyle/>
+          <a:p>
+            <a:pPr indent="0" marL="0">
+              <a:buNone/>
+            </a:pPr>
+            <a:r>
+              <a:rPr lang="en-US" sz="1100" b="1" spc="100" kern="0" dirty="0">
+                <a:solidFill>
+                  <a:srgbClr val="8B6FC0"/>
+                </a:solidFill>
+                <a:latin typeface="Calibri" pitchFamily="34" charset="0"/>
+                <a:ea typeface="Calibri" pitchFamily="34" charset="-122"/>
+                <a:cs typeface="Calibri" pitchFamily="34" charset="-120"/>
+              </a:rPr>
+              <a:t>READING</a:t>
+            </a:r>
+            <a:endParaRPr lang="en-US" sz="1100" dirty="0"/>
+          </a:p>
+        </p:txBody>
+      </p:sp>
+      <p:sp>
+        <p:nvSpPr>
+          <p:cNvPr id="5" name="Text 3"/>
+          <p:cNvSpPr/>
+          <p:nvPr/>
+        </p:nvSpPr>
+        <p:spPr>
+          <a:xfrm>
+            <a:off x="365760" y="1014984"/>
+            <a:ext cx="8412480" cy="365760"/>
+          </a:xfrm>
+          <a:prstGeom prst="rect">
+            <a:avLst/>
+          </a:prstGeom>
+          <a:noFill/>
+          <a:ln/>
+        </p:spPr>
+        <p:txBody>
+          <a:bodyPr wrap="square" lIns="0" tIns="0" rIns="0" bIns="0" rtlCol="0" anchor="ctr"/>
+          <a:lstStyle/>
+          <a:p>
+            <a:pPr indent="0" marL="0">
+              <a:buNone/>
+            </a:pPr>
+            <a:r>
+              <a:rPr lang="en-US" sz="2000" b="1" dirty="0">
                 <a:solidFill>
                   <a:srgbClr val="0E1C42"/>
                 </a:solidFill>
@@ -5929,155 +6255,71 @@
                 <a:ea typeface="Calibri" pitchFamily="34" charset="-122"/>
                 <a:cs typeface="Calibri" pitchFamily="34" charset="-120"/>
               </a:rPr>
-              <a:t>💡 Today's Focus</a:t>
-            </a:r>
-            <a:endParaRPr lang="en-US" sz="2800" dirty="0"/>
-          </a:p>
-        </p:txBody>
-      </p:sp>
-      <p:sp>
-        <p:nvSpPr>
-          <p:cNvPr id="3" name="Shape 1"/>
-          <p:cNvSpPr/>
-          <p:nvPr/>
-        </p:nvSpPr>
-        <p:spPr>
-          <a:xfrm>
-            <a:off x="365760" y="749808"/>
-            <a:ext cx="8412480" cy="0"/>
-          </a:xfrm>
-          <a:prstGeom prst="line">
-            <a:avLst/>
-          </a:prstGeom>
-          <a:noFill/>
-          <a:ln w="19050">
-            <a:solidFill>
-              <a:srgbClr val="F5D76E"/>
-            </a:solidFill>
-            <a:prstDash val="solid"/>
-          </a:ln>
-        </p:spPr>
-      </p:sp>
-      <p:sp>
-        <p:nvSpPr>
-          <p:cNvPr id="4" name="Shape 2"/>
-          <p:cNvSpPr/>
-          <p:nvPr/>
-        </p:nvSpPr>
-        <p:spPr>
-          <a:xfrm>
-            <a:off x="6492240" y="173736"/>
-            <a:ext cx="2286000" cy="502920"/>
+              <a:t>Chapter 3</a:t>
+            </a:r>
+            <a:endParaRPr lang="en-US" sz="2000" dirty="0"/>
+          </a:p>
+        </p:txBody>
+      </p:sp>
+      <p:sp>
+        <p:nvSpPr>
+          <p:cNvPr id="6" name="Text 4"/>
+          <p:cNvSpPr/>
+          <p:nvPr/>
+        </p:nvSpPr>
+        <p:spPr>
+          <a:xfrm>
+            <a:off x="365760" y="1508760"/>
+            <a:ext cx="8229600" cy="237744"/>
+          </a:xfrm>
+          <a:prstGeom prst="rect">
+            <a:avLst/>
+          </a:prstGeom>
+          <a:noFill/>
+          <a:ln/>
+        </p:spPr>
+        <p:txBody>
+          <a:bodyPr wrap="square" lIns="0" tIns="0" rIns="0" bIns="0" rtlCol="0" anchor="ctr"/>
+          <a:lstStyle/>
+          <a:p>
+            <a:pPr indent="0" marL="0">
+              <a:buNone/>
+            </a:pPr>
+            <a:r>
+              <a:rPr lang="en-US" sz="1100" b="1" spc="100" kern="0" dirty="0">
+                <a:solidFill>
+                  <a:srgbClr val="C7922C"/>
+                </a:solidFill>
+                <a:latin typeface="Calibri" pitchFamily="34" charset="0"/>
+                <a:ea typeface="Calibri" pitchFamily="34" charset="-122"/>
+                <a:cs typeface="Calibri" pitchFamily="34" charset="-120"/>
+              </a:rPr>
+              <a:t>BIG QUESTION</a:t>
+            </a:r>
+            <a:endParaRPr lang="en-US" sz="1100" dirty="0"/>
+          </a:p>
+        </p:txBody>
+      </p:sp>
+      <p:sp>
+        <p:nvSpPr>
+          <p:cNvPr id="7" name="Shape 5"/>
+          <p:cNvSpPr/>
+          <p:nvPr/>
+        </p:nvSpPr>
+        <p:spPr>
+          <a:xfrm>
+            <a:off x="365760" y="1746504"/>
+            <a:ext cx="8412480" cy="731520"/>
           </a:xfrm>
           <a:prstGeom prst="roundRect">
             <a:avLst>
-              <a:gd name="adj" fmla="val 21818"/>
-            </a:avLst>
-          </a:prstGeom>
-          <a:solidFill>
-            <a:srgbClr val="F5D76E"/>
-          </a:solidFill>
-          <a:ln/>
-        </p:spPr>
-      </p:sp>
-      <p:sp>
-        <p:nvSpPr>
-          <p:cNvPr id="5" name="Text 3"/>
-          <p:cNvSpPr/>
-          <p:nvPr/>
-        </p:nvSpPr>
-        <p:spPr>
-          <a:xfrm>
-            <a:off x="6492240" y="173736"/>
-            <a:ext cx="2286000" cy="502920"/>
-          </a:xfrm>
-          <a:prstGeom prst="rect">
-            <a:avLst/>
-          </a:prstGeom>
-          <a:noFill/>
-          <a:ln/>
-        </p:spPr>
-        <p:txBody>
-          <a:bodyPr wrap="square" lIns="0" tIns="0" rIns="0" bIns="0" rtlCol="0" anchor="ctr"/>
-          <a:lstStyle/>
-          <a:p>
-            <a:pPr algn="ctr" indent="0" marL="0">
-              <a:buNone/>
-            </a:pPr>
-            <a:r>
-              <a:rPr lang="en-US" sz="1100" b="1" dirty="0">
-                <a:solidFill>
-                  <a:srgbClr val="0E1C42"/>
-                </a:solidFill>
-                <a:latin typeface="Calibri" pitchFamily="34" charset="0"/>
-                <a:ea typeface="Calibri" pitchFamily="34" charset="-122"/>
-                <a:cs typeface="Calibri" pitchFamily="34" charset="-120"/>
-              </a:rPr>
-              <a:t>CHAT PROMPT</a:t>
-            </a:r>
-            <a:endParaRPr lang="en-US" sz="1100" dirty="0"/>
-          </a:p>
-        </p:txBody>
-      </p:sp>
-      <p:sp>
-        <p:nvSpPr>
-          <p:cNvPr id="6" name="Text 4"/>
-          <p:cNvSpPr/>
-          <p:nvPr/>
-        </p:nvSpPr>
-        <p:spPr>
-          <a:xfrm>
-            <a:off x="457200" y="914400"/>
-            <a:ext cx="8046720" cy="292608"/>
-          </a:xfrm>
-          <a:prstGeom prst="rect">
-            <a:avLst/>
-          </a:prstGeom>
-          <a:noFill/>
-          <a:ln/>
-        </p:spPr>
-        <p:txBody>
-          <a:bodyPr wrap="square" lIns="0" tIns="0" rIns="0" bIns="0" rtlCol="0" anchor="ctr"/>
-          <a:lstStyle/>
-          <a:p>
-            <a:pPr indent="0" marL="0">
-              <a:buNone/>
-            </a:pPr>
-            <a:r>
-              <a:rPr lang="en-US" sz="1100" b="1" spc="200" kern="0" dirty="0">
-                <a:solidFill>
-                  <a:srgbClr val="C7922C"/>
-                </a:solidFill>
-                <a:latin typeface="Calibri" pitchFamily="34" charset="0"/>
-                <a:ea typeface="Calibri" pitchFamily="34" charset="-122"/>
-                <a:cs typeface="Calibri" pitchFamily="34" charset="-120"/>
-              </a:rPr>
-              <a:t>BIG QUESTION</a:t>
-            </a:r>
-            <a:endParaRPr lang="en-US" sz="1100" dirty="0"/>
-          </a:p>
-        </p:txBody>
-      </p:sp>
-      <p:sp>
-        <p:nvSpPr>
-          <p:cNvPr id="7" name="Shape 5"/>
-          <p:cNvSpPr/>
-          <p:nvPr/>
-        </p:nvSpPr>
-        <p:spPr>
-          <a:xfrm>
-            <a:off x="457200" y="1234440"/>
-            <a:ext cx="8229600" cy="640080"/>
-          </a:xfrm>
-          <a:prstGeom prst="roundRect">
-            <a:avLst>
-              <a:gd name="adj" fmla="val 14286"/>
+              <a:gd name="adj" fmla="val 12500"/>
             </a:avLst>
           </a:prstGeom>
           <a:solidFill>
             <a:srgbClr val="FEF6E8"/>
           </a:solidFill>
-          <a:ln w="12700">
+          <a:ln w="19050">
             <a:solidFill>
               <a:srgbClr val="C7922C"/>
             </a:solidFill>
@@ -6100,24 +6342,24 @@
         </p:nvSpPr>
         <p:spPr>
           <a:xfrm>
-            <a:off x="640080" y="1344168"/>
-            <a:ext cx="7863840" cy="411480"/>
-          </a:xfrm>
-          <a:prstGeom prst="rect">
-            <a:avLst/>
-          </a:prstGeom>
-          <a:noFill/>
-          <a:ln/>
-        </p:spPr>
-        <p:txBody>
-          <a:bodyPr wrap="square" lIns="0" tIns="0" rIns="0" bIns="0" rtlCol="0" anchor="ctr"/>
-          <a:lstStyle/>
-          <a:p>
-            <a:pPr indent="0" marL="0">
-              <a:buNone/>
-            </a:pPr>
-            <a:r>
-              <a:rPr lang="en-US" sz="1800" i="1" dirty="0">
+            <a:off x="594360" y="1874520"/>
+            <a:ext cx="7955280" cy="475488"/>
+          </a:xfrm>
+          <a:prstGeom prst="rect">
+            <a:avLst/>
+          </a:prstGeom>
+          <a:noFill/>
+          <a:ln/>
+        </p:spPr>
+        <p:txBody>
+          <a:bodyPr wrap="square" lIns="0" tIns="0" rIns="0" bIns="0" rtlCol="0" anchor="ctr"/>
+          <a:lstStyle/>
+          <a:p>
+            <a:pPr indent="0" marL="0">
+              <a:buNone/>
+            </a:pPr>
+            <a:r>
+              <a:rPr lang="en-US" sz="1700" dirty="0">
                 <a:solidFill>
                   <a:srgbClr val="1E293B"/>
                 </a:solidFill>
@@ -6127,7 +6369,7 @@
               </a:rPr>
               <a:t>Arthur leaves the spool in a tree and Stanley gets tangled. How do you think Stanley feels about Arthur right now?</a:t>
             </a:r>
-            <a:endParaRPr lang="en-US" sz="1800" dirty="0"/>
+            <a:endParaRPr lang="en-US" sz="1700" dirty="0"/>
           </a:p>
         </p:txBody>
       </p:sp>
@@ -6139,26 +6381,26 @@
         </p:nvSpPr>
         <p:spPr>
           <a:xfrm>
-            <a:off x="457200" y="1965960"/>
-            <a:ext cx="8046720" cy="292608"/>
-          </a:xfrm>
-          <a:prstGeom prst="rect">
-            <a:avLst/>
-          </a:prstGeom>
-          <a:noFill/>
-          <a:ln/>
-        </p:spPr>
-        <p:txBody>
-          <a:bodyPr wrap="square" lIns="0" tIns="0" rIns="0" bIns="0" rtlCol="0" anchor="ctr"/>
-          <a:lstStyle/>
-          <a:p>
-            <a:pPr indent="0" marL="0">
-              <a:buNone/>
-            </a:pPr>
-            <a:r>
-              <a:rPr lang="en-US" sz="1100" b="1" spc="200" kern="0" dirty="0">
-                <a:solidFill>
-                  <a:srgbClr val="8B6FC0"/>
+            <a:off x="365760" y="2606040"/>
+            <a:ext cx="8229600" cy="237744"/>
+          </a:xfrm>
+          <a:prstGeom prst="rect">
+            <a:avLst/>
+          </a:prstGeom>
+          <a:noFill/>
+          <a:ln/>
+        </p:spPr>
+        <p:txBody>
+          <a:bodyPr wrap="square" lIns="0" tIns="0" rIns="0" bIns="0" rtlCol="0" anchor="ctr"/>
+          <a:lstStyle/>
+          <a:p>
+            <a:pPr indent="0" marL="0">
+              <a:buNone/>
+            </a:pPr>
+            <a:r>
+              <a:rPr lang="en-US" sz="1100" b="1" spc="100" kern="0" dirty="0">
+                <a:solidFill>
+                  <a:srgbClr val="55C8E8"/>
                 </a:solidFill>
                 <a:latin typeface="Calibri" pitchFamily="34" charset="0"/>
                 <a:ea typeface="Calibri" pitchFamily="34" charset="-122"/>
@@ -6178,8 +6420,8 @@
         </p:nvSpPr>
         <p:spPr>
           <a:xfrm>
-            <a:off x="640080" y="2286000"/>
-            <a:ext cx="7863840" cy="731520"/>
+            <a:off x="365760" y="2843784"/>
+            <a:ext cx="8412480" cy="914400"/>
           </a:xfrm>
           <a:prstGeom prst="rect">
             <a:avLst/>
@@ -6203,7 +6445,7 @@
                 <a:ea typeface="Calibri" pitchFamily="34" charset="-122"/>
                 <a:cs typeface="Calibri" pitchFamily="34" charset="-120"/>
               </a:rPr>
-              <a:t>Good readers preview a book before reading. They look at the cover, chapter titles, and pictures to make predictions.</a:t>
+              <a:t>Good readers pay attention to how events affect characters . When something happens in a story, it changes how a character feels, thinks, or acts.</a:t>
             </a:r>
             <a:endParaRPr lang="en-US" sz="1500" dirty="0"/>
           </a:p>
@@ -6220,6 +6462,749 @@
 <file path=ppt/slides/slide7.xml><?xml version="1.0" encoding="utf-8"?>
 <p:sld xmlns:a="http://schemas.openxmlformats.org/drawingml/2006/main" xmlns:r="http://schemas.openxmlformats.org/officeDocument/2006/relationships" xmlns:p="http://schemas.openxmlformats.org/presentationml/2006/main">
   <p:cSld name="Slide 7">
+    <p:bg>
+      <p:bgPr>
+        <a:solidFill>
+          <a:srgbClr val="F8FAFC"/>
+        </a:solidFill>
+      </p:bgPr>
+    </p:bg>
+    <p:spTree>
+      <p:nvGrpSpPr>
+        <p:cNvPr id="1" name=""/>
+        <p:cNvGrpSpPr/>
+        <p:nvPr/>
+      </p:nvGrpSpPr>
+      <p:grpSpPr>
+        <a:xfrm>
+          <a:off x="0" y="0"/>
+          <a:ext cx="0" cy="0"/>
+          <a:chOff x="0" y="0"/>
+          <a:chExt cx="0" cy="0"/>
+        </a:xfrm>
+      </p:grpSpPr>
+      <p:sp>
+        <p:nvSpPr>
+          <p:cNvPr id="2" name="Shape 0"/>
+          <p:cNvSpPr/>
+          <p:nvPr/>
+        </p:nvSpPr>
+        <p:spPr>
+          <a:xfrm>
+            <a:off x="0" y="0"/>
+            <a:ext cx="9144000" cy="566928"/>
+          </a:xfrm>
+          <a:prstGeom prst="rect">
+            <a:avLst/>
+          </a:prstGeom>
+          <a:solidFill>
+            <a:srgbClr val="55C8E8"/>
+          </a:solidFill>
+          <a:ln/>
+        </p:spPr>
+      </p:sp>
+      <p:sp>
+        <p:nvSpPr>
+          <p:cNvPr id="3" name="Text 1"/>
+          <p:cNvSpPr/>
+          <p:nvPr/>
+        </p:nvSpPr>
+        <p:spPr>
+          <a:xfrm>
+            <a:off x="365760" y="54864"/>
+            <a:ext cx="8412480" cy="457200"/>
+          </a:xfrm>
+          <a:prstGeom prst="rect">
+            <a:avLst/>
+          </a:prstGeom>
+          <a:noFill/>
+          <a:ln/>
+        </p:spPr>
+        <p:txBody>
+          <a:bodyPr wrap="square" lIns="0" tIns="0" rIns="0" bIns="0" rtlCol="0" anchor="ctr"/>
+          <a:lstStyle/>
+          <a:p>
+            <a:pPr indent="0" marL="0">
+              <a:buNone/>
+            </a:pPr>
+            <a:r>
+              <a:rPr lang="en-US" sz="2200" b="1" dirty="0">
+                <a:solidFill>
+                  <a:srgbClr val="FFFFFF"/>
+                </a:solidFill>
+                <a:latin typeface="Calibri" pitchFamily="34" charset="0"/>
+                <a:ea typeface="Calibri" pitchFamily="34" charset="-122"/>
+                <a:cs typeface="Calibri" pitchFamily="34" charset="-120"/>
+              </a:rPr>
+              <a:t>✏️  Daily Oral Language</a:t>
+            </a:r>
+            <a:endParaRPr lang="en-US" sz="2200" dirty="0"/>
+          </a:p>
+        </p:txBody>
+      </p:sp>
+      <p:sp>
+        <p:nvSpPr>
+          <p:cNvPr id="4" name="Text 2"/>
+          <p:cNvSpPr/>
+          <p:nvPr/>
+        </p:nvSpPr>
+        <p:spPr>
+          <a:xfrm>
+            <a:off x="365760" y="749808"/>
+            <a:ext cx="8229600" cy="237744"/>
+          </a:xfrm>
+          <a:prstGeom prst="rect">
+            <a:avLst/>
+          </a:prstGeom>
+          <a:noFill/>
+          <a:ln/>
+        </p:spPr>
+        <p:txBody>
+          <a:bodyPr wrap="square" lIns="0" tIns="0" rIns="0" bIns="0" rtlCol="0" anchor="ctr"/>
+          <a:lstStyle/>
+          <a:p>
+            <a:pPr indent="0" marL="0">
+              <a:buNone/>
+            </a:pPr>
+            <a:r>
+              <a:rPr lang="en-US" sz="1100" b="1" spc="100" kern="0" dirty="0">
+                <a:solidFill>
+                  <a:srgbClr val="55C8E8"/>
+                </a:solidFill>
+                <a:latin typeface="Calibri" pitchFamily="34" charset="0"/>
+                <a:ea typeface="Calibri" pitchFamily="34" charset="-122"/>
+                <a:cs typeface="Calibri" pitchFamily="34" charset="-120"/>
+              </a:rPr>
+              <a:t>FIX THESE SENTENCES</a:t>
+            </a:r>
+            <a:endParaRPr lang="en-US" sz="1100" dirty="0"/>
+          </a:p>
+        </p:txBody>
+      </p:sp>
+      <p:sp>
+        <p:nvSpPr>
+          <p:cNvPr id="5" name="Shape 3"/>
+          <p:cNvSpPr/>
+          <p:nvPr/>
+        </p:nvSpPr>
+        <p:spPr>
+          <a:xfrm>
+            <a:off x="365760" y="1024128"/>
+            <a:ext cx="8412480" cy="777240"/>
+          </a:xfrm>
+          <a:prstGeom prst="roundRect">
+            <a:avLst>
+              <a:gd name="adj" fmla="val 11765"/>
+            </a:avLst>
+          </a:prstGeom>
+          <a:solidFill>
+            <a:srgbClr val="FFFFFF"/>
+          </a:solidFill>
+          <a:ln w="19050">
+            <a:solidFill>
+              <a:srgbClr val="55C8E8"/>
+            </a:solidFill>
+            <a:prstDash val="solid"/>
+          </a:ln>
+          <a:effectLst>
+            <a:outerShdw sx="100000" sy="100000" kx="0" ky="0" algn="bl" rotWithShape="0" blurRad="101600" dist="38100" dir="2700000">
+              <a:srgbClr val="000000">
+                <a:alpha val="12000"/>
+              </a:srgbClr>
+            </a:outerShdw>
+          </a:effectLst>
+        </p:spPr>
+      </p:sp>
+      <p:sp>
+        <p:nvSpPr>
+          <p:cNvPr id="6" name="Text 4"/>
+          <p:cNvSpPr/>
+          <p:nvPr/>
+        </p:nvSpPr>
+        <p:spPr>
+          <a:xfrm>
+            <a:off x="594360" y="1152144"/>
+            <a:ext cx="7955280" cy="521208"/>
+          </a:xfrm>
+          <a:prstGeom prst="rect">
+            <a:avLst/>
+          </a:prstGeom>
+          <a:noFill/>
+          <a:ln/>
+        </p:spPr>
+        <p:txBody>
+          <a:bodyPr wrap="square" lIns="0" tIns="0" rIns="0" bIns="0" rtlCol="0" anchor="ctr"/>
+          <a:lstStyle/>
+          <a:p>
+            <a:pPr indent="0" marL="0">
+              <a:buNone/>
+            </a:pPr>
+            <a:r>
+              <a:rPr lang="en-US" sz="1700" dirty="0">
+                <a:solidFill>
+                  <a:srgbClr val="1E293B"/>
+                </a:solidFill>
+                <a:latin typeface="Calibri" pitchFamily="34" charset="0"/>
+                <a:ea typeface="Calibri" pitchFamily="34" charset="-122"/>
+                <a:cs typeface="Calibri" pitchFamily="34" charset="-120"/>
+              </a:rPr>
+              <a:t>“You can fly me, Arthur,” Stanley said. “Come on — let’s go to the park.”</a:t>
+            </a:r>
+            <a:endParaRPr lang="en-US" sz="1700" dirty="0"/>
+          </a:p>
+        </p:txBody>
+      </p:sp>
+      <p:sp>
+        <p:nvSpPr>
+          <p:cNvPr id="7" name="Shape 5"/>
+          <p:cNvSpPr/>
+          <p:nvPr/>
+        </p:nvSpPr>
+        <p:spPr>
+          <a:xfrm>
+            <a:off x="365760" y="1874520"/>
+            <a:ext cx="8412480" cy="777240"/>
+          </a:xfrm>
+          <a:prstGeom prst="roundRect">
+            <a:avLst>
+              <a:gd name="adj" fmla="val 11765"/>
+            </a:avLst>
+          </a:prstGeom>
+          <a:solidFill>
+            <a:srgbClr val="FFFFFF"/>
+          </a:solidFill>
+          <a:ln w="19050">
+            <a:solidFill>
+              <a:srgbClr val="55C8E8"/>
+            </a:solidFill>
+            <a:prstDash val="solid"/>
+          </a:ln>
+          <a:effectLst>
+            <a:outerShdw sx="100000" sy="100000" kx="0" ky="0" algn="bl" rotWithShape="0" blurRad="101600" dist="38100" dir="2700000">
+              <a:srgbClr val="000000">
+                <a:alpha val="12000"/>
+              </a:srgbClr>
+            </a:outerShdw>
+          </a:effectLst>
+        </p:spPr>
+      </p:sp>
+      <p:sp>
+        <p:nvSpPr>
+          <p:cNvPr id="8" name="Text 6"/>
+          <p:cNvSpPr/>
+          <p:nvPr/>
+        </p:nvSpPr>
+        <p:spPr>
+          <a:xfrm>
+            <a:off x="594360" y="2002536"/>
+            <a:ext cx="7955280" cy="521208"/>
+          </a:xfrm>
+          <a:prstGeom prst="rect">
+            <a:avLst/>
+          </a:prstGeom>
+          <a:noFill/>
+          <a:ln/>
+        </p:spPr>
+        <p:txBody>
+          <a:bodyPr wrap="square" lIns="0" tIns="0" rIns="0" bIns="0" rtlCol="0" anchor="ctr"/>
+          <a:lstStyle/>
+          <a:p>
+            <a:pPr indent="0" marL="0">
+              <a:buNone/>
+            </a:pPr>
+            <a:r>
+              <a:rPr lang="en-US" sz="1700" dirty="0">
+                <a:solidFill>
+                  <a:srgbClr val="1E293B"/>
+                </a:solidFill>
+                <a:latin typeface="Calibri" pitchFamily="34" charset="0"/>
+                <a:ea typeface="Calibri" pitchFamily="34" charset="-122"/>
+                <a:cs typeface="Calibri" pitchFamily="34" charset="-120"/>
+              </a:rPr>
+              <a:t>stanley would not speak to his brother that evening and at bedtime he was still very cross</a:t>
+            </a:r>
+            <a:endParaRPr lang="en-US" sz="1700" dirty="0"/>
+          </a:p>
+        </p:txBody>
+      </p:sp>
+      <p:sp>
+        <p:nvSpPr>
+          <p:cNvPr id="9" name="Text 7"/>
+          <p:cNvSpPr/>
+          <p:nvPr/>
+        </p:nvSpPr>
+        <p:spPr>
+          <a:xfrm>
+            <a:off x="365760" y="2788920"/>
+            <a:ext cx="8412480" cy="365760"/>
+          </a:xfrm>
+          <a:prstGeom prst="rect">
+            <a:avLst/>
+          </a:prstGeom>
+          <a:noFill/>
+          <a:ln/>
+        </p:spPr>
+        <p:txBody>
+          <a:bodyPr wrap="square" lIns="0" tIns="0" rIns="0" bIns="0" rtlCol="0" anchor="ctr"/>
+          <a:lstStyle/>
+          <a:p>
+            <a:pPr indent="0" marL="0">
+              <a:buNone/>
+            </a:pPr>
+            <a:r>
+              <a:rPr lang="en-US" sz="1600" b="1" dirty="0">
+                <a:solidFill>
+                  <a:srgbClr val="0E1C42"/>
+                </a:solidFill>
+                <a:latin typeface="Calibri" pitchFamily="34" charset="0"/>
+                <a:ea typeface="Calibri" pitchFamily="34" charset="-122"/>
+                <a:cs typeface="Calibri" pitchFamily="34" charset="-120"/>
+              </a:rPr>
+              <a:t>Rewrite both sentences correctly in your notebook.</a:t>
+            </a:r>
+            <a:endParaRPr lang="en-US" sz="1600" dirty="0"/>
+          </a:p>
+        </p:txBody>
+      </p:sp>
+    </p:spTree>
+  </p:cSld>
+  <p:clrMapOvr>
+    <a:masterClrMapping/>
+  </p:clrMapOvr>
+</p:sld>
+</file>
+
+<file path=ppt/slides/slide8.xml><?xml version="1.0" encoding="utf-8"?>
+<p:sld xmlns:a="http://schemas.openxmlformats.org/drawingml/2006/main" xmlns:r="http://schemas.openxmlformats.org/officeDocument/2006/relationships" xmlns:p="http://schemas.openxmlformats.org/presentationml/2006/main">
+  <p:cSld name="Slide 8">
+    <p:bg>
+      <p:bgPr>
+        <a:solidFill>
+          <a:srgbClr val="F8FAFC"/>
+        </a:solidFill>
+      </p:bgPr>
+    </p:bg>
+    <p:spTree>
+      <p:nvGrpSpPr>
+        <p:cNvPr id="1" name=""/>
+        <p:cNvGrpSpPr/>
+        <p:nvPr/>
+      </p:nvGrpSpPr>
+      <p:grpSpPr>
+        <a:xfrm>
+          <a:off x="0" y="0"/>
+          <a:ext cx="0" cy="0"/>
+          <a:chOff x="0" y="0"/>
+          <a:chExt cx="0" cy="0"/>
+        </a:xfrm>
+      </p:grpSpPr>
+      <p:sp>
+        <p:nvSpPr>
+          <p:cNvPr id="2" name="Shape 0"/>
+          <p:cNvSpPr/>
+          <p:nvPr/>
+        </p:nvSpPr>
+        <p:spPr>
+          <a:xfrm>
+            <a:off x="0" y="0"/>
+            <a:ext cx="9144000" cy="566928"/>
+          </a:xfrm>
+          <a:prstGeom prst="rect">
+            <a:avLst/>
+          </a:prstGeom>
+          <a:solidFill>
+            <a:srgbClr val="55C8E8"/>
+          </a:solidFill>
+          <a:ln/>
+        </p:spPr>
+      </p:sp>
+      <p:sp>
+        <p:nvSpPr>
+          <p:cNvPr id="3" name="Text 1"/>
+          <p:cNvSpPr/>
+          <p:nvPr/>
+        </p:nvSpPr>
+        <p:spPr>
+          <a:xfrm>
+            <a:off x="365760" y="54864"/>
+            <a:ext cx="8412480" cy="457200"/>
+          </a:xfrm>
+          <a:prstGeom prst="rect">
+            <a:avLst/>
+          </a:prstGeom>
+          <a:noFill/>
+          <a:ln/>
+        </p:spPr>
+        <p:txBody>
+          <a:bodyPr wrap="square" lIns="0" tIns="0" rIns="0" bIns="0" rtlCol="0" anchor="ctr"/>
+          <a:lstStyle/>
+          <a:p>
+            <a:pPr indent="0" marL="0">
+              <a:buNone/>
+            </a:pPr>
+            <a:r>
+              <a:rPr lang="en-US" sz="2200" b="1" dirty="0">
+                <a:solidFill>
+                  <a:srgbClr val="FFFFFF"/>
+                </a:solidFill>
+                <a:latin typeface="Calibri" pitchFamily="34" charset="0"/>
+                <a:ea typeface="Calibri" pitchFamily="34" charset="-122"/>
+                <a:cs typeface="Calibri" pitchFamily="34" charset="-120"/>
+              </a:rPr>
+              <a:t>✏️  Daily Oral Language</a:t>
+            </a:r>
+            <a:endParaRPr lang="en-US" sz="2200" dirty="0"/>
+          </a:p>
+        </p:txBody>
+      </p:sp>
+      <p:sp>
+        <p:nvSpPr>
+          <p:cNvPr id="4" name="Text 2"/>
+          <p:cNvSpPr/>
+          <p:nvPr/>
+        </p:nvSpPr>
+        <p:spPr>
+          <a:xfrm>
+            <a:off x="365760" y="749808"/>
+            <a:ext cx="8229600" cy="237744"/>
+          </a:xfrm>
+          <a:prstGeom prst="rect">
+            <a:avLst/>
+          </a:prstGeom>
+          <a:noFill/>
+          <a:ln/>
+        </p:spPr>
+        <p:txBody>
+          <a:bodyPr wrap="square" lIns="0" tIns="0" rIns="0" bIns="0" rtlCol="0" anchor="ctr"/>
+          <a:lstStyle/>
+          <a:p>
+            <a:pPr indent="0" marL="0">
+              <a:buNone/>
+            </a:pPr>
+            <a:r>
+              <a:rPr lang="en-US" sz="1100" b="1" spc="100" kern="0" dirty="0">
+                <a:solidFill>
+                  <a:srgbClr val="55C8E8"/>
+                </a:solidFill>
+                <a:latin typeface="Calibri" pitchFamily="34" charset="0"/>
+                <a:ea typeface="Calibri" pitchFamily="34" charset="-122"/>
+                <a:cs typeface="Calibri" pitchFamily="34" charset="-120"/>
+              </a:rPr>
+              <a:t>FIX THESE SENTENCES</a:t>
+            </a:r>
+            <a:endParaRPr lang="en-US" sz="1100" dirty="0"/>
+          </a:p>
+        </p:txBody>
+      </p:sp>
+      <p:sp>
+        <p:nvSpPr>
+          <p:cNvPr id="5" name="Shape 3"/>
+          <p:cNvSpPr/>
+          <p:nvPr/>
+        </p:nvSpPr>
+        <p:spPr>
+          <a:xfrm>
+            <a:off x="365760" y="1024128"/>
+            <a:ext cx="8412480" cy="777240"/>
+          </a:xfrm>
+          <a:prstGeom prst="roundRect">
+            <a:avLst>
+              <a:gd name="adj" fmla="val 11765"/>
+            </a:avLst>
+          </a:prstGeom>
+          <a:solidFill>
+            <a:srgbClr val="FFFFFF"/>
+          </a:solidFill>
+          <a:ln w="19050">
+            <a:solidFill>
+              <a:srgbClr val="55C8E8"/>
+            </a:solidFill>
+            <a:prstDash val="solid"/>
+          </a:ln>
+          <a:effectLst>
+            <a:outerShdw sx="100000" sy="100000" kx="0" ky="0" algn="bl" rotWithShape="0" blurRad="101600" dist="38100" dir="2700000">
+              <a:srgbClr val="000000">
+                <a:alpha val="12000"/>
+              </a:srgbClr>
+            </a:outerShdw>
+          </a:effectLst>
+        </p:spPr>
+      </p:sp>
+      <p:sp>
+        <p:nvSpPr>
+          <p:cNvPr id="6" name="Text 4"/>
+          <p:cNvSpPr/>
+          <p:nvPr/>
+        </p:nvSpPr>
+        <p:spPr>
+          <a:xfrm>
+            <a:off x="594360" y="1152144"/>
+            <a:ext cx="7955280" cy="521208"/>
+          </a:xfrm>
+          <a:prstGeom prst="rect">
+            <a:avLst/>
+          </a:prstGeom>
+          <a:noFill/>
+          <a:ln/>
+        </p:spPr>
+        <p:txBody>
+          <a:bodyPr wrap="square" lIns="0" tIns="0" rIns="0" bIns="0" rtlCol="0" anchor="ctr"/>
+          <a:lstStyle/>
+          <a:p>
+            <a:pPr indent="0" marL="0">
+              <a:buNone/>
+            </a:pPr>
+            <a:r>
+              <a:rPr lang="en-US" sz="1700" dirty="0">
+                <a:solidFill>
+                  <a:srgbClr val="1E293B"/>
+                </a:solidFill>
+                <a:latin typeface="Calibri" pitchFamily="34" charset="0"/>
+                <a:ea typeface="Calibri" pitchFamily="34" charset="-122"/>
+                <a:cs typeface="Calibri" pitchFamily="34" charset="-120"/>
+              </a:rPr>
+              <a:t>“You can fly me, Arthur,” Stanley said. “Come on — let’s go to the park.”</a:t>
+            </a:r>
+            <a:endParaRPr lang="en-US" sz="1700" dirty="0"/>
+          </a:p>
+        </p:txBody>
+      </p:sp>
+      <p:sp>
+        <p:nvSpPr>
+          <p:cNvPr id="7" name="Shape 5"/>
+          <p:cNvSpPr/>
+          <p:nvPr/>
+        </p:nvSpPr>
+        <p:spPr>
+          <a:xfrm>
+            <a:off x="365760" y="1874520"/>
+            <a:ext cx="8412480" cy="777240"/>
+          </a:xfrm>
+          <a:prstGeom prst="roundRect">
+            <a:avLst>
+              <a:gd name="adj" fmla="val 11765"/>
+            </a:avLst>
+          </a:prstGeom>
+          <a:solidFill>
+            <a:srgbClr val="FFFFFF"/>
+          </a:solidFill>
+          <a:ln w="19050">
+            <a:solidFill>
+              <a:srgbClr val="55C8E8"/>
+            </a:solidFill>
+            <a:prstDash val="solid"/>
+          </a:ln>
+          <a:effectLst>
+            <a:outerShdw sx="100000" sy="100000" kx="0" ky="0" algn="bl" rotWithShape="0" blurRad="101600" dist="38100" dir="2700000">
+              <a:srgbClr val="000000">
+                <a:alpha val="12000"/>
+              </a:srgbClr>
+            </a:outerShdw>
+          </a:effectLst>
+        </p:spPr>
+      </p:sp>
+      <p:sp>
+        <p:nvSpPr>
+          <p:cNvPr id="8" name="Text 6"/>
+          <p:cNvSpPr/>
+          <p:nvPr/>
+        </p:nvSpPr>
+        <p:spPr>
+          <a:xfrm>
+            <a:off x="594360" y="2002536"/>
+            <a:ext cx="7955280" cy="521208"/>
+          </a:xfrm>
+          <a:prstGeom prst="rect">
+            <a:avLst/>
+          </a:prstGeom>
+          <a:noFill/>
+          <a:ln/>
+        </p:spPr>
+        <p:txBody>
+          <a:bodyPr wrap="square" lIns="0" tIns="0" rIns="0" bIns="0" rtlCol="0" anchor="ctr"/>
+          <a:lstStyle/>
+          <a:p>
+            <a:pPr indent="0" marL="0">
+              <a:buNone/>
+            </a:pPr>
+            <a:r>
+              <a:rPr lang="en-US" sz="1700" dirty="0">
+                <a:solidFill>
+                  <a:srgbClr val="1E293B"/>
+                </a:solidFill>
+                <a:latin typeface="Calibri" pitchFamily="34" charset="0"/>
+                <a:ea typeface="Calibri" pitchFamily="34" charset="-122"/>
+                <a:cs typeface="Calibri" pitchFamily="34" charset="-120"/>
+              </a:rPr>
+              <a:t>stanley would not speak to his brother that evening and at bedtime he was still very cross</a:t>
+            </a:r>
+            <a:endParaRPr lang="en-US" sz="1700" dirty="0"/>
+          </a:p>
+        </p:txBody>
+      </p:sp>
+      <p:sp>
+        <p:nvSpPr>
+          <p:cNvPr id="9" name="Shape 7"/>
+          <p:cNvSpPr/>
+          <p:nvPr/>
+        </p:nvSpPr>
+        <p:spPr>
+          <a:xfrm>
+            <a:off x="365760" y="2743200"/>
+            <a:ext cx="8412480" cy="1417320"/>
+          </a:xfrm>
+          <a:prstGeom prst="roundRect">
+            <a:avLst>
+              <a:gd name="adj" fmla="val 6452"/>
+            </a:avLst>
+          </a:prstGeom>
+          <a:solidFill>
+            <a:srgbClr val="E8F8EF"/>
+          </a:solidFill>
+          <a:ln/>
+          <a:effectLst>
+            <a:outerShdw sx="100000" sy="100000" kx="0" ky="0" algn="bl" rotWithShape="0" blurRad="101600" dist="38100" dir="2700000">
+              <a:srgbClr val="000000">
+                <a:alpha val="12000"/>
+              </a:srgbClr>
+            </a:outerShdw>
+          </a:effectLst>
+        </p:spPr>
+      </p:sp>
+      <p:sp>
+        <p:nvSpPr>
+          <p:cNvPr id="10" name="Text 8"/>
+          <p:cNvSpPr/>
+          <p:nvPr/>
+        </p:nvSpPr>
+        <p:spPr>
+          <a:xfrm>
+            <a:off x="566928" y="2816352"/>
+            <a:ext cx="8229600" cy="237744"/>
+          </a:xfrm>
+          <a:prstGeom prst="rect">
+            <a:avLst/>
+          </a:prstGeom>
+          <a:noFill/>
+          <a:ln/>
+        </p:spPr>
+        <p:txBody>
+          <a:bodyPr wrap="square" lIns="0" tIns="0" rIns="0" bIns="0" rtlCol="0" anchor="ctr"/>
+          <a:lstStyle/>
+          <a:p>
+            <a:pPr indent="0" marL="0">
+              <a:buNone/>
+            </a:pPr>
+            <a:r>
+              <a:rPr lang="en-US" sz="1100" b="1" spc="100" kern="0" dirty="0">
+                <a:solidFill>
+                  <a:srgbClr val="34B76F"/>
+                </a:solidFill>
+                <a:latin typeface="Calibri" pitchFamily="34" charset="0"/>
+                <a:ea typeface="Calibri" pitchFamily="34" charset="-122"/>
+                <a:cs typeface="Calibri" pitchFamily="34" charset="-120"/>
+              </a:rPr>
+              <a:t>✅  CORRECTED</a:t>
+            </a:r>
+            <a:endParaRPr lang="en-US" sz="1100" dirty="0"/>
+          </a:p>
+        </p:txBody>
+      </p:sp>
+      <p:sp>
+        <p:nvSpPr>
+          <p:cNvPr id="11" name="Text 9"/>
+          <p:cNvSpPr/>
+          <p:nvPr/>
+        </p:nvSpPr>
+        <p:spPr>
+          <a:xfrm>
+            <a:off x="566928" y="3072384"/>
+            <a:ext cx="8010144" cy="685800"/>
+          </a:xfrm>
+          <a:prstGeom prst="rect">
+            <a:avLst/>
+          </a:prstGeom>
+          <a:noFill/>
+          <a:ln/>
+        </p:spPr>
+        <p:txBody>
+          <a:bodyPr wrap="square" lIns="0" tIns="0" rIns="0" bIns="0" rtlCol="0" anchor="ctr"/>
+          <a:lstStyle/>
+          <a:p>
+            <a:pPr indent="0" marL="0">
+              <a:buNone/>
+            </a:pPr>
+            <a:r>
+              <a:rPr lang="en-US" sz="1400" i="1" dirty="0">
+                <a:solidFill>
+                  <a:srgbClr val="1E293B"/>
+                </a:solidFill>
+                <a:latin typeface="Calibri" pitchFamily="34" charset="0"/>
+                <a:ea typeface="Calibri" pitchFamily="34" charset="-122"/>
+                <a:cs typeface="Calibri" pitchFamily="34" charset="-120"/>
+              </a:rPr>
+              <a:t>Corrected:</a:t>
+            </a:r>
+            <a:endParaRPr lang="en-US" sz="1400" dirty="0"/>
+          </a:p>
+          <a:p>
+            <a:pPr indent="0" marL="0">
+              <a:buNone/>
+            </a:pPr>
+            <a:endParaRPr lang="en-US" sz="1400" dirty="0"/>
+          </a:p>
+        </p:txBody>
+      </p:sp>
+      <p:sp>
+        <p:nvSpPr>
+          <p:cNvPr id="12" name="Text 10"/>
+          <p:cNvSpPr/>
+          <p:nvPr/>
+        </p:nvSpPr>
+        <p:spPr>
+          <a:xfrm>
+            <a:off x="566928" y="3767328"/>
+            <a:ext cx="8010144" cy="320040"/>
+          </a:xfrm>
+          <a:prstGeom prst="rect">
+            <a:avLst/>
+          </a:prstGeom>
+          <a:noFill/>
+          <a:ln/>
+        </p:spPr>
+        <p:txBody>
+          <a:bodyPr wrap="square" lIns="0" tIns="0" rIns="0" bIns="0" rtlCol="0" anchor="ctr"/>
+          <a:lstStyle/>
+          <a:p>
+            <a:pPr indent="0" marL="0">
+              <a:buNone/>
+            </a:pPr>
+            <a:r>
+              <a:rPr lang="en-US" sz="1200" dirty="0">
+                <a:solidFill>
+                  <a:srgbClr val="64748B"/>
+                </a:solidFill>
+                <a:latin typeface="Calibri" pitchFamily="34" charset="0"/>
+                <a:ea typeface="Calibri" pitchFamily="34" charset="-122"/>
+                <a:cs typeface="Calibri" pitchFamily="34" charset="-120"/>
+              </a:rPr>
+              <a:t>Stanley would not speak to his brother that evening , and at bedtime he was still very cross .</a:t>
+            </a:r>
+            <a:endParaRPr lang="en-US" sz="1200" dirty="0"/>
+          </a:p>
+        </p:txBody>
+      </p:sp>
+    </p:spTree>
+  </p:cSld>
+  <p:clrMapOvr>
+    <a:masterClrMapping/>
+  </p:clrMapOvr>
+</p:sld>
+</file>
+
+<file path=ppt/slides/slide9.xml><?xml version="1.0" encoding="utf-8"?>
+<p:sld xmlns:a="http://schemas.openxmlformats.org/drawingml/2006/main" xmlns:r="http://schemas.openxmlformats.org/officeDocument/2006/relationships" xmlns:p="http://schemas.openxmlformats.org/presentationml/2006/main">
+  <p:cSld name="Slide 9">
     <p:bg>
       <p:bgPr>
         <a:solidFill>
@@ -6243,91 +7228,122 @@
       </p:grpSpPr>
       <p:sp>
         <p:nvSpPr>
-          <p:cNvPr id="2" name="Text 0"/>
-          <p:cNvSpPr/>
-          <p:nvPr/>
-        </p:nvSpPr>
-        <p:spPr>
-          <a:xfrm>
-            <a:off x="365760" y="164592"/>
-            <a:ext cx="8412480" cy="566928"/>
-          </a:xfrm>
-          <a:prstGeom prst="rect">
-            <a:avLst/>
-          </a:prstGeom>
-          <a:noFill/>
-          <a:ln/>
-        </p:spPr>
-        <p:txBody>
-          <a:bodyPr wrap="square" lIns="0" tIns="0" rIns="0" bIns="0" rtlCol="0" anchor="ctr"/>
-          <a:lstStyle/>
-          <a:p>
-            <a:pPr algn="l" indent="0" marL="0">
-              <a:buNone/>
-            </a:pPr>
-            <a:r>
-              <a:rPr lang="en-US" sz="2800" b="1" dirty="0">
-                <a:solidFill>
-                  <a:srgbClr val="0E1C42"/>
-                </a:solidFill>
-                <a:latin typeface="Calibri" pitchFamily="34" charset="0"/>
-                <a:ea typeface="Calibri" pitchFamily="34" charset="-122"/>
-                <a:cs typeface="Calibri" pitchFamily="34" charset="-120"/>
-              </a:rPr>
-              <a:t>✅ Model Sentence — Study What's Right</a:t>
-            </a:r>
-            <a:endParaRPr lang="en-US" sz="2800" dirty="0"/>
-          </a:p>
-        </p:txBody>
-      </p:sp>
-      <p:sp>
-        <p:nvSpPr>
-          <p:cNvPr id="3" name="Shape 1"/>
-          <p:cNvSpPr/>
-          <p:nvPr/>
-        </p:nvSpPr>
-        <p:spPr>
-          <a:xfrm>
-            <a:off x="365760" y="749808"/>
-            <a:ext cx="8412480" cy="0"/>
-          </a:xfrm>
-          <a:prstGeom prst="line">
-            <a:avLst/>
-          </a:prstGeom>
-          <a:noFill/>
-          <a:ln w="19050">
-            <a:solidFill>
-              <a:srgbClr val="34B76F"/>
-            </a:solidFill>
-            <a:prstDash val="solid"/>
-          </a:ln>
-        </p:spPr>
-      </p:sp>
-      <p:sp>
-        <p:nvSpPr>
-          <p:cNvPr id="4" name="Shape 2"/>
-          <p:cNvSpPr/>
-          <p:nvPr/>
-        </p:nvSpPr>
-        <p:spPr>
-          <a:xfrm>
-            <a:off x="457200" y="1097280"/>
-            <a:ext cx="8229600" cy="914400"/>
+          <p:cNvPr id="2" name="Shape 0"/>
+          <p:cNvSpPr/>
+          <p:nvPr/>
+        </p:nvSpPr>
+        <p:spPr>
+          <a:xfrm>
+            <a:off x="0" y="0"/>
+            <a:ext cx="9144000" cy="566928"/>
+          </a:xfrm>
+          <a:prstGeom prst="rect">
+            <a:avLst/>
+          </a:prstGeom>
+          <a:solidFill>
+            <a:srgbClr val="55C8E8"/>
+          </a:solidFill>
+          <a:ln/>
+        </p:spPr>
+      </p:sp>
+      <p:sp>
+        <p:nvSpPr>
+          <p:cNvPr id="3" name="Text 1"/>
+          <p:cNvSpPr/>
+          <p:nvPr/>
+        </p:nvSpPr>
+        <p:spPr>
+          <a:xfrm>
+            <a:off x="365760" y="54864"/>
+            <a:ext cx="8412480" cy="457200"/>
+          </a:xfrm>
+          <a:prstGeom prst="rect">
+            <a:avLst/>
+          </a:prstGeom>
+          <a:noFill/>
+          <a:ln/>
+        </p:spPr>
+        <p:txBody>
+          <a:bodyPr wrap="square" lIns="0" tIns="0" rIns="0" bIns="0" rtlCol="0" anchor="ctr"/>
+          <a:lstStyle/>
+          <a:p>
+            <a:pPr indent="0" marL="0">
+              <a:buNone/>
+            </a:pPr>
+            <a:r>
+              <a:rPr lang="en-US" sz="2200" b="1" dirty="0">
+                <a:solidFill>
+                  <a:srgbClr val="FFFFFF"/>
+                </a:solidFill>
+                <a:latin typeface="Calibri" pitchFamily="34" charset="0"/>
+                <a:ea typeface="Calibri" pitchFamily="34" charset="-122"/>
+                <a:cs typeface="Calibri" pitchFamily="34" charset="-120"/>
+              </a:rPr>
+              <a:t>🌱  Morphology</a:t>
+            </a:r>
+            <a:endParaRPr lang="en-US" sz="2200" dirty="0"/>
+          </a:p>
+        </p:txBody>
+      </p:sp>
+      <p:sp>
+        <p:nvSpPr>
+          <p:cNvPr id="4" name="Text 2"/>
+          <p:cNvSpPr/>
+          <p:nvPr/>
+        </p:nvSpPr>
+        <p:spPr>
+          <a:xfrm>
+            <a:off x="365760" y="804672"/>
+            <a:ext cx="8229600" cy="237744"/>
+          </a:xfrm>
+          <a:prstGeom prst="rect">
+            <a:avLst/>
+          </a:prstGeom>
+          <a:noFill/>
+          <a:ln/>
+        </p:spPr>
+        <p:txBody>
+          <a:bodyPr wrap="square" lIns="0" tIns="0" rIns="0" bIns="0" rtlCol="0" anchor="ctr"/>
+          <a:lstStyle/>
+          <a:p>
+            <a:pPr indent="0" marL="0">
+              <a:buNone/>
+            </a:pPr>
+            <a:r>
+              <a:rPr lang="en-US" sz="1100" b="1" spc="100" kern="0" dirty="0">
+                <a:solidFill>
+                  <a:srgbClr val="8B6FC0"/>
+                </a:solidFill>
+                <a:latin typeface="Calibri" pitchFamily="34" charset="0"/>
+                <a:ea typeface="Calibri" pitchFamily="34" charset="-122"/>
+                <a:cs typeface="Calibri" pitchFamily="34" charset="-120"/>
+              </a:rPr>
+              <a:t>PREFIX UN- MEANS NOT</a:t>
+            </a:r>
+            <a:endParaRPr lang="en-US" sz="1100" dirty="0"/>
+          </a:p>
+        </p:txBody>
+      </p:sp>
+      <p:sp>
+        <p:nvSpPr>
+          <p:cNvPr id="5" name="Shape 3"/>
+          <p:cNvSpPr/>
+          <p:nvPr/>
+        </p:nvSpPr>
+        <p:spPr>
+          <a:xfrm>
+            <a:off x="365760" y="1097280"/>
+            <a:ext cx="8412480" cy="621792"/>
           </a:xfrm>
           <a:prstGeom prst="roundRect">
             <a:avLst>
-              <a:gd name="adj" fmla="val 10000"/>
+              <a:gd name="adj" fmla="val 14706"/>
             </a:avLst>
           </a:prstGeom>
           <a:solidFill>
-            <a:srgbClr val="E8F8EF"/>
+            <a:srgbClr val="F0E8FF"/>
           </a:solidFill>
-          <a:ln w="12700">
-            <a:solidFill>
-              <a:srgbClr val="34B76F"/>
-            </a:solidFill>
-            <a:prstDash val="solid"/>
-          </a:ln>
+          <a:ln/>
           <a:effectLst>
             <a:outerShdw sx="100000" sy="100000" kx="0" ky="0" algn="bl" rotWithShape="0" blurRad="101600" dist="38100" dir="2700000">
               <a:srgbClr val="000000">
@@ -6339,30 +7355,30 @@
       </p:sp>
       <p:sp>
         <p:nvSpPr>
-          <p:cNvPr id="5" name="Text 3"/>
-          <p:cNvSpPr/>
-          <p:nvPr/>
-        </p:nvSpPr>
-        <p:spPr>
-          <a:xfrm>
-            <a:off x="640080" y="1207008"/>
-            <a:ext cx="7863840" cy="685800"/>
-          </a:xfrm>
-          <a:prstGeom prst="rect">
-            <a:avLst/>
-          </a:prstGeom>
-          <a:noFill/>
-          <a:ln/>
-        </p:spPr>
-        <p:txBody>
-          <a:bodyPr wrap="square" lIns="0" tIns="0" rIns="0" bIns="0" rtlCol="0" anchor="ctr"/>
-          <a:lstStyle/>
-          <a:p>
-            <a:pPr indent="0" marL="0">
-              <a:buNone/>
-            </a:pPr>
-            <a:r>
-              <a:rPr lang="en-US" sz="1800" i="1" dirty="0">
+          <p:cNvPr id="6" name="Text 4"/>
+          <p:cNvSpPr/>
+          <p:nvPr/>
+        </p:nvSpPr>
+        <p:spPr>
+          <a:xfrm>
+            <a:off x="594360" y="1216152"/>
+            <a:ext cx="7863840" cy="384048"/>
+          </a:xfrm>
+          <a:prstGeom prst="rect">
+            <a:avLst/>
+          </a:prstGeom>
+          <a:noFill/>
+          <a:ln/>
+        </p:spPr>
+        <p:txBody>
+          <a:bodyPr wrap="square" lIns="0" tIns="0" rIns="0" bIns="0" rtlCol="0" anchor="ctr"/>
+          <a:lstStyle/>
+          <a:p>
+            <a:pPr indent="0" marL="0">
+              <a:buNone/>
+            </a:pPr>
+            <a:r>
+              <a:rPr lang="en-US" sz="1500" dirty="0">
                 <a:solidFill>
                   <a:srgbClr val="1E293B"/>
                 </a:solidFill>
@@ -6370,192 +7386,32 @@
                 <a:ea typeface="Calibri" pitchFamily="34" charset="-122"/>
                 <a:cs typeface="Calibri" pitchFamily="34" charset="-120"/>
               </a:rPr>
-              <a:t>“You can fly me, Arthur,” Stanley said. “Come on — let’s go to the park.”</a:t>
-            </a:r>
-            <a:endParaRPr lang="en-US" sz="1800" dirty="0"/>
-          </a:p>
-        </p:txBody>
-      </p:sp>
-    </p:spTree>
-  </p:cSld>
-  <p:clrMapOvr>
-    <a:masterClrMapping/>
-  </p:clrMapOvr>
-</p:sld>
-</file>
-
-<file path=ppt/slides/slide8.xml><?xml version="1.0" encoding="utf-8"?>
-<p:sld xmlns:a="http://schemas.openxmlformats.org/drawingml/2006/main" xmlns:r="http://schemas.openxmlformats.org/officeDocument/2006/relationships" xmlns:p="http://schemas.openxmlformats.org/presentationml/2006/main">
-  <p:cSld name="Slide 8">
-    <p:bg>
-      <p:bgPr>
-        <a:solidFill>
-          <a:srgbClr val="E5F7FC"/>
-        </a:solidFill>
-      </p:bgPr>
-    </p:bg>
-    <p:spTree>
-      <p:nvGrpSpPr>
-        <p:cNvPr id="1" name=""/>
-        <p:cNvGrpSpPr/>
-        <p:nvPr/>
-      </p:nvGrpSpPr>
-      <p:grpSpPr>
-        <a:xfrm>
-          <a:off x="0" y="0"/>
-          <a:ext cx="0" cy="0"/>
-          <a:chOff x="0" y="0"/>
-          <a:chExt cx="0" cy="0"/>
-        </a:xfrm>
-      </p:grpSpPr>
-      <p:sp>
-        <p:nvSpPr>
-          <p:cNvPr id="2" name="Text 0"/>
-          <p:cNvSpPr/>
-          <p:nvPr/>
-        </p:nvSpPr>
-        <p:spPr>
-          <a:xfrm>
-            <a:off x="365760" y="164592"/>
-            <a:ext cx="5943600" cy="566928"/>
-          </a:xfrm>
-          <a:prstGeom prst="rect">
-            <a:avLst/>
-          </a:prstGeom>
-          <a:noFill/>
-          <a:ln/>
-        </p:spPr>
-        <p:txBody>
-          <a:bodyPr wrap="square" lIns="0" tIns="0" rIns="0" bIns="0" rtlCol="0" anchor="ctr"/>
-          <a:lstStyle/>
-          <a:p>
-            <a:pPr algn="l" indent="0" marL="0">
-              <a:buNone/>
-            </a:pPr>
-            <a:r>
-              <a:rPr lang="en-US" sz="2800" b="1" dirty="0">
-                <a:solidFill>
-                  <a:srgbClr val="0E1C42"/>
-                </a:solidFill>
-                <a:latin typeface="Calibri" pitchFamily="34" charset="0"/>
-                <a:ea typeface="Calibri" pitchFamily="34" charset="-122"/>
-                <a:cs typeface="Calibri" pitchFamily="34" charset="-120"/>
-              </a:rPr>
-              <a:t>🔧 Fix-It Sentence — Now You Try</a:t>
-            </a:r>
-            <a:endParaRPr lang="en-US" sz="2800" dirty="0"/>
-          </a:p>
-        </p:txBody>
-      </p:sp>
-      <p:sp>
-        <p:nvSpPr>
-          <p:cNvPr id="3" name="Shape 1"/>
-          <p:cNvSpPr/>
-          <p:nvPr/>
-        </p:nvSpPr>
-        <p:spPr>
-          <a:xfrm>
-            <a:off x="365760" y="749808"/>
-            <a:ext cx="8412480" cy="0"/>
-          </a:xfrm>
-          <a:prstGeom prst="line">
-            <a:avLst/>
-          </a:prstGeom>
-          <a:noFill/>
-          <a:ln w="19050">
-            <a:solidFill>
-              <a:srgbClr val="F5D76E"/>
-            </a:solidFill>
-            <a:prstDash val="solid"/>
-          </a:ln>
-        </p:spPr>
-      </p:sp>
-      <p:sp>
-        <p:nvSpPr>
-          <p:cNvPr id="4" name="Shape 2"/>
-          <p:cNvSpPr/>
-          <p:nvPr/>
-        </p:nvSpPr>
-        <p:spPr>
-          <a:xfrm>
-            <a:off x="6492240" y="173736"/>
-            <a:ext cx="2286000" cy="502920"/>
+              <a:t>🌱  un- + lock =unlock</a:t>
+            </a:r>
+            <a:endParaRPr lang="en-US" sz="1500" dirty="0"/>
+          </a:p>
+        </p:txBody>
+      </p:sp>
+      <p:sp>
+        <p:nvSpPr>
+          <p:cNvPr id="7" name="Shape 5"/>
+          <p:cNvSpPr/>
+          <p:nvPr/>
+        </p:nvSpPr>
+        <p:spPr>
+          <a:xfrm>
+            <a:off x="365760" y="1792224"/>
+            <a:ext cx="8412480" cy="621792"/>
           </a:xfrm>
           <a:prstGeom prst="roundRect">
             <a:avLst>
-              <a:gd name="adj" fmla="val 21818"/>
+              <a:gd name="adj" fmla="val 14706"/>
             </a:avLst>
           </a:prstGeom>
           <a:solidFill>
-            <a:srgbClr val="F5D76E"/>
+            <a:srgbClr val="F8F4FF"/>
           </a:solidFill>
           <a:ln/>
-        </p:spPr>
-      </p:sp>
-      <p:sp>
-        <p:nvSpPr>
-          <p:cNvPr id="5" name="Text 3"/>
-          <p:cNvSpPr/>
-          <p:nvPr/>
-        </p:nvSpPr>
-        <p:spPr>
-          <a:xfrm>
-            <a:off x="6492240" y="173736"/>
-            <a:ext cx="2286000" cy="502920"/>
-          </a:xfrm>
-          <a:prstGeom prst="rect">
-            <a:avLst/>
-          </a:prstGeom>
-          <a:noFill/>
-          <a:ln/>
-        </p:spPr>
-        <p:txBody>
-          <a:bodyPr wrap="square" lIns="0" tIns="0" rIns="0" bIns="0" rtlCol="0" anchor="ctr"/>
-          <a:lstStyle/>
-          <a:p>
-            <a:pPr algn="ctr" indent="0" marL="0">
-              <a:buNone/>
-            </a:pPr>
-            <a:r>
-              <a:rPr lang="en-US" sz="1100" b="1" dirty="0">
-                <a:solidFill>
-                  <a:srgbClr val="0E1C42"/>
-                </a:solidFill>
-                <a:latin typeface="Calibri" pitchFamily="34" charset="0"/>
-                <a:ea typeface="Calibri" pitchFamily="34" charset="-122"/>
-                <a:cs typeface="Calibri" pitchFamily="34" charset="-120"/>
-              </a:rPr>
-              <a:t>CHAT PROMPT</a:t>
-            </a:r>
-            <a:endParaRPr lang="en-US" sz="1100" dirty="0"/>
-          </a:p>
-        </p:txBody>
-      </p:sp>
-      <p:sp>
-        <p:nvSpPr>
-          <p:cNvPr id="6" name="Shape 4"/>
-          <p:cNvSpPr/>
-          <p:nvPr/>
-        </p:nvSpPr>
-        <p:spPr>
-          <a:xfrm>
-            <a:off x="457200" y="1005840"/>
-            <a:ext cx="8229600" cy="640080"/>
-          </a:xfrm>
-          <a:prstGeom prst="roundRect">
-            <a:avLst>
-              <a:gd name="adj" fmla="val 14286"/>
-            </a:avLst>
-          </a:prstGeom>
-          <a:solidFill>
-            <a:srgbClr val="F8FAFC"/>
-          </a:solidFill>
-          <a:ln w="12700">
-            <a:solidFill>
-              <a:srgbClr val="C7922C"/>
-            </a:solidFill>
-            <a:prstDash val="solid"/>
-          </a:ln>
           <a:effectLst>
             <a:outerShdw sx="100000" sy="100000" kx="0" ky="0" algn="bl" rotWithShape="0" blurRad="101600" dist="38100" dir="2700000">
               <a:srgbClr val="000000">
@@ -6567,30 +7423,30 @@
       </p:sp>
       <p:sp>
         <p:nvSpPr>
-          <p:cNvPr id="7" name="Text 5"/>
-          <p:cNvSpPr/>
-          <p:nvPr/>
-        </p:nvSpPr>
-        <p:spPr>
-          <a:xfrm>
-            <a:off x="640080" y="1115568"/>
-            <a:ext cx="7863840" cy="411480"/>
-          </a:xfrm>
-          <a:prstGeom prst="rect">
-            <a:avLst/>
-          </a:prstGeom>
-          <a:noFill/>
-          <a:ln/>
-        </p:spPr>
-        <p:txBody>
-          <a:bodyPr wrap="square" lIns="0" tIns="0" rIns="0" bIns="0" rtlCol="0" anchor="ctr"/>
-          <a:lstStyle/>
-          <a:p>
-            <a:pPr indent="0" marL="0">
-              <a:buNone/>
-            </a:pPr>
-            <a:r>
-              <a:rPr lang="en-US" sz="1800" i="1" dirty="0">
+          <p:cNvPr id="8" name="Text 6"/>
+          <p:cNvSpPr/>
+          <p:nvPr/>
+        </p:nvSpPr>
+        <p:spPr>
+          <a:xfrm>
+            <a:off x="594360" y="1911096"/>
+            <a:ext cx="7863840" cy="384048"/>
+          </a:xfrm>
+          <a:prstGeom prst="rect">
+            <a:avLst/>
+          </a:prstGeom>
+          <a:noFill/>
+          <a:ln/>
+        </p:spPr>
+        <p:txBody>
+          <a:bodyPr wrap="square" lIns="0" tIns="0" rIns="0" bIns="0" rtlCol="0" anchor="ctr"/>
+          <a:lstStyle/>
+          <a:p>
+            <a:pPr indent="0" marL="0">
+              <a:buNone/>
+            </a:pPr>
+            <a:r>
+              <a:rPr lang="en-US" sz="1500" dirty="0">
                 <a:solidFill>
                   <a:srgbClr val="1E293B"/>
                 </a:solidFill>
@@ -6598,192 +7454,32 @@
                 <a:ea typeface="Calibri" pitchFamily="34" charset="-122"/>
                 <a:cs typeface="Calibri" pitchFamily="34" charset="-120"/>
               </a:rPr>
-              <a:t>stanley would not speak to his brother that evening and at bedtime he was still very cross</a:t>
-            </a:r>
-            <a:endParaRPr lang="en-US" sz="1800" dirty="0"/>
-          </a:p>
-        </p:txBody>
-      </p:sp>
-    </p:spTree>
-  </p:cSld>
-  <p:clrMapOvr>
-    <a:masterClrMapping/>
-  </p:clrMapOvr>
-</p:sld>
-</file>
-
-<file path=ppt/slides/slide9.xml><?xml version="1.0" encoding="utf-8"?>
-<p:sld xmlns:a="http://schemas.openxmlformats.org/drawingml/2006/main" xmlns:r="http://schemas.openxmlformats.org/officeDocument/2006/relationships" xmlns:p="http://schemas.openxmlformats.org/presentationml/2006/main">
-  <p:cSld name="Slide 9">
-    <p:bg>
-      <p:bgPr>
-        <a:solidFill>
-          <a:srgbClr val="E5F7FC"/>
-        </a:solidFill>
-      </p:bgPr>
-    </p:bg>
-    <p:spTree>
-      <p:nvGrpSpPr>
-        <p:cNvPr id="1" name=""/>
-        <p:cNvGrpSpPr/>
-        <p:nvPr/>
-      </p:nvGrpSpPr>
-      <p:grpSpPr>
-        <a:xfrm>
-          <a:off x="0" y="0"/>
-          <a:ext cx="0" cy="0"/>
-          <a:chOff x="0" y="0"/>
-          <a:chExt cx="0" cy="0"/>
-        </a:xfrm>
-      </p:grpSpPr>
-      <p:sp>
-        <p:nvSpPr>
-          <p:cNvPr id="2" name="Text 0"/>
-          <p:cNvSpPr/>
-          <p:nvPr/>
-        </p:nvSpPr>
-        <p:spPr>
-          <a:xfrm>
-            <a:off x="365760" y="164592"/>
-            <a:ext cx="5943600" cy="566928"/>
-          </a:xfrm>
-          <a:prstGeom prst="rect">
-            <a:avLst/>
-          </a:prstGeom>
-          <a:noFill/>
-          <a:ln/>
-        </p:spPr>
-        <p:txBody>
-          <a:bodyPr wrap="square" lIns="0" tIns="0" rIns="0" bIns="0" rtlCol="0" anchor="ctr"/>
-          <a:lstStyle/>
-          <a:p>
-            <a:pPr algn="l" indent="0" marL="0">
-              <a:buNone/>
-            </a:pPr>
-            <a:r>
-              <a:rPr lang="en-US" sz="2800" b="1" dirty="0">
-                <a:solidFill>
-                  <a:srgbClr val="0E1C42"/>
-                </a:solidFill>
-                <a:latin typeface="Calibri" pitchFamily="34" charset="0"/>
-                <a:ea typeface="Calibri" pitchFamily="34" charset="-122"/>
-                <a:cs typeface="Calibri" pitchFamily="34" charset="-120"/>
-              </a:rPr>
-              <a:t>🔧 Fix-It Sentence — Answer Revealed</a:t>
-            </a:r>
-            <a:endParaRPr lang="en-US" sz="2800" dirty="0"/>
-          </a:p>
-        </p:txBody>
-      </p:sp>
-      <p:sp>
-        <p:nvSpPr>
-          <p:cNvPr id="3" name="Shape 1"/>
-          <p:cNvSpPr/>
-          <p:nvPr/>
-        </p:nvSpPr>
-        <p:spPr>
-          <a:xfrm>
-            <a:off x="365760" y="749808"/>
-            <a:ext cx="8412480" cy="0"/>
-          </a:xfrm>
-          <a:prstGeom prst="line">
-            <a:avLst/>
-          </a:prstGeom>
-          <a:noFill/>
-          <a:ln w="19050">
-            <a:solidFill>
-              <a:srgbClr val="F5D76E"/>
-            </a:solidFill>
-            <a:prstDash val="solid"/>
-          </a:ln>
-        </p:spPr>
-      </p:sp>
-      <p:sp>
-        <p:nvSpPr>
-          <p:cNvPr id="4" name="Shape 2"/>
-          <p:cNvSpPr/>
-          <p:nvPr/>
-        </p:nvSpPr>
-        <p:spPr>
-          <a:xfrm>
-            <a:off x="6492240" y="173736"/>
-            <a:ext cx="2286000" cy="502920"/>
+              <a:t>🌱  un- + tie =untie</a:t>
+            </a:r>
+            <a:endParaRPr lang="en-US" sz="1500" dirty="0"/>
+          </a:p>
+        </p:txBody>
+      </p:sp>
+      <p:sp>
+        <p:nvSpPr>
+          <p:cNvPr id="9" name="Shape 7"/>
+          <p:cNvSpPr/>
+          <p:nvPr/>
+        </p:nvSpPr>
+        <p:spPr>
+          <a:xfrm>
+            <a:off x="365760" y="2487168"/>
+            <a:ext cx="8412480" cy="621792"/>
           </a:xfrm>
           <a:prstGeom prst="roundRect">
             <a:avLst>
-              <a:gd name="adj" fmla="val 21818"/>
+              <a:gd name="adj" fmla="val 14706"/>
             </a:avLst>
           </a:prstGeom>
           <a:solidFill>
-            <a:srgbClr val="F5D76E"/>
+            <a:srgbClr val="F0E8FF"/>
           </a:solidFill>
           <a:ln/>
-        </p:spPr>
-      </p:sp>
-      <p:sp>
-        <p:nvSpPr>
-          <p:cNvPr id="5" name="Text 3"/>
-          <p:cNvSpPr/>
-          <p:nvPr/>
-        </p:nvSpPr>
-        <p:spPr>
-          <a:xfrm>
-            <a:off x="6492240" y="173736"/>
-            <a:ext cx="2286000" cy="502920"/>
-          </a:xfrm>
-          <a:prstGeom prst="rect">
-            <a:avLst/>
-          </a:prstGeom>
-          <a:noFill/>
-          <a:ln/>
-        </p:spPr>
-        <p:txBody>
-          <a:bodyPr wrap="square" lIns="0" tIns="0" rIns="0" bIns="0" rtlCol="0" anchor="ctr"/>
-          <a:lstStyle/>
-          <a:p>
-            <a:pPr algn="ctr" indent="0" marL="0">
-              <a:buNone/>
-            </a:pPr>
-            <a:r>
-              <a:rPr lang="en-US" sz="1100" b="1" dirty="0">
-                <a:solidFill>
-                  <a:srgbClr val="0E1C42"/>
-                </a:solidFill>
-                <a:latin typeface="Calibri" pitchFamily="34" charset="0"/>
-                <a:ea typeface="Calibri" pitchFamily="34" charset="-122"/>
-                <a:cs typeface="Calibri" pitchFamily="34" charset="-120"/>
-              </a:rPr>
-              <a:t>CHAT PROMPT</a:t>
-            </a:r>
-            <a:endParaRPr lang="en-US" sz="1100" dirty="0"/>
-          </a:p>
-        </p:txBody>
-      </p:sp>
-      <p:sp>
-        <p:nvSpPr>
-          <p:cNvPr id="6" name="Shape 4"/>
-          <p:cNvSpPr/>
-          <p:nvPr/>
-        </p:nvSpPr>
-        <p:spPr>
-          <a:xfrm>
-            <a:off x="457200" y="1005840"/>
-            <a:ext cx="8229600" cy="640080"/>
-          </a:xfrm>
-          <a:prstGeom prst="roundRect">
-            <a:avLst>
-              <a:gd name="adj" fmla="val 14286"/>
-            </a:avLst>
-          </a:prstGeom>
-          <a:solidFill>
-            <a:srgbClr val="F8FAFC"/>
-          </a:solidFill>
-          <a:ln w="12700">
-            <a:solidFill>
-              <a:srgbClr val="C7922C"/>
-            </a:solidFill>
-            <a:prstDash val="solid"/>
-          </a:ln>
           <a:effectLst>
             <a:outerShdw sx="100000" sy="100000" kx="0" ky="0" algn="bl" rotWithShape="0" blurRad="101600" dist="38100" dir="2700000">
               <a:srgbClr val="000000">
@@ -6795,30 +7491,30 @@
       </p:sp>
       <p:sp>
         <p:nvSpPr>
-          <p:cNvPr id="7" name="Text 5"/>
-          <p:cNvSpPr/>
-          <p:nvPr/>
-        </p:nvSpPr>
-        <p:spPr>
-          <a:xfrm>
-            <a:off x="640080" y="1115568"/>
-            <a:ext cx="7863840" cy="411480"/>
-          </a:xfrm>
-          <a:prstGeom prst="rect">
-            <a:avLst/>
-          </a:prstGeom>
-          <a:noFill/>
-          <a:ln/>
-        </p:spPr>
-        <p:txBody>
-          <a:bodyPr wrap="square" lIns="0" tIns="0" rIns="0" bIns="0" rtlCol="0" anchor="ctr"/>
-          <a:lstStyle/>
-          <a:p>
-            <a:pPr indent="0" marL="0">
-              <a:buNone/>
-            </a:pPr>
-            <a:r>
-              <a:rPr lang="en-US" sz="1800" i="1" dirty="0">
+          <p:cNvPr id="10" name="Text 8"/>
+          <p:cNvSpPr/>
+          <p:nvPr/>
+        </p:nvSpPr>
+        <p:spPr>
+          <a:xfrm>
+            <a:off x="594360" y="2606040"/>
+            <a:ext cx="7863840" cy="384048"/>
+          </a:xfrm>
+          <a:prstGeom prst="rect">
+            <a:avLst/>
+          </a:prstGeom>
+          <a:noFill/>
+          <a:ln/>
+        </p:spPr>
+        <p:txBody>
+          <a:bodyPr wrap="square" lIns="0" tIns="0" rIns="0" bIns="0" rtlCol="0" anchor="ctr"/>
+          <a:lstStyle/>
+          <a:p>
+            <a:pPr indent="0" marL="0">
+              <a:buNone/>
+            </a:pPr>
+            <a:r>
+              <a:rPr lang="en-US" sz="1500" dirty="0">
                 <a:solidFill>
                   <a:srgbClr val="1E293B"/>
                 </a:solidFill>
@@ -6826,87 +7522,77 @@
                 <a:ea typeface="Calibri" pitchFamily="34" charset="-122"/>
                 <a:cs typeface="Calibri" pitchFamily="34" charset="-120"/>
               </a:rPr>
-              <a:t>stanley would not speak to his brother that evening and at bedtime he was still very cross</a:t>
-            </a:r>
-            <a:endParaRPr lang="en-US" sz="1800" dirty="0"/>
-          </a:p>
-        </p:txBody>
-      </p:sp>
-      <p:sp>
-        <p:nvSpPr>
-          <p:cNvPr id="8" name="Text 6"/>
-          <p:cNvSpPr/>
-          <p:nvPr/>
-        </p:nvSpPr>
-        <p:spPr>
-          <a:xfrm>
-            <a:off x="457200" y="1737360"/>
-            <a:ext cx="8046720" cy="292608"/>
-          </a:xfrm>
-          <a:prstGeom prst="rect">
-            <a:avLst/>
-          </a:prstGeom>
-          <a:noFill/>
-          <a:ln/>
-        </p:spPr>
-        <p:txBody>
-          <a:bodyPr wrap="square" lIns="0" tIns="0" rIns="0" bIns="0" rtlCol="0" anchor="ctr"/>
-          <a:lstStyle/>
-          <a:p>
-            <a:pPr indent="0" marL="0">
-              <a:buNone/>
-            </a:pPr>
-            <a:r>
-              <a:rPr lang="en-US" sz="1100" b="1" spc="200" kern="0" dirty="0">
-                <a:solidFill>
-                  <a:srgbClr val="64748B"/>
-                </a:solidFill>
-                <a:latin typeface="Calibri" pitchFamily="34" charset="0"/>
-                <a:ea typeface="Calibri" pitchFamily="34" charset="-122"/>
-                <a:cs typeface="Calibri" pitchFamily="34" charset="-120"/>
-              </a:rPr>
-              <a:t>WHY</a:t>
-            </a:r>
-            <a:endParaRPr lang="en-US" sz="1100" dirty="0"/>
-          </a:p>
-        </p:txBody>
-      </p:sp>
-      <p:sp>
-        <p:nvSpPr>
-          <p:cNvPr id="9" name="Text 7"/>
-          <p:cNvSpPr/>
-          <p:nvPr/>
-        </p:nvSpPr>
-        <p:spPr>
-          <a:xfrm>
-            <a:off x="640080" y="2011680"/>
-            <a:ext cx="7863840" cy="502920"/>
-          </a:xfrm>
-          <a:prstGeom prst="rect">
-            <a:avLst/>
-          </a:prstGeom>
-          <a:noFill/>
-          <a:ln/>
-        </p:spPr>
-        <p:txBody>
-          <a:bodyPr wrap="square" lIns="0" tIns="0" rIns="0" bIns="0" rtlCol="0" anchor="ctr"/>
-          <a:lstStyle/>
-          <a:p>
-            <a:pPr indent="0" marL="0">
-              <a:buNone/>
-            </a:pPr>
-            <a:r>
-              <a:rPr lang="en-US" sz="1300" i="1" dirty="0">
-                <a:solidFill>
-                  <a:srgbClr val="64748B"/>
-                </a:solidFill>
-                <a:latin typeface="Calibri" pitchFamily="34" charset="0"/>
-                <a:ea typeface="Calibri" pitchFamily="34" charset="-122"/>
-                <a:cs typeface="Calibri" pitchFamily="34" charset="-120"/>
-              </a:rPr>
-              <a:t>Stanley would not speak to his brother that evening , and at bedtime he was still very cross .</a:t>
-            </a:r>
-            <a:endParaRPr lang="en-US" sz="1300" dirty="0"/>
+              <a:t>🌱  un- + wrap =unwrap</a:t>
+            </a:r>
+            <a:endParaRPr lang="en-US" sz="1500" dirty="0"/>
+          </a:p>
+        </p:txBody>
+      </p:sp>
+      <p:sp>
+        <p:nvSpPr>
+          <p:cNvPr id="11" name="Shape 9"/>
+          <p:cNvSpPr/>
+          <p:nvPr/>
+        </p:nvSpPr>
+        <p:spPr>
+          <a:xfrm>
+            <a:off x="365760" y="3182112"/>
+            <a:ext cx="8412480" cy="621792"/>
+          </a:xfrm>
+          <a:prstGeom prst="roundRect">
+            <a:avLst>
+              <a:gd name="adj" fmla="val 14706"/>
+            </a:avLst>
+          </a:prstGeom>
+          <a:solidFill>
+            <a:srgbClr val="F8F4FF"/>
+          </a:solidFill>
+          <a:ln/>
+          <a:effectLst>
+            <a:outerShdw sx="100000" sy="100000" kx="0" ky="0" algn="bl" rotWithShape="0" blurRad="101600" dist="38100" dir="2700000">
+              <a:srgbClr val="000000">
+                <a:alpha val="12000"/>
+              </a:srgbClr>
+            </a:outerShdw>
+          </a:effectLst>
+        </p:spPr>
+      </p:sp>
+      <p:sp>
+        <p:nvSpPr>
+          <p:cNvPr id="12" name="Text 10"/>
+          <p:cNvSpPr/>
+          <p:nvPr/>
+        </p:nvSpPr>
+        <p:spPr>
+          <a:xfrm>
+            <a:off x="594360" y="3300984"/>
+            <a:ext cx="7863840" cy="384048"/>
+          </a:xfrm>
+          <a:prstGeom prst="rect">
+            <a:avLst/>
+          </a:prstGeom>
+          <a:noFill/>
+          <a:ln/>
+        </p:spPr>
+        <p:txBody>
+          <a:bodyPr wrap="square" lIns="0" tIns="0" rIns="0" bIns="0" rtlCol="0" anchor="ctr"/>
+          <a:lstStyle/>
+          <a:p>
+            <a:pPr indent="0" marL="0">
+              <a:buNone/>
+            </a:pPr>
+            <a:r>
+              <a:rPr lang="en-US" sz="1500" dirty="0">
+                <a:solidFill>
+                  <a:srgbClr val="1E293B"/>
+                </a:solidFill>
+                <a:latin typeface="Calibri" pitchFamily="34" charset="0"/>
+                <a:ea typeface="Calibri" pitchFamily="34" charset="-122"/>
+                <a:cs typeface="Calibri" pitchFamily="34" charset="-120"/>
+              </a:rPr>
+              <a:t>🌱  un- + do =undo</a:t>
+            </a:r>
+            <a:endParaRPr lang="en-US" sz="1500" dirty="0"/>
           </a:p>
         </p:txBody>
       </p:sp>

--- a/Planning docs/Slides/lesson-3-1-teacher-slides.pptx
+++ b/Planning docs/Slides/lesson-3-1-teacher-slides.pptx
@@ -4874,24 +4874,7 @@
                 <a:ea typeface="Calibri" pitchFamily="34" charset="-122"/>
                 <a:cs typeface="Calibri" pitchFamily="34" charset="-120"/>
               </a:rPr>
-              <a:t>•  Arthur leaves the spool in a tree and Stanley gets tangled. How do you think Stanley feels about Arthur right now?</a:t>
-            </a:r>
-            <a:endParaRPr lang="en-US" sz="1500" dirty="0"/>
-          </a:p>
-          <a:p>
-            <a:pPr indent="0" marL="0">
-              <a:buNone/>
-            </a:pPr>
-            <a:r>
-              <a:rPr lang="en-US" sz="1500" dirty="0">
-                <a:solidFill>
-                  <a:srgbClr val="1E293B"/>
-                </a:solidFill>
-                <a:latin typeface="Calibri" pitchFamily="34" charset="0"/>
-                <a:ea typeface="Calibri" pitchFamily="34" charset="-122"/>
-                <a:cs typeface="Calibri" pitchFamily="34" charset="-120"/>
-              </a:rPr>
-              <a:t>•  Arthur leaves the spool in a tree and Stanley gets tangled. How do you think Stanley feels about Arthur right now?</a:t>
+              <a:t>•  Stop when Ralph Jones says, “Well, George, I see you have bought some wallpaper.” A moment later Arthur says “Phooey!” and has to apologize. What happened in this scene that made him say it?</a:t>
             </a:r>
             <a:endParaRPr lang="en-US" sz="1500" dirty="0"/>
           </a:p>
